--- a/seti/presentation_and_pdf/Olifer5.PPTX
+++ b/seti/presentation_and_pdf/Olifer5.PPTX
@@ -7,17 +7,21 @@
   <p:sldIdLst>
     <p:sldId id="256" r:id="rId2"/>
     <p:sldId id="257" r:id="rId3"/>
-    <p:sldId id="261" r:id="rId4"/>
-    <p:sldId id="258" r:id="rId5"/>
-    <p:sldId id="259" r:id="rId6"/>
-    <p:sldId id="260" r:id="rId7"/>
-    <p:sldId id="262" r:id="rId8"/>
-    <p:sldId id="263" r:id="rId9"/>
-    <p:sldId id="264" r:id="rId10"/>
-    <p:sldId id="266" r:id="rId11"/>
-    <p:sldId id="267" r:id="rId12"/>
-    <p:sldId id="265" r:id="rId13"/>
-    <p:sldId id="268" r:id="rId14"/>
+    <p:sldId id="269" r:id="rId4"/>
+    <p:sldId id="270" r:id="rId5"/>
+    <p:sldId id="261" r:id="rId6"/>
+    <p:sldId id="258" r:id="rId7"/>
+    <p:sldId id="259" r:id="rId8"/>
+    <p:sldId id="260" r:id="rId9"/>
+    <p:sldId id="262" r:id="rId10"/>
+    <p:sldId id="271" r:id="rId11"/>
+    <p:sldId id="263" r:id="rId12"/>
+    <p:sldId id="264" r:id="rId13"/>
+    <p:sldId id="266" r:id="rId14"/>
+    <p:sldId id="267" r:id="rId15"/>
+    <p:sldId id="265" r:id="rId16"/>
+    <p:sldId id="272" r:id="rId17"/>
+    <p:sldId id="268" r:id="rId18"/>
   </p:sldIdLst>
   <p:sldSz cx="12192000" cy="6858000"/>
   <p:notesSz cx="6858000" cy="9144000"/>
@@ -116,6 +120,11 @@
       </a:defRPr>
     </a:lvl9pPr>
   </p:defaultTextStyle>
+  <p:extLst>
+    <p:ext uri="{EFAFB233-063F-42B5-8137-9DF3F51BA10A}">
+      <p15:sldGuideLst xmlns:p15="http://schemas.microsoft.com/office/powerpoint/2012/main"/>
+    </p:ext>
+  </p:extLst>
 </p:presentation>
 </file>
 
@@ -250,7 +259,7 @@
           <a:p>
             <a:fld id="{476BBF9B-1741-4511-B426-A95F2942AC32}" type="datetimeFigureOut">
               <a:rPr lang="ru-RU" smtClean="0"/>
-              <a:t>04.05.2026</a:t>
+              <a:t>12.05.2026</a:t>
             </a:fld>
             <a:endParaRPr lang="ru-RU"/>
           </a:p>
@@ -420,7 +429,7 @@
           <a:p>
             <a:fld id="{476BBF9B-1741-4511-B426-A95F2942AC32}" type="datetimeFigureOut">
               <a:rPr lang="ru-RU" smtClean="0"/>
-              <a:t>04.05.2026</a:t>
+              <a:t>12.05.2026</a:t>
             </a:fld>
             <a:endParaRPr lang="ru-RU"/>
           </a:p>
@@ -600,7 +609,7 @@
           <a:p>
             <a:fld id="{476BBF9B-1741-4511-B426-A95F2942AC32}" type="datetimeFigureOut">
               <a:rPr lang="ru-RU" smtClean="0"/>
-              <a:t>04.05.2026</a:t>
+              <a:t>12.05.2026</a:t>
             </a:fld>
             <a:endParaRPr lang="ru-RU"/>
           </a:p>
@@ -770,7 +779,7 @@
           <a:p>
             <a:fld id="{476BBF9B-1741-4511-B426-A95F2942AC32}" type="datetimeFigureOut">
               <a:rPr lang="ru-RU" smtClean="0"/>
-              <a:t>04.05.2026</a:t>
+              <a:t>12.05.2026</a:t>
             </a:fld>
             <a:endParaRPr lang="ru-RU"/>
           </a:p>
@@ -1016,7 +1025,7 @@
           <a:p>
             <a:fld id="{476BBF9B-1741-4511-B426-A95F2942AC32}" type="datetimeFigureOut">
               <a:rPr lang="ru-RU" smtClean="0"/>
-              <a:t>04.05.2026</a:t>
+              <a:t>12.05.2026</a:t>
             </a:fld>
             <a:endParaRPr lang="ru-RU"/>
           </a:p>
@@ -1248,7 +1257,7 @@
           <a:p>
             <a:fld id="{476BBF9B-1741-4511-B426-A95F2942AC32}" type="datetimeFigureOut">
               <a:rPr lang="ru-RU" smtClean="0"/>
-              <a:t>04.05.2026</a:t>
+              <a:t>12.05.2026</a:t>
             </a:fld>
             <a:endParaRPr lang="ru-RU"/>
           </a:p>
@@ -1615,7 +1624,7 @@
           <a:p>
             <a:fld id="{476BBF9B-1741-4511-B426-A95F2942AC32}" type="datetimeFigureOut">
               <a:rPr lang="ru-RU" smtClean="0"/>
-              <a:t>04.05.2026</a:t>
+              <a:t>12.05.2026</a:t>
             </a:fld>
             <a:endParaRPr lang="ru-RU"/>
           </a:p>
@@ -1733,7 +1742,7 @@
           <a:p>
             <a:fld id="{476BBF9B-1741-4511-B426-A95F2942AC32}" type="datetimeFigureOut">
               <a:rPr lang="ru-RU" smtClean="0"/>
-              <a:t>04.05.2026</a:t>
+              <a:t>12.05.2026</a:t>
             </a:fld>
             <a:endParaRPr lang="ru-RU"/>
           </a:p>
@@ -1828,7 +1837,7 @@
           <a:p>
             <a:fld id="{476BBF9B-1741-4511-B426-A95F2942AC32}" type="datetimeFigureOut">
               <a:rPr lang="ru-RU" smtClean="0"/>
-              <a:t>04.05.2026</a:t>
+              <a:t>12.05.2026</a:t>
             </a:fld>
             <a:endParaRPr lang="ru-RU"/>
           </a:p>
@@ -2105,7 +2114,7 @@
           <a:p>
             <a:fld id="{476BBF9B-1741-4511-B426-A95F2942AC32}" type="datetimeFigureOut">
               <a:rPr lang="ru-RU" smtClean="0"/>
-              <a:t>04.05.2026</a:t>
+              <a:t>12.05.2026</a:t>
             </a:fld>
             <a:endParaRPr lang="ru-RU"/>
           </a:p>
@@ -2358,7 +2367,7 @@
           <a:p>
             <a:fld id="{476BBF9B-1741-4511-B426-A95F2942AC32}" type="datetimeFigureOut">
               <a:rPr lang="ru-RU" smtClean="0"/>
-              <a:t>04.05.2026</a:t>
+              <a:t>12.05.2026</a:t>
             </a:fld>
             <a:endParaRPr lang="ru-RU"/>
           </a:p>
@@ -2571,7 +2580,7 @@
           <a:p>
             <a:fld id="{476BBF9B-1741-4511-B426-A95F2942AC32}" type="datetimeFigureOut">
               <a:rPr lang="ru-RU" smtClean="0"/>
-              <a:t>04.05.2026</a:t>
+              <a:t>12.05.2026</a:t>
             </a:fld>
             <a:endParaRPr lang="ru-RU"/>
           </a:p>
@@ -3103,6 +3112,25 @@
       </p:grpSpPr>
       <p:sp>
         <p:nvSpPr>
+          <p:cNvPr id="2" name="Заголовок 1"/>
+          <p:cNvSpPr>
+            <a:spLocks noGrp="1"/>
+          </p:cNvSpPr>
+          <p:nvPr>
+            <p:ph type="title"/>
+          </p:nvPr>
+        </p:nvSpPr>
+        <p:spPr/>
+        <p:txBody>
+          <a:bodyPr/>
+          <a:lstStyle/>
+          <a:p>
+            <a:endParaRPr lang="ru-RU"/>
+          </a:p>
+        </p:txBody>
+      </p:sp>
+      <p:sp>
+        <p:nvSpPr>
           <p:cNvPr id="3" name="Объект 2"/>
           <p:cNvSpPr>
             <a:spLocks noGrp="1"/>
@@ -3111,133 +3139,60 @@
             <p:ph idx="1"/>
           </p:nvPr>
         </p:nvSpPr>
-        <p:spPr>
+        <p:spPr/>
+        <p:txBody>
+          <a:bodyPr/>
+          <a:lstStyle/>
+          <a:p>
+            <a:endParaRPr lang="ru-RU"/>
+          </a:p>
+        </p:txBody>
+      </p:sp>
+      <p:pic>
+        <p:nvPicPr>
+          <p:cNvPr id="3074" name="Picture 2" descr="Picture background"/>
+          <p:cNvPicPr>
+            <a:picLocks noChangeAspect="1" noChangeArrowheads="1"/>
+          </p:cNvPicPr>
+          <p:nvPr/>
+        </p:nvPicPr>
+        <p:blipFill>
+          <a:blip r:embed="rId2">
+            <a:extLst>
+              <a:ext uri="{28A0092B-C50C-407E-A947-70E740481C1C}">
+                <a14:useLocalDpi xmlns:a14="http://schemas.microsoft.com/office/drawing/2010/main" val="0"/>
+              </a:ext>
+            </a:extLst>
+          </a:blip>
+          <a:srcRect/>
+          <a:stretch>
+            <a:fillRect/>
+          </a:stretch>
+        </p:blipFill>
+        <p:spPr bwMode="auto">
           <a:xfrm>
-            <a:off x="873368" y="580292"/>
-            <a:ext cx="11022623" cy="5596671"/>
+            <a:off x="669458" y="453333"/>
+            <a:ext cx="10853084" cy="5723630"/>
           </a:xfrm>
+          <a:prstGeom prst="rect">
+            <a:avLst/>
+          </a:prstGeom>
+          <a:noFill/>
+          <a:extLst>
+            <a:ext uri="{909E8E84-426E-40DD-AFC4-6F175D3DCCD1}">
+              <a14:hiddenFill xmlns:a14="http://schemas.microsoft.com/office/drawing/2010/main">
+                <a:solidFill>
+                  <a:srgbClr val="FFFFFF"/>
+                </a:solidFill>
+              </a14:hiddenFill>
+            </a:ext>
+          </a:extLst>
         </p:spPr>
-        <p:txBody>
-          <a:bodyPr>
-            <a:normAutofit lnSpcReduction="10000"/>
-          </a:bodyPr>
-          <a:lstStyle/>
-          <a:p>
-            <a:r>
-              <a:rPr lang="ru-RU" sz="3200" b="1" dirty="0"/>
-              <a:t>FIFO (</a:t>
-            </a:r>
-            <a:r>
-              <a:rPr lang="ru-RU" sz="3200" b="1" dirty="0" err="1"/>
-              <a:t>First</a:t>
-            </a:r>
-            <a:r>
-              <a:rPr lang="ru-RU" sz="3200" b="1" dirty="0"/>
-              <a:t> </a:t>
-            </a:r>
-            <a:r>
-              <a:rPr lang="ru-RU" sz="3200" b="1" dirty="0" err="1"/>
-              <a:t>In</a:t>
-            </a:r>
-            <a:r>
-              <a:rPr lang="ru-RU" sz="3200" b="1" dirty="0"/>
-              <a:t>, </a:t>
-            </a:r>
-            <a:r>
-              <a:rPr lang="ru-RU" sz="3200" b="1" dirty="0" err="1"/>
-              <a:t>First</a:t>
-            </a:r>
-            <a:r>
-              <a:rPr lang="ru-RU" sz="3200" b="1" dirty="0"/>
-              <a:t> </a:t>
-            </a:r>
-            <a:r>
-              <a:rPr lang="ru-RU" sz="3200" b="1" dirty="0" err="1"/>
-              <a:t>Out</a:t>
-            </a:r>
-            <a:r>
-              <a:rPr lang="ru-RU" sz="3200" b="1" dirty="0"/>
-              <a:t>):</a:t>
-            </a:r>
-            <a:r>
-              <a:rPr lang="ru-RU" sz="3200" dirty="0"/>
-              <a:t> Общая очередь. «Кто первым встал — того и отправили». Нет приоритетов</a:t>
-            </a:r>
-            <a:r>
-              <a:rPr lang="ru-RU" sz="3200" dirty="0" smtClean="0"/>
-              <a:t>.</a:t>
-            </a:r>
-          </a:p>
-          <a:p>
-            <a:endParaRPr lang="ru-RU" sz="3200" dirty="0"/>
-          </a:p>
-          <a:p>
-            <a:r>
-              <a:rPr lang="ru-RU" sz="3200" b="1" dirty="0"/>
-              <a:t>Приоритетные очереди (PQ):</a:t>
-            </a:r>
-            <a:endParaRPr lang="ru-RU" sz="3200" dirty="0"/>
-          </a:p>
-          <a:p>
-            <a:pPr lvl="1"/>
-            <a:r>
-              <a:rPr lang="ru-RU" sz="3200" dirty="0"/>
-              <a:t>Есть несколько очередей (Высокая, Средняя, Низкая).</a:t>
-            </a:r>
-          </a:p>
-          <a:p>
-            <a:pPr lvl="1"/>
-            <a:r>
-              <a:rPr lang="ru-RU" sz="3200" i="1" dirty="0"/>
-              <a:t>Минус:</a:t>
-            </a:r>
-            <a:r>
-              <a:rPr lang="ru-RU" sz="3200" dirty="0"/>
-              <a:t> «Голод» низкоприоритетного трафика</a:t>
-            </a:r>
-            <a:r>
-              <a:rPr lang="ru-RU" sz="3200" dirty="0" smtClean="0"/>
-              <a:t>.</a:t>
-            </a:r>
-          </a:p>
-          <a:p>
-            <a:pPr lvl="1"/>
-            <a:endParaRPr lang="ru-RU" sz="3200" dirty="0"/>
-          </a:p>
-          <a:p>
-            <a:r>
-              <a:rPr lang="ru-RU" sz="3200" b="1" dirty="0"/>
-              <a:t>Взвешенные очереди (WFQ):</a:t>
-            </a:r>
-            <a:endParaRPr lang="ru-RU" sz="3200" dirty="0"/>
-          </a:p>
-          <a:p>
-            <a:pPr lvl="1"/>
-            <a:r>
-              <a:rPr lang="ru-RU" sz="3200" dirty="0"/>
-              <a:t>Каждому потоку выделяется доля пропускной способности.</a:t>
-            </a:r>
-          </a:p>
-          <a:p>
-            <a:pPr lvl="1"/>
-            <a:r>
-              <a:rPr lang="ru-RU" sz="3200" i="1" dirty="0"/>
-              <a:t>Плюс:</a:t>
-            </a:r>
-            <a:r>
-              <a:rPr lang="ru-RU" sz="3200" dirty="0"/>
-              <a:t> Справедливость, предсказуемость.</a:t>
-            </a:r>
-          </a:p>
-          <a:p>
-            <a:endParaRPr lang="ru-RU" dirty="0"/>
-          </a:p>
-        </p:txBody>
-      </p:sp>
+      </p:pic>
     </p:spTree>
     <p:extLst>
       <p:ext uri="{BB962C8B-B14F-4D97-AF65-F5344CB8AC3E}">
-        <p14:creationId xmlns:p14="http://schemas.microsoft.com/office/powerpoint/2010/main" val="1790346460"/>
+        <p14:creationId xmlns:p14="http://schemas.microsoft.com/office/powerpoint/2010/main" val="666670984"/>
       </p:ext>
     </p:extLst>
   </p:cSld>
@@ -3274,2485 +3229,6 @@
             <p:ph type="title"/>
           </p:nvPr>
         </p:nvSpPr>
-        <p:spPr>
-          <a:xfrm>
-            <a:off x="838200" y="365125"/>
-            <a:ext cx="10090638" cy="1325563"/>
-          </a:xfrm>
-        </p:spPr>
-        <p:txBody>
-          <a:bodyPr>
-            <a:normAutofit/>
-          </a:bodyPr>
-          <a:lstStyle/>
-          <a:p>
-            <a:r>
-              <a:rPr lang="ru-RU" b="1" dirty="0"/>
-              <a:t>Инструменты </a:t>
-            </a:r>
-            <a:r>
-              <a:rPr lang="en-US" b="1" dirty="0" err="1"/>
-              <a:t>QoS</a:t>
-            </a:r>
-            <a:r>
-              <a:rPr lang="en-US" b="1" dirty="0"/>
-              <a:t> — </a:t>
-            </a:r>
-            <a:r>
-              <a:rPr lang="ru-RU" b="1" dirty="0"/>
-              <a:t>Кондиционирование </a:t>
-            </a:r>
-            <a:r>
-              <a:rPr lang="ru-RU" b="1" dirty="0" smtClean="0"/>
-              <a:t>трафика</a:t>
-            </a:r>
-            <a:endParaRPr lang="ru-RU" dirty="0"/>
-          </a:p>
-        </p:txBody>
-      </p:sp>
-      <p:sp>
-        <p:nvSpPr>
-          <p:cNvPr id="3" name="Объект 2"/>
-          <p:cNvSpPr>
-            <a:spLocks noGrp="1"/>
-          </p:cNvSpPr>
-          <p:nvPr>
-            <p:ph idx="1"/>
-          </p:nvPr>
-        </p:nvSpPr>
-        <p:spPr/>
-        <p:txBody>
-          <a:bodyPr>
-            <a:normAutofit fontScale="92500"/>
-          </a:bodyPr>
-          <a:lstStyle/>
-          <a:p>
-            <a:r>
-              <a:rPr lang="ru-RU" dirty="0"/>
-              <a:t>Механизмы ограничения и формирования трафика (</a:t>
-            </a:r>
-            <a:r>
-              <a:rPr lang="en-US" dirty="0"/>
-              <a:t>Traffic Policing / Shaping) .</a:t>
-            </a:r>
-          </a:p>
-          <a:p>
-            <a:r>
-              <a:rPr lang="ru-RU" b="1" dirty="0"/>
-              <a:t>Схема «Маркерное ведро» (</a:t>
-            </a:r>
-            <a:r>
-              <a:rPr lang="en-US" b="1" dirty="0"/>
-              <a:t>Token Bucket):</a:t>
-            </a:r>
-            <a:endParaRPr lang="en-US" dirty="0"/>
-          </a:p>
-          <a:p>
-            <a:r>
-              <a:rPr lang="ru-RU" dirty="0"/>
-              <a:t>Пакеты проходят через «контроллер».</a:t>
-            </a:r>
-          </a:p>
-          <a:p>
-            <a:r>
-              <a:rPr lang="ru-RU" dirty="0"/>
-              <a:t>Если трафик укладывается в оговоренный лимит (</a:t>
-            </a:r>
-            <a:r>
-              <a:rPr lang="en-US" dirty="0"/>
-              <a:t>CIR — Committed Information Rate) -&gt; </a:t>
-            </a:r>
-            <a:r>
-              <a:rPr lang="ru-RU" dirty="0"/>
-              <a:t>пропускаем.</a:t>
-            </a:r>
-          </a:p>
-          <a:p>
-            <a:r>
-              <a:rPr lang="ru-RU" dirty="0"/>
-              <a:t>Если превышает:</a:t>
-            </a:r>
-          </a:p>
-          <a:p>
-            <a:pPr lvl="1"/>
-            <a:r>
-              <a:rPr lang="en-US" b="1" dirty="0"/>
-              <a:t>Policing:</a:t>
-            </a:r>
-            <a:r>
-              <a:rPr lang="en-US" dirty="0"/>
-              <a:t> </a:t>
-            </a:r>
-            <a:r>
-              <a:rPr lang="ru-RU" dirty="0"/>
-              <a:t>Отбросить лишнее (</a:t>
-            </a:r>
-            <a:r>
-              <a:rPr lang="en-US" dirty="0"/>
-              <a:t>Drop).</a:t>
-            </a:r>
-          </a:p>
-          <a:p>
-            <a:pPr lvl="1"/>
-            <a:r>
-              <a:rPr lang="en-US" b="1" dirty="0"/>
-              <a:t>Shaping:</a:t>
-            </a:r>
-            <a:r>
-              <a:rPr lang="en-US" dirty="0"/>
-              <a:t> </a:t>
-            </a:r>
-            <a:r>
-              <a:rPr lang="ru-RU" dirty="0"/>
-              <a:t>Задержать лишнее в буфере (</a:t>
-            </a:r>
-            <a:r>
-              <a:rPr lang="en-US" dirty="0"/>
-              <a:t>Buffer).</a:t>
-            </a:r>
-          </a:p>
-          <a:p>
-            <a:pPr marL="0" indent="0">
-              <a:buNone/>
-            </a:pPr>
-            <a:r>
-              <a:rPr lang="ru-RU" b="1" dirty="0"/>
-              <a:t>Зачем:</a:t>
-            </a:r>
-            <a:r>
-              <a:rPr lang="ru-RU" dirty="0"/>
-              <a:t> Сглаживание пульсации трафика, чтобы перегружать магистраль.</a:t>
-            </a:r>
-          </a:p>
-        </p:txBody>
-      </p:sp>
-    </p:spTree>
-    <p:extLst>
-      <p:ext uri="{BB962C8B-B14F-4D97-AF65-F5344CB8AC3E}">
-        <p14:creationId xmlns:p14="http://schemas.microsoft.com/office/powerpoint/2010/main" val="2131951919"/>
-      </p:ext>
-    </p:extLst>
-  </p:cSld>
-  <p:clrMapOvr>
-    <a:masterClrMapping/>
-  </p:clrMapOvr>
-</p:sld>
-</file>
-
-<file path=ppt/slides/slide12.xml><?xml version="1.0" encoding="utf-8"?>
-<p:sld xmlns:a="http://schemas.openxmlformats.org/drawingml/2006/main" xmlns:r="http://schemas.openxmlformats.org/officeDocument/2006/relationships" xmlns:p="http://schemas.openxmlformats.org/presentationml/2006/main">
-  <p:cSld>
-    <p:spTree>
-      <p:nvGrpSpPr>
-        <p:cNvPr id="1" name=""/>
-        <p:cNvGrpSpPr/>
-        <p:nvPr/>
-      </p:nvGrpSpPr>
-      <p:grpSpPr>
-        <a:xfrm>
-          <a:off x="0" y="0"/>
-          <a:ext cx="0" cy="0"/>
-          <a:chOff x="0" y="0"/>
-          <a:chExt cx="0" cy="0"/>
-        </a:xfrm>
-      </p:grpSpPr>
-      <p:sp>
-        <p:nvSpPr>
-          <p:cNvPr id="2" name="Заголовок 1"/>
-          <p:cNvSpPr>
-            <a:spLocks noGrp="1"/>
-          </p:cNvSpPr>
-          <p:nvPr>
-            <p:ph type="title"/>
-          </p:nvPr>
-        </p:nvSpPr>
-        <p:spPr/>
-        <p:txBody>
-          <a:bodyPr/>
-          <a:lstStyle/>
-          <a:p>
-            <a:r>
-              <a:rPr lang="ru-RU" b="1" dirty="0"/>
-              <a:t>Архитектуры </a:t>
-            </a:r>
-            <a:r>
-              <a:rPr lang="en-US" b="1" dirty="0" err="1" smtClean="0"/>
-              <a:t>QoS</a:t>
-            </a:r>
-            <a:endParaRPr lang="ru-RU" dirty="0"/>
-          </a:p>
-        </p:txBody>
-      </p:sp>
-      <p:sp>
-        <p:nvSpPr>
-          <p:cNvPr id="3" name="Объект 2"/>
-          <p:cNvSpPr>
-            <a:spLocks noGrp="1"/>
-          </p:cNvSpPr>
-          <p:nvPr>
-            <p:ph idx="1"/>
-          </p:nvPr>
-        </p:nvSpPr>
-        <p:spPr/>
-        <p:txBody>
-          <a:bodyPr>
-            <a:normAutofit lnSpcReduction="10000"/>
-          </a:bodyPr>
-          <a:lstStyle/>
-          <a:p>
-            <a:pPr marL="0" indent="0">
-              <a:buNone/>
-            </a:pPr>
-            <a:r>
-              <a:rPr lang="ru-RU" dirty="0"/>
-              <a:t>На практике </a:t>
-            </a:r>
-            <a:r>
-              <a:rPr lang="ru-RU" dirty="0" err="1"/>
-              <a:t>QoS</a:t>
-            </a:r>
-            <a:r>
-              <a:rPr lang="ru-RU" dirty="0"/>
-              <a:t> реализуется двумя основными моделями:</a:t>
-            </a:r>
-          </a:p>
-          <a:p>
-            <a:pPr marL="0" indent="0">
-              <a:buNone/>
-            </a:pPr>
-            <a:r>
-              <a:rPr lang="ru-RU" b="1" dirty="0" err="1"/>
-              <a:t>IntServ</a:t>
-            </a:r>
-            <a:r>
-              <a:rPr lang="ru-RU" b="1" dirty="0"/>
-              <a:t> (</a:t>
-            </a:r>
-            <a:r>
-              <a:rPr lang="ru-RU" b="1" dirty="0" err="1"/>
-              <a:t>Integrated</a:t>
-            </a:r>
-            <a:r>
-              <a:rPr lang="ru-RU" b="1" dirty="0"/>
-              <a:t> </a:t>
-            </a:r>
-            <a:r>
-              <a:rPr lang="ru-RU" b="1" dirty="0" err="1"/>
-              <a:t>Services</a:t>
-            </a:r>
-            <a:r>
-              <a:rPr lang="ru-RU" b="1" dirty="0"/>
-              <a:t>) / RSVP:</a:t>
-            </a:r>
-            <a:endParaRPr lang="ru-RU" dirty="0"/>
-          </a:p>
-          <a:p>
-            <a:pPr lvl="1"/>
-            <a:r>
-              <a:rPr lang="ru-RU" b="1" dirty="0"/>
-              <a:t>Как работает:</a:t>
-            </a:r>
-            <a:r>
-              <a:rPr lang="ru-RU" dirty="0"/>
-              <a:t> Резервируем ресурсы заранее (как заказ столика в ресторане). Протокол сигнализации — RSVP.</a:t>
-            </a:r>
-          </a:p>
-          <a:p>
-            <a:pPr lvl="1"/>
-            <a:r>
-              <a:rPr lang="ru-RU" b="1" dirty="0"/>
-              <a:t>Минус:</a:t>
-            </a:r>
-            <a:r>
-              <a:rPr lang="ru-RU" dirty="0"/>
-              <a:t> Плохо масштабируется для больших сетей (Интернет).</a:t>
-            </a:r>
-          </a:p>
-          <a:p>
-            <a:pPr marL="0" indent="0">
-              <a:buNone/>
-            </a:pPr>
-            <a:r>
-              <a:rPr lang="ru-RU" b="1" dirty="0" err="1"/>
-              <a:t>DiffServ</a:t>
-            </a:r>
-            <a:r>
-              <a:rPr lang="ru-RU" b="1" dirty="0"/>
-              <a:t> (</a:t>
-            </a:r>
-            <a:r>
-              <a:rPr lang="ru-RU" b="1" dirty="0" err="1"/>
-              <a:t>Differentiated</a:t>
-            </a:r>
-            <a:r>
-              <a:rPr lang="ru-RU" b="1" dirty="0"/>
-              <a:t> </a:t>
-            </a:r>
-            <a:r>
-              <a:rPr lang="ru-RU" b="1" dirty="0" err="1"/>
-              <a:t>Services</a:t>
-            </a:r>
-            <a:r>
-              <a:rPr lang="ru-RU" b="1" dirty="0"/>
-              <a:t>):</a:t>
-            </a:r>
-            <a:endParaRPr lang="ru-RU" dirty="0"/>
-          </a:p>
-          <a:p>
-            <a:pPr lvl="1"/>
-            <a:r>
-              <a:rPr lang="ru-RU" b="1" dirty="0"/>
-              <a:t>Как работает:</a:t>
-            </a:r>
-            <a:r>
-              <a:rPr lang="ru-RU" dirty="0"/>
-              <a:t> Маркируем пакеты метками (метка в поле DSCP заголовка IP) .</a:t>
-            </a:r>
-          </a:p>
-          <a:p>
-            <a:pPr lvl="1"/>
-            <a:r>
-              <a:rPr lang="ru-RU" b="1" dirty="0"/>
-              <a:t>Действие:</a:t>
-            </a:r>
-            <a:r>
-              <a:rPr lang="ru-RU" dirty="0"/>
-              <a:t> «Золотым» пакетам — лучший сервис, «Серебряным» — обычный.</a:t>
-            </a:r>
-          </a:p>
-          <a:p>
-            <a:pPr lvl="1"/>
-            <a:r>
-              <a:rPr lang="ru-RU" b="1" dirty="0"/>
-              <a:t>Плюс:</a:t>
-            </a:r>
-            <a:r>
-              <a:rPr lang="ru-RU" dirty="0"/>
-              <a:t> Хорошо масштабируется</a:t>
-            </a:r>
-            <a:r>
-              <a:rPr lang="ru-RU" dirty="0" smtClean="0"/>
-              <a:t>.</a:t>
-            </a:r>
-            <a:br>
-              <a:rPr lang="ru-RU" dirty="0" smtClean="0"/>
-            </a:br>
-            <a:endParaRPr lang="ru-RU" dirty="0"/>
-          </a:p>
-        </p:txBody>
-      </p:sp>
-    </p:spTree>
-    <p:extLst>
-      <p:ext uri="{BB962C8B-B14F-4D97-AF65-F5344CB8AC3E}">
-        <p14:creationId xmlns:p14="http://schemas.microsoft.com/office/powerpoint/2010/main" val="76894491"/>
-      </p:ext>
-    </p:extLst>
-  </p:cSld>
-  <p:clrMapOvr>
-    <a:masterClrMapping/>
-  </p:clrMapOvr>
-</p:sld>
-</file>
-
-<file path=ppt/slides/slide13.xml><?xml version="1.0" encoding="utf-8"?>
-<p:sld xmlns:a="http://schemas.openxmlformats.org/drawingml/2006/main" xmlns:r="http://schemas.openxmlformats.org/officeDocument/2006/relationships" xmlns:p="http://schemas.openxmlformats.org/presentationml/2006/main">
-  <p:cSld>
-    <p:spTree>
-      <p:nvGrpSpPr>
-        <p:cNvPr id="1" name=""/>
-        <p:cNvGrpSpPr/>
-        <p:nvPr/>
-      </p:nvGrpSpPr>
-      <p:grpSpPr>
-        <a:xfrm>
-          <a:off x="0" y="0"/>
-          <a:ext cx="0" cy="0"/>
-          <a:chOff x="0" y="0"/>
-          <a:chExt cx="0" cy="0"/>
-        </a:xfrm>
-      </p:grpSpPr>
-      <p:sp>
-        <p:nvSpPr>
-          <p:cNvPr id="4" name="Прямоугольник 3"/>
-          <p:cNvSpPr/>
-          <p:nvPr/>
-        </p:nvSpPr>
-        <p:spPr>
-          <a:xfrm>
-            <a:off x="3270737" y="2769576"/>
-            <a:ext cx="6365631" cy="830997"/>
-          </a:xfrm>
-          <a:prstGeom prst="rect">
-            <a:avLst/>
-          </a:prstGeom>
-        </p:spPr>
-        <p:txBody>
-          <a:bodyPr wrap="square">
-            <a:spAutoFit/>
-          </a:bodyPr>
-          <a:lstStyle/>
-          <a:p>
-            <a:r>
-              <a:rPr lang="ru-RU" sz="4800" dirty="0" smtClean="0"/>
-              <a:t>Спасибо за внимание</a:t>
-            </a:r>
-            <a:endParaRPr lang="ru-RU" sz="4800" dirty="0"/>
-          </a:p>
-        </p:txBody>
-      </p:sp>
-    </p:spTree>
-    <p:extLst>
-      <p:ext uri="{BB962C8B-B14F-4D97-AF65-F5344CB8AC3E}">
-        <p14:creationId xmlns:p14="http://schemas.microsoft.com/office/powerpoint/2010/main" val="3955430252"/>
-      </p:ext>
-    </p:extLst>
-  </p:cSld>
-  <p:clrMapOvr>
-    <a:masterClrMapping/>
-  </p:clrMapOvr>
-</p:sld>
-</file>
-
-<file path=ppt/slides/slide2.xml><?xml version="1.0" encoding="utf-8"?>
-<p:sld xmlns:a="http://schemas.openxmlformats.org/drawingml/2006/main" xmlns:r="http://schemas.openxmlformats.org/officeDocument/2006/relationships" xmlns:p="http://schemas.openxmlformats.org/presentationml/2006/main">
-  <p:cSld>
-    <p:spTree>
-      <p:nvGrpSpPr>
-        <p:cNvPr id="1" name=""/>
-        <p:cNvGrpSpPr/>
-        <p:nvPr/>
-      </p:nvGrpSpPr>
-      <p:grpSpPr>
-        <a:xfrm>
-          <a:off x="0" y="0"/>
-          <a:ext cx="0" cy="0"/>
-          <a:chOff x="0" y="0"/>
-          <a:chExt cx="0" cy="0"/>
-        </a:xfrm>
-      </p:grpSpPr>
-      <p:sp>
-        <p:nvSpPr>
-          <p:cNvPr id="3" name="Объект 2"/>
-          <p:cNvSpPr>
-            <a:spLocks noGrp="1"/>
-          </p:cNvSpPr>
-          <p:nvPr>
-            <p:ph idx="1"/>
-          </p:nvPr>
-        </p:nvSpPr>
-        <p:spPr>
-          <a:xfrm>
-            <a:off x="838200" y="536330"/>
-            <a:ext cx="10515600" cy="5926015"/>
-          </a:xfrm>
-        </p:spPr>
-        <p:txBody>
-          <a:bodyPr>
-            <a:normAutofit/>
-          </a:bodyPr>
-          <a:lstStyle/>
-          <a:p>
-            <a:pPr marL="0" indent="0">
-              <a:buNone/>
-            </a:pPr>
-            <a:r>
-              <a:rPr lang="ru-RU" sz="4000" b="1" dirty="0" smtClean="0"/>
-              <a:t>Эволюция требований к сети:</a:t>
-            </a:r>
-            <a:endParaRPr lang="en-US" sz="4000" b="1" dirty="0" smtClean="0"/>
-          </a:p>
-          <a:p>
-            <a:r>
-              <a:rPr lang="ru-RU" dirty="0"/>
-              <a:t>Раньше (80-е гг.) доминировали нетребовательные приложения (почта, копирование файлов), которые работали в режиме </a:t>
-            </a:r>
-            <a:r>
-              <a:rPr lang="ru-RU" b="1" dirty="0"/>
-              <a:t>«по мере возможности» (</a:t>
-            </a:r>
-            <a:r>
-              <a:rPr lang="ru-RU" b="1" dirty="0" err="1" smtClean="0"/>
-              <a:t>best-effort</a:t>
-            </a:r>
-            <a:r>
-              <a:rPr lang="en-US" b="1" dirty="0" smtClean="0"/>
-              <a:t> - </a:t>
-            </a:r>
-            <a:r>
-              <a:rPr lang="ru-RU" b="1" dirty="0"/>
-              <a:t>максимальные усилия</a:t>
-            </a:r>
-            <a:r>
-              <a:rPr lang="ru-RU" b="1" dirty="0" smtClean="0"/>
-              <a:t>)</a:t>
-            </a:r>
-            <a:r>
-              <a:rPr lang="ru-RU" dirty="0"/>
-              <a:t> .</a:t>
-            </a:r>
-          </a:p>
-          <a:p>
-            <a:r>
-              <a:rPr lang="ru-RU" b="1" dirty="0"/>
-              <a:t>Ситуация сейчас:</a:t>
-            </a:r>
-            <a:r>
-              <a:rPr lang="ru-RU" dirty="0"/>
-              <a:t> Появление мультимедиа, IP-телефонии и видеоконференций.</a:t>
-            </a:r>
-          </a:p>
-          <a:p>
-            <a:r>
-              <a:rPr lang="ru-RU" b="1" dirty="0"/>
-              <a:t>Проблема:</a:t>
-            </a:r>
-            <a:r>
-              <a:rPr lang="ru-RU" dirty="0"/>
-              <a:t> Простое повышение пропускной способности решает проблему только отчасти. Новым приложениям нужны не просто «килобайты в секунду», а </a:t>
-            </a:r>
-            <a:r>
-              <a:rPr lang="ru-RU" b="1" dirty="0"/>
-              <a:t>гарантии</a:t>
-            </a:r>
-            <a:r>
-              <a:rPr lang="ru-RU" dirty="0"/>
-              <a:t> задержки и стабильности (</a:t>
-            </a:r>
-            <a:r>
-              <a:rPr lang="ru-RU" dirty="0" err="1"/>
-              <a:t>QoS</a:t>
-            </a:r>
-            <a:r>
-              <a:rPr lang="ru-RU" dirty="0" smtClean="0"/>
-              <a:t>)</a:t>
-            </a:r>
-            <a:endParaRPr lang="en-US" dirty="0" smtClean="0"/>
-          </a:p>
-          <a:p>
-            <a:pPr marL="0" indent="0">
-              <a:buNone/>
-            </a:pPr>
-            <a:endParaRPr lang="en-US" dirty="0" smtClean="0"/>
-          </a:p>
-          <a:p>
-            <a:pPr marL="0" indent="0">
-              <a:buNone/>
-            </a:pPr>
-            <a:r>
-              <a:rPr lang="ru-RU" dirty="0" smtClean="0"/>
-              <a:t>Современным </a:t>
-            </a:r>
-            <a:r>
-              <a:rPr lang="ru-RU" dirty="0"/>
-              <a:t>сетям требуется механизм обеспечения качества обслуживания (</a:t>
-            </a:r>
-            <a:r>
-              <a:rPr lang="ru-RU" dirty="0" err="1"/>
-              <a:t>Quality</a:t>
-            </a:r>
-            <a:r>
-              <a:rPr lang="ru-RU" dirty="0"/>
-              <a:t> </a:t>
-            </a:r>
-            <a:r>
-              <a:rPr lang="ru-RU" dirty="0" err="1"/>
-              <a:t>of</a:t>
-            </a:r>
-            <a:r>
-              <a:rPr lang="ru-RU" dirty="0"/>
-              <a:t> </a:t>
-            </a:r>
-            <a:r>
-              <a:rPr lang="ru-RU" dirty="0" err="1"/>
-              <a:t>Service</a:t>
-            </a:r>
-            <a:r>
-              <a:rPr lang="ru-RU" dirty="0"/>
-              <a:t>, </a:t>
-            </a:r>
-            <a:r>
-              <a:rPr lang="ru-RU" dirty="0" err="1"/>
-              <a:t>QoS</a:t>
-            </a:r>
-            <a:r>
-              <a:rPr lang="ru-RU" dirty="0"/>
-              <a:t>)</a:t>
-            </a:r>
-          </a:p>
-          <a:p>
-            <a:pPr marL="0" indent="0">
-              <a:buNone/>
-            </a:pPr>
-            <a:endParaRPr lang="ru-RU" sz="4000" dirty="0"/>
-          </a:p>
-        </p:txBody>
-      </p:sp>
-    </p:spTree>
-    <p:extLst>
-      <p:ext uri="{BB962C8B-B14F-4D97-AF65-F5344CB8AC3E}">
-        <p14:creationId xmlns:p14="http://schemas.microsoft.com/office/powerpoint/2010/main" val="4019100266"/>
-      </p:ext>
-    </p:extLst>
-  </p:cSld>
-  <p:clrMapOvr>
-    <a:masterClrMapping/>
-  </p:clrMapOvr>
-</p:sld>
-</file>
-
-<file path=ppt/slides/slide3.xml><?xml version="1.0" encoding="utf-8"?>
-<p:sld xmlns:a="http://schemas.openxmlformats.org/drawingml/2006/main" xmlns:r="http://schemas.openxmlformats.org/officeDocument/2006/relationships" xmlns:p="http://schemas.openxmlformats.org/presentationml/2006/main">
-  <p:cSld>
-    <p:spTree>
-      <p:nvGrpSpPr>
-        <p:cNvPr id="1" name=""/>
-        <p:cNvGrpSpPr/>
-        <p:nvPr/>
-      </p:nvGrpSpPr>
-      <p:grpSpPr>
-        <a:xfrm>
-          <a:off x="0" y="0"/>
-          <a:ext cx="0" cy="0"/>
-          <a:chOff x="0" y="0"/>
-          <a:chExt cx="0" cy="0"/>
-        </a:xfrm>
-      </p:grpSpPr>
-      <p:sp>
-        <p:nvSpPr>
-          <p:cNvPr id="5" name="Прямоугольник 4"/>
-          <p:cNvSpPr/>
-          <p:nvPr/>
-        </p:nvSpPr>
-        <p:spPr>
-          <a:xfrm>
-            <a:off x="3420208" y="2602523"/>
-            <a:ext cx="5706208" cy="923330"/>
-          </a:xfrm>
-          <a:prstGeom prst="rect">
-            <a:avLst/>
-          </a:prstGeom>
-        </p:spPr>
-        <p:txBody>
-          <a:bodyPr wrap="square">
-            <a:spAutoFit/>
-          </a:bodyPr>
-          <a:lstStyle/>
-          <a:p>
-            <a:r>
-              <a:rPr lang="ru-RU" sz="5400" b="1" dirty="0">
-                <a:solidFill>
-                  <a:srgbClr val="0F1115"/>
-                </a:solidFill>
-                <a:latin typeface="quote-cjk-patch"/>
-              </a:rPr>
-              <a:t>Х</a:t>
-            </a:r>
-            <a:r>
-              <a:rPr lang="ru-RU" sz="5400" b="1" dirty="0" smtClean="0">
-                <a:solidFill>
-                  <a:srgbClr val="0F1115"/>
-                </a:solidFill>
-                <a:effectLst/>
-                <a:latin typeface="quote-cjk-patch"/>
-              </a:rPr>
-              <a:t>арактеристики</a:t>
-            </a:r>
-            <a:endParaRPr lang="ru-RU" sz="5400" b="1" dirty="0">
-              <a:solidFill>
-                <a:srgbClr val="0F1115"/>
-              </a:solidFill>
-              <a:effectLst/>
-              <a:latin typeface="quote-cjk-patch"/>
-            </a:endParaRPr>
-          </a:p>
-        </p:txBody>
-      </p:sp>
-    </p:spTree>
-    <p:extLst>
-      <p:ext uri="{BB962C8B-B14F-4D97-AF65-F5344CB8AC3E}">
-        <p14:creationId xmlns:p14="http://schemas.microsoft.com/office/powerpoint/2010/main" val="552652077"/>
-      </p:ext>
-    </p:extLst>
-  </p:cSld>
-  <p:clrMapOvr>
-    <a:masterClrMapping/>
-  </p:clrMapOvr>
-</p:sld>
-</file>
-
-<file path=ppt/slides/slide4.xml><?xml version="1.0" encoding="utf-8"?>
-<p:sld xmlns:a="http://schemas.openxmlformats.org/drawingml/2006/main" xmlns:r="http://schemas.openxmlformats.org/officeDocument/2006/relationships" xmlns:p="http://schemas.openxmlformats.org/presentationml/2006/main">
-  <p:cSld>
-    <p:spTree>
-      <p:nvGrpSpPr>
-        <p:cNvPr id="1" name=""/>
-        <p:cNvGrpSpPr/>
-        <p:nvPr/>
-      </p:nvGrpSpPr>
-      <p:grpSpPr>
-        <a:xfrm>
-          <a:off x="0" y="0"/>
-          <a:ext cx="0" cy="0"/>
-          <a:chOff x="0" y="0"/>
-          <a:chExt cx="0" cy="0"/>
-        </a:xfrm>
-      </p:grpSpPr>
-      <p:sp>
-        <p:nvSpPr>
-          <p:cNvPr id="2" name="Заголовок 1"/>
-          <p:cNvSpPr>
-            <a:spLocks noGrp="1"/>
-          </p:cNvSpPr>
-          <p:nvPr>
-            <p:ph type="title"/>
-          </p:nvPr>
-        </p:nvSpPr>
-        <p:spPr/>
-        <p:txBody>
-          <a:bodyPr>
-            <a:normAutofit/>
-          </a:bodyPr>
-          <a:lstStyle/>
-          <a:p>
-            <a:r>
-              <a:rPr lang="ru-RU" sz="4000" b="1" dirty="0"/>
-              <a:t>Составляющие</a:t>
-            </a:r>
-            <a:r>
-              <a:rPr lang="ru-RU" b="1" dirty="0"/>
-              <a:t> </a:t>
-            </a:r>
-            <a:r>
-              <a:rPr lang="ru-RU" b="1" dirty="0" smtClean="0"/>
-              <a:t>задержки</a:t>
-            </a:r>
-            <a:endParaRPr lang="ru-RU" b="1" dirty="0"/>
-          </a:p>
-        </p:txBody>
-      </p:sp>
-      <p:graphicFrame>
-        <p:nvGraphicFramePr>
-          <p:cNvPr id="5" name="Объект 4"/>
-          <p:cNvGraphicFramePr>
-            <a:graphicFrameLocks noGrp="1"/>
-          </p:cNvGraphicFramePr>
-          <p:nvPr>
-            <p:ph idx="1"/>
-            <p:extLst>
-              <p:ext uri="{D42A27DB-BD31-4B8C-83A1-F6EECF244321}">
-                <p14:modId xmlns:p14="http://schemas.microsoft.com/office/powerpoint/2010/main" val="3578073526"/>
-              </p:ext>
-            </p:extLst>
-          </p:nvPr>
-        </p:nvGraphicFramePr>
-        <p:xfrm>
-          <a:off x="1875691" y="2060246"/>
-          <a:ext cx="8440617" cy="4402100"/>
-        </p:xfrm>
-        <a:graphic>
-          <a:graphicData uri="http://schemas.openxmlformats.org/drawingml/2006/table">
-            <a:tbl>
-              <a:tblPr/>
-              <a:tblGrid>
-                <a:gridCol w="2813539">
-                  <a:extLst>
-                    <a:ext uri="{9D8B030D-6E8A-4147-A177-3AD203B41FA5}">
-                      <a16:colId xmlns:a16="http://schemas.microsoft.com/office/drawing/2014/main" val="273212345"/>
-                    </a:ext>
-                  </a:extLst>
-                </a:gridCol>
-                <a:gridCol w="2813539">
-                  <a:extLst>
-                    <a:ext uri="{9D8B030D-6E8A-4147-A177-3AD203B41FA5}">
-                      <a16:colId xmlns:a16="http://schemas.microsoft.com/office/drawing/2014/main" val="98614195"/>
-                    </a:ext>
-                  </a:extLst>
-                </a:gridCol>
-                <a:gridCol w="2813539">
-                  <a:extLst>
-                    <a:ext uri="{9D8B030D-6E8A-4147-A177-3AD203B41FA5}">
-                      <a16:colId xmlns:a16="http://schemas.microsoft.com/office/drawing/2014/main" val="1636797227"/>
-                    </a:ext>
-                  </a:extLst>
-                </a:gridCol>
-              </a:tblGrid>
-              <a:tr h="553666">
-                <a:tc>
-                  <a:txBody>
-                    <a:bodyPr/>
-                    <a:lstStyle/>
-                    <a:p>
-                      <a:pPr algn="l"/>
-                      <a:r>
-                        <a:rPr lang="ru-RU" b="0">
-                          <a:effectLst/>
-                          <a:latin typeface="quote-cjk-patch"/>
-                        </a:rPr>
-                        <a:t>Тип задержки</a:t>
-                      </a:r>
-                    </a:p>
-                  </a:txBody>
-                  <a:tcPr marR="152400" marT="95250" marB="95250" anchor="ctr">
-                    <a:lnL>
-                      <a:noFill/>
-                    </a:lnL>
-                    <a:lnR>
-                      <a:noFill/>
-                    </a:lnR>
-                    <a:lnT>
-                      <a:noFill/>
-                    </a:lnT>
-                    <a:lnB>
-                      <a:noFill/>
-                    </a:lnB>
-                    <a:solidFill>
-                      <a:srgbClr val="FFFFFF"/>
-                    </a:solidFill>
-                  </a:tcPr>
-                </a:tc>
-                <a:tc>
-                  <a:txBody>
-                    <a:bodyPr/>
-                    <a:lstStyle/>
-                    <a:p>
-                      <a:pPr algn="l"/>
-                      <a:r>
-                        <a:rPr lang="ru-RU" b="0" dirty="0">
-                          <a:effectLst/>
-                          <a:latin typeface="quote-cjk-patch"/>
-                        </a:rPr>
-                        <a:t>Характеристика</a:t>
-                      </a:r>
-                    </a:p>
-                  </a:txBody>
-                  <a:tcPr marL="152400" marR="152400" marT="95250" marB="95250" anchor="ctr">
-                    <a:lnL>
-                      <a:noFill/>
-                    </a:lnL>
-                    <a:lnR>
-                      <a:noFill/>
-                    </a:lnR>
-                    <a:lnT>
-                      <a:noFill/>
-                    </a:lnT>
-                    <a:lnB>
-                      <a:noFill/>
-                    </a:lnB>
-                    <a:solidFill>
-                      <a:srgbClr val="FFFFFF"/>
-                    </a:solidFill>
-                  </a:tcPr>
-                </a:tc>
-                <a:tc>
-                  <a:txBody>
-                    <a:bodyPr/>
-                    <a:lstStyle/>
-                    <a:p>
-                      <a:pPr algn="l"/>
-                      <a:r>
-                        <a:rPr lang="ru-RU" b="0">
-                          <a:effectLst/>
-                          <a:latin typeface="quote-cjk-patch"/>
-                        </a:rPr>
-                        <a:t>От чего зависит</a:t>
-                      </a:r>
-                    </a:p>
-                  </a:txBody>
-                  <a:tcPr marL="152400" marR="152400" marT="95250" marB="95250" anchor="ctr">
-                    <a:lnL>
-                      <a:noFill/>
-                    </a:lnL>
-                    <a:lnR>
-                      <a:noFill/>
-                    </a:lnR>
-                    <a:lnT>
-                      <a:noFill/>
-                    </a:lnT>
-                    <a:lnB>
-                      <a:noFill/>
-                    </a:lnB>
-                    <a:solidFill>
-                      <a:srgbClr val="FFFFFF"/>
-                    </a:solidFill>
-                  </a:tcPr>
-                </a:tc>
-                <a:extLst>
-                  <a:ext uri="{0D108BD9-81ED-4DB2-BD59-A6C34878D82A}">
-                    <a16:rowId xmlns:a16="http://schemas.microsoft.com/office/drawing/2014/main" val="330005408"/>
-                  </a:ext>
-                </a:extLst>
-              </a:tr>
-              <a:tr h="880420">
-                <a:tc>
-                  <a:txBody>
-                    <a:bodyPr/>
-                    <a:lstStyle/>
-                    <a:p>
-                      <a:r>
-                        <a:rPr lang="ru-RU" b="1">
-                          <a:effectLst/>
-                          <a:latin typeface="quote-cjk-patch"/>
-                        </a:rPr>
-                        <a:t>Время сериализации</a:t>
-                      </a:r>
-                      <a:endParaRPr lang="ru-RU" b="0">
-                        <a:effectLst/>
-                        <a:latin typeface="quote-cjk-patch"/>
-                      </a:endParaRPr>
-                    </a:p>
-                  </a:txBody>
-                  <a:tcPr marR="152400" marT="95250" marB="95250" anchor="ctr">
-                    <a:lnL>
-                      <a:noFill/>
-                    </a:lnL>
-                    <a:lnR>
-                      <a:noFill/>
-                    </a:lnR>
-                    <a:lnT>
-                      <a:noFill/>
-                    </a:lnT>
-                    <a:lnB>
-                      <a:noFill/>
-                    </a:lnB>
-                    <a:solidFill>
-                      <a:srgbClr val="FFFFFF"/>
-                    </a:solidFill>
-                  </a:tcPr>
-                </a:tc>
-                <a:tc>
-                  <a:txBody>
-                    <a:bodyPr/>
-                    <a:lstStyle/>
-                    <a:p>
-                      <a:r>
-                        <a:rPr lang="ru-RU" b="0">
-                          <a:effectLst/>
-                          <a:latin typeface="quote-cjk-patch"/>
-                        </a:rPr>
-                        <a:t>Фиксированная</a:t>
-                      </a:r>
-                    </a:p>
-                  </a:txBody>
-                  <a:tcPr marL="152400" marR="152400" marT="95250" marB="95250" anchor="ctr">
-                    <a:lnL>
-                      <a:noFill/>
-                    </a:lnL>
-                    <a:lnR>
-                      <a:noFill/>
-                    </a:lnR>
-                    <a:lnT>
-                      <a:noFill/>
-                    </a:lnT>
-                    <a:lnB>
-                      <a:noFill/>
-                    </a:lnB>
-                    <a:solidFill>
-                      <a:srgbClr val="FFFFFF"/>
-                    </a:solidFill>
-                  </a:tcPr>
-                </a:tc>
-                <a:tc>
-                  <a:txBody>
-                    <a:bodyPr/>
-                    <a:lstStyle/>
-                    <a:p>
-                      <a:r>
-                        <a:rPr lang="ru-RU" b="0">
-                          <a:effectLst/>
-                          <a:latin typeface="quote-cjk-patch"/>
-                        </a:rPr>
-                        <a:t>Скорость передачи данных.</a:t>
-                      </a:r>
-                    </a:p>
-                  </a:txBody>
-                  <a:tcPr marL="152400" marT="95250" marB="95250" anchor="ctr">
-                    <a:lnL>
-                      <a:noFill/>
-                    </a:lnL>
-                    <a:lnR>
-                      <a:noFill/>
-                    </a:lnR>
-                    <a:lnT>
-                      <a:noFill/>
-                    </a:lnT>
-                    <a:lnB>
-                      <a:noFill/>
-                    </a:lnB>
-                    <a:solidFill>
-                      <a:srgbClr val="FFFFFF"/>
-                    </a:solidFill>
-                  </a:tcPr>
-                </a:tc>
-                <a:extLst>
-                  <a:ext uri="{0D108BD9-81ED-4DB2-BD59-A6C34878D82A}">
-                    <a16:rowId xmlns:a16="http://schemas.microsoft.com/office/drawing/2014/main" val="3681741708"/>
-                  </a:ext>
-                </a:extLst>
-              </a:tr>
-              <a:tr h="880420">
-                <a:tc>
-                  <a:txBody>
-                    <a:bodyPr/>
-                    <a:lstStyle/>
-                    <a:p>
-                      <a:r>
-                        <a:rPr lang="ru-RU" b="1" dirty="0">
-                          <a:effectLst/>
-                          <a:latin typeface="quote-cjk-patch"/>
-                        </a:rPr>
-                        <a:t>Время распространения</a:t>
-                      </a:r>
-                      <a:endParaRPr lang="ru-RU" b="0" dirty="0">
-                        <a:effectLst/>
-                        <a:latin typeface="quote-cjk-patch"/>
-                      </a:endParaRPr>
-                    </a:p>
-                  </a:txBody>
-                  <a:tcPr marR="152400" marT="95250" marB="95250" anchor="ctr">
-                    <a:lnL>
-                      <a:noFill/>
-                    </a:lnL>
-                    <a:lnR>
-                      <a:noFill/>
-                    </a:lnR>
-                    <a:lnT>
-                      <a:noFill/>
-                    </a:lnT>
-                    <a:lnB>
-                      <a:noFill/>
-                    </a:lnB>
-                    <a:solidFill>
-                      <a:srgbClr val="FFFFFF"/>
-                    </a:solidFill>
-                  </a:tcPr>
-                </a:tc>
-                <a:tc>
-                  <a:txBody>
-                    <a:bodyPr/>
-                    <a:lstStyle/>
-                    <a:p>
-                      <a:r>
-                        <a:rPr lang="ru-RU" b="0">
-                          <a:effectLst/>
-                          <a:latin typeface="quote-cjk-patch"/>
-                        </a:rPr>
-                        <a:t>Фиксированная</a:t>
-                      </a:r>
-                    </a:p>
-                  </a:txBody>
-                  <a:tcPr marL="152400" marR="152400" marT="95250" marB="95250" anchor="ctr">
-                    <a:lnL>
-                      <a:noFill/>
-                    </a:lnL>
-                    <a:lnR>
-                      <a:noFill/>
-                    </a:lnR>
-                    <a:lnT>
-                      <a:noFill/>
-                    </a:lnT>
-                    <a:lnB>
-                      <a:noFill/>
-                    </a:lnB>
-                    <a:solidFill>
-                      <a:srgbClr val="FFFFFF"/>
-                    </a:solidFill>
-                  </a:tcPr>
-                </a:tc>
-                <a:tc>
-                  <a:txBody>
-                    <a:bodyPr/>
-                    <a:lstStyle/>
-                    <a:p>
-                      <a:r>
-                        <a:rPr lang="ru-RU" b="0">
-                          <a:effectLst/>
-                          <a:latin typeface="quote-cjk-patch"/>
-                        </a:rPr>
-                        <a:t>Длина кабеля (скорость света).</a:t>
-                      </a:r>
-                    </a:p>
-                  </a:txBody>
-                  <a:tcPr marL="152400" marT="95250" marB="95250" anchor="ctr">
-                    <a:lnL>
-                      <a:noFill/>
-                    </a:lnL>
-                    <a:lnR>
-                      <a:noFill/>
-                    </a:lnR>
-                    <a:lnT>
-                      <a:noFill/>
-                    </a:lnT>
-                    <a:lnB>
-                      <a:noFill/>
-                    </a:lnB>
-                    <a:solidFill>
-                      <a:srgbClr val="FFFFFF"/>
-                    </a:solidFill>
-                  </a:tcPr>
-                </a:tc>
-                <a:extLst>
-                  <a:ext uri="{0D108BD9-81ED-4DB2-BD59-A6C34878D82A}">
-                    <a16:rowId xmlns:a16="http://schemas.microsoft.com/office/drawing/2014/main" val="2246103573"/>
-                  </a:ext>
-                </a:extLst>
-              </a:tr>
-              <a:tr h="1207174">
-                <a:tc>
-                  <a:txBody>
-                    <a:bodyPr/>
-                    <a:lstStyle/>
-                    <a:p>
-                      <a:r>
-                        <a:rPr lang="ru-RU" b="1">
-                          <a:effectLst/>
-                          <a:latin typeface="quote-cjk-patch"/>
-                        </a:rPr>
-                        <a:t>Время коммутации</a:t>
-                      </a:r>
-                      <a:endParaRPr lang="ru-RU" b="0">
-                        <a:effectLst/>
-                        <a:latin typeface="quote-cjk-patch"/>
-                      </a:endParaRPr>
-                    </a:p>
-                  </a:txBody>
-                  <a:tcPr marR="152400" marT="95250" marB="95250" anchor="ctr">
-                    <a:lnL>
-                      <a:noFill/>
-                    </a:lnL>
-                    <a:lnR>
-                      <a:noFill/>
-                    </a:lnR>
-                    <a:lnT>
-                      <a:noFill/>
-                    </a:lnT>
-                    <a:lnB>
-                      <a:noFill/>
-                    </a:lnB>
-                    <a:solidFill>
-                      <a:srgbClr val="FFFFFF"/>
-                    </a:solidFill>
-                  </a:tcPr>
-                </a:tc>
-                <a:tc>
-                  <a:txBody>
-                    <a:bodyPr/>
-                    <a:lstStyle/>
-                    <a:p>
-                      <a:r>
-                        <a:rPr lang="ru-RU" b="0" dirty="0">
-                          <a:effectLst/>
-                          <a:latin typeface="quote-cjk-patch"/>
-                        </a:rPr>
-                        <a:t>Переменная</a:t>
-                      </a:r>
-                    </a:p>
-                  </a:txBody>
-                  <a:tcPr marL="152400" marR="152400" marT="95250" marB="95250" anchor="ctr">
-                    <a:lnL>
-                      <a:noFill/>
-                    </a:lnL>
-                    <a:lnR>
-                      <a:noFill/>
-                    </a:lnR>
-                    <a:lnT>
-                      <a:noFill/>
-                    </a:lnT>
-                    <a:lnB>
-                      <a:noFill/>
-                    </a:lnB>
-                    <a:solidFill>
-                      <a:srgbClr val="FFFFFF"/>
-                    </a:solidFill>
-                  </a:tcPr>
-                </a:tc>
-                <a:tc>
-                  <a:txBody>
-                    <a:bodyPr/>
-                    <a:lstStyle/>
-                    <a:p>
-                      <a:r>
-                        <a:rPr lang="ru-RU" b="0">
-                          <a:effectLst/>
-                          <a:latin typeface="quote-cjk-patch"/>
-                        </a:rPr>
-                        <a:t>Быстродействие процессора коммутатора.</a:t>
-                      </a:r>
-                    </a:p>
-                  </a:txBody>
-                  <a:tcPr marL="152400" marT="95250" marB="95250" anchor="ctr">
-                    <a:lnL>
-                      <a:noFill/>
-                    </a:lnL>
-                    <a:lnR>
-                      <a:noFill/>
-                    </a:lnR>
-                    <a:lnT>
-                      <a:noFill/>
-                    </a:lnT>
-                    <a:lnB>
-                      <a:noFill/>
-                    </a:lnB>
-                    <a:solidFill>
-                      <a:srgbClr val="FFFFFF"/>
-                    </a:solidFill>
-                  </a:tcPr>
-                </a:tc>
-                <a:extLst>
-                  <a:ext uri="{0D108BD9-81ED-4DB2-BD59-A6C34878D82A}">
-                    <a16:rowId xmlns:a16="http://schemas.microsoft.com/office/drawing/2014/main" val="3527845937"/>
-                  </a:ext>
-                </a:extLst>
-              </a:tr>
-              <a:tr h="880420">
-                <a:tc>
-                  <a:txBody>
-                    <a:bodyPr/>
-                    <a:lstStyle/>
-                    <a:p>
-                      <a:r>
-                        <a:rPr lang="ru-RU" b="1">
-                          <a:effectLst/>
-                          <a:latin typeface="quote-cjk-patch"/>
-                        </a:rPr>
-                        <a:t>Время ожидания в очереди</a:t>
-                      </a:r>
-                      <a:endParaRPr lang="ru-RU" b="0">
-                        <a:effectLst/>
-                        <a:latin typeface="quote-cjk-patch"/>
-                      </a:endParaRPr>
-                    </a:p>
-                  </a:txBody>
-                  <a:tcPr marR="152400" marT="95250" marB="95250" anchor="ctr">
-                    <a:lnL>
-                      <a:noFill/>
-                    </a:lnL>
-                    <a:lnR>
-                      <a:noFill/>
-                    </a:lnR>
-                    <a:lnT>
-                      <a:noFill/>
-                    </a:lnT>
-                    <a:lnB>
-                      <a:noFill/>
-                    </a:lnB>
-                    <a:solidFill>
-                      <a:srgbClr val="FFFFFF"/>
-                    </a:solidFill>
-                  </a:tcPr>
-                </a:tc>
-                <a:tc>
-                  <a:txBody>
-                    <a:bodyPr/>
-                    <a:lstStyle/>
-                    <a:p>
-                      <a:r>
-                        <a:rPr lang="ru-RU" b="1">
-                          <a:effectLst/>
-                          <a:latin typeface="quote-cjk-patch"/>
-                        </a:rPr>
-                        <a:t>Переменная (основная проблема)</a:t>
-                      </a:r>
-                      <a:endParaRPr lang="ru-RU" b="0">
-                        <a:effectLst/>
-                        <a:latin typeface="quote-cjk-patch"/>
-                      </a:endParaRPr>
-                    </a:p>
-                  </a:txBody>
-                  <a:tcPr marL="152400" marR="152400" marT="95250" marB="95250" anchor="ctr">
-                    <a:lnL>
-                      <a:noFill/>
-                    </a:lnL>
-                    <a:lnR>
-                      <a:noFill/>
-                    </a:lnR>
-                    <a:lnT>
-                      <a:noFill/>
-                    </a:lnT>
-                    <a:lnB>
-                      <a:noFill/>
-                    </a:lnB>
-                    <a:solidFill>
-                      <a:srgbClr val="FFFFFF"/>
-                    </a:solidFill>
-                  </a:tcPr>
-                </a:tc>
-                <a:tc>
-                  <a:txBody>
-                    <a:bodyPr/>
-                    <a:lstStyle/>
-                    <a:p>
-                      <a:r>
-                        <a:rPr lang="ru-RU" b="0" dirty="0">
-                          <a:effectLst/>
-                          <a:latin typeface="quote-cjk-patch"/>
-                        </a:rPr>
-                        <a:t>Загрузка сети, количество коллизий.</a:t>
-                      </a:r>
-                    </a:p>
-                  </a:txBody>
-                  <a:tcPr marL="152400" marT="95250" marB="95250" anchor="ctr">
-                    <a:lnL>
-                      <a:noFill/>
-                    </a:lnL>
-                    <a:lnR>
-                      <a:noFill/>
-                    </a:lnR>
-                    <a:lnT>
-                      <a:noFill/>
-                    </a:lnT>
-                    <a:lnB>
-                      <a:noFill/>
-                    </a:lnB>
-                    <a:solidFill>
-                      <a:srgbClr val="FFFFFF"/>
-                    </a:solidFill>
-                  </a:tcPr>
-                </a:tc>
-                <a:extLst>
-                  <a:ext uri="{0D108BD9-81ED-4DB2-BD59-A6C34878D82A}">
-                    <a16:rowId xmlns:a16="http://schemas.microsoft.com/office/drawing/2014/main" val="1057049386"/>
-                  </a:ext>
-                </a:extLst>
-              </a:tr>
-            </a:tbl>
-          </a:graphicData>
-        </a:graphic>
-      </p:graphicFrame>
-      <p:sp>
-        <p:nvSpPr>
-          <p:cNvPr id="4" name="Прямоугольник 3"/>
-          <p:cNvSpPr/>
-          <p:nvPr/>
-        </p:nvSpPr>
-        <p:spPr>
-          <a:xfrm>
-            <a:off x="2013438" y="1435656"/>
-            <a:ext cx="8845061" cy="369332"/>
-          </a:xfrm>
-          <a:prstGeom prst="rect">
-            <a:avLst/>
-          </a:prstGeom>
-        </p:spPr>
-        <p:txBody>
-          <a:bodyPr wrap="square">
-            <a:spAutoFit/>
-          </a:bodyPr>
-          <a:lstStyle/>
-          <a:p>
-            <a:r>
-              <a:rPr lang="ru-RU" b="0" i="0" dirty="0" smtClean="0">
-                <a:solidFill>
-                  <a:srgbClr val="0F1115"/>
-                </a:solidFill>
-                <a:effectLst/>
-                <a:latin typeface="quote-cjk-patch"/>
-              </a:rPr>
-              <a:t>Суммарная задержка складывается из фиксированных и переменных величин</a:t>
-            </a:r>
-            <a:endParaRPr lang="ru-RU" dirty="0"/>
-          </a:p>
-        </p:txBody>
-      </p:sp>
-    </p:spTree>
-    <p:extLst>
-      <p:ext uri="{BB962C8B-B14F-4D97-AF65-F5344CB8AC3E}">
-        <p14:creationId xmlns:p14="http://schemas.microsoft.com/office/powerpoint/2010/main" val="378470332"/>
-      </p:ext>
-    </p:extLst>
-  </p:cSld>
-  <p:clrMapOvr>
-    <a:masterClrMapping/>
-  </p:clrMapOvr>
-</p:sld>
-</file>
-
-<file path=ppt/slides/slide5.xml><?xml version="1.0" encoding="utf-8"?>
-<p:sld xmlns:a="http://schemas.openxmlformats.org/drawingml/2006/main" xmlns:r="http://schemas.openxmlformats.org/officeDocument/2006/relationships" xmlns:p="http://schemas.openxmlformats.org/presentationml/2006/main">
-  <p:cSld>
-    <p:spTree>
-      <p:nvGrpSpPr>
-        <p:cNvPr id="1" name=""/>
-        <p:cNvGrpSpPr/>
-        <p:nvPr/>
-      </p:nvGrpSpPr>
-      <p:grpSpPr>
-        <a:xfrm>
-          <a:off x="0" y="0"/>
-          <a:ext cx="0" cy="0"/>
-          <a:chOff x="0" y="0"/>
-          <a:chExt cx="0" cy="0"/>
-        </a:xfrm>
-      </p:grpSpPr>
-      <p:sp>
-        <p:nvSpPr>
-          <p:cNvPr id="2" name="Заголовок 1"/>
-          <p:cNvSpPr>
-            <a:spLocks noGrp="1"/>
-          </p:cNvSpPr>
-          <p:nvPr>
-            <p:ph type="title"/>
-          </p:nvPr>
-        </p:nvSpPr>
-        <p:spPr>
-          <a:xfrm>
-            <a:off x="838200" y="365125"/>
-            <a:ext cx="7584831" cy="1325563"/>
-          </a:xfrm>
-        </p:spPr>
-        <p:txBody>
-          <a:bodyPr/>
-          <a:lstStyle/>
-          <a:p>
-            <a:r>
-              <a:rPr lang="ru-RU" b="1" dirty="0"/>
-              <a:t>Ключевые </a:t>
-            </a:r>
-            <a:r>
-              <a:rPr lang="ru-RU" b="1" dirty="0" smtClean="0"/>
-              <a:t>метры сети</a:t>
-            </a:r>
-            <a:endParaRPr lang="ru-RU" dirty="0"/>
-          </a:p>
-        </p:txBody>
-      </p:sp>
-      <p:sp>
-        <p:nvSpPr>
-          <p:cNvPr id="3" name="Объект 2"/>
-          <p:cNvSpPr>
-            <a:spLocks noGrp="1"/>
-          </p:cNvSpPr>
-          <p:nvPr>
-            <p:ph idx="1"/>
-          </p:nvPr>
-        </p:nvSpPr>
-        <p:spPr/>
-        <p:txBody>
-          <a:bodyPr/>
-          <a:lstStyle/>
-          <a:p>
-            <a:pPr marL="0" indent="0">
-              <a:buNone/>
-            </a:pPr>
-            <a:r>
-              <a:rPr lang="ru-RU" sz="3600" b="1" dirty="0"/>
-              <a:t>Скоростные характеристики:</a:t>
-            </a:r>
-            <a:endParaRPr lang="ru-RU" sz="3600" dirty="0"/>
-          </a:p>
-          <a:p>
-            <a:pPr lvl="1"/>
-            <a:r>
-              <a:rPr lang="ru-RU" sz="3600" b="1" dirty="0"/>
-              <a:t>Средняя скорость </a:t>
-            </a:r>
-            <a:r>
-              <a:rPr lang="ru-RU" sz="3600" b="1" dirty="0" smtClean="0"/>
-              <a:t>:</a:t>
-            </a:r>
-            <a:r>
-              <a:rPr lang="ru-RU" sz="3600" dirty="0"/>
-              <a:t> Долговременный средний показатель.</a:t>
-            </a:r>
-          </a:p>
-          <a:p>
-            <a:pPr lvl="1"/>
-            <a:r>
-              <a:rPr lang="ru-RU" sz="3600" b="1" dirty="0"/>
-              <a:t>Пиковая скорость </a:t>
-            </a:r>
-            <a:r>
-              <a:rPr lang="ru-RU" sz="3600" b="1" dirty="0" smtClean="0"/>
-              <a:t>:</a:t>
-            </a:r>
-            <a:r>
-              <a:rPr lang="ru-RU" sz="3600" dirty="0"/>
-              <a:t> Максимальная мгновенная скорость.</a:t>
-            </a:r>
-          </a:p>
-          <a:p>
-            <a:pPr lvl="1"/>
-            <a:r>
-              <a:rPr lang="ru-RU" sz="3600" b="1" dirty="0"/>
-              <a:t>Пульсация </a:t>
-            </a:r>
-            <a:r>
-              <a:rPr lang="ru-RU" sz="3600" b="1" dirty="0" smtClean="0"/>
-              <a:t>:</a:t>
-            </a:r>
-            <a:r>
-              <a:rPr lang="ru-RU" sz="3600" dirty="0"/>
-              <a:t> Отношение пиковой скорости к средней (важно для веб-серфинга и файлов).</a:t>
-            </a:r>
-          </a:p>
-          <a:p>
-            <a:endParaRPr lang="ru-RU" dirty="0"/>
-          </a:p>
-        </p:txBody>
-      </p:sp>
-    </p:spTree>
-    <p:extLst>
-      <p:ext uri="{BB962C8B-B14F-4D97-AF65-F5344CB8AC3E}">
-        <p14:creationId xmlns:p14="http://schemas.microsoft.com/office/powerpoint/2010/main" val="2628813272"/>
-      </p:ext>
-    </p:extLst>
-  </p:cSld>
-  <p:clrMapOvr>
-    <a:masterClrMapping/>
-  </p:clrMapOvr>
-</p:sld>
-</file>
-
-<file path=ppt/slides/slide6.xml><?xml version="1.0" encoding="utf-8"?>
-<p:sld xmlns:a="http://schemas.openxmlformats.org/drawingml/2006/main" xmlns:r="http://schemas.openxmlformats.org/officeDocument/2006/relationships" xmlns:p="http://schemas.openxmlformats.org/presentationml/2006/main">
-  <p:cSld>
-    <p:spTree>
-      <p:nvGrpSpPr>
-        <p:cNvPr id="1" name=""/>
-        <p:cNvGrpSpPr/>
-        <p:nvPr/>
-      </p:nvGrpSpPr>
-      <p:grpSpPr>
-        <a:xfrm>
-          <a:off x="0" y="0"/>
-          <a:ext cx="0" cy="0"/>
-          <a:chOff x="0" y="0"/>
-          <a:chExt cx="0" cy="0"/>
-        </a:xfrm>
-      </p:grpSpPr>
-      <p:sp>
-        <p:nvSpPr>
-          <p:cNvPr id="2" name="Заголовок 1"/>
-          <p:cNvSpPr>
-            <a:spLocks noGrp="1"/>
-          </p:cNvSpPr>
-          <p:nvPr>
-            <p:ph type="title"/>
-          </p:nvPr>
-        </p:nvSpPr>
-        <p:spPr/>
-        <p:txBody>
-          <a:bodyPr/>
-          <a:lstStyle/>
-          <a:p>
-            <a:r>
-              <a:rPr lang="ru-RU" b="1" dirty="0"/>
-              <a:t>Чувствительность приложений к </a:t>
-            </a:r>
-            <a:r>
-              <a:rPr lang="ru-RU" b="1" dirty="0" smtClean="0"/>
-              <a:t>задержкам</a:t>
-            </a:r>
-            <a:endParaRPr lang="ru-RU" dirty="0"/>
-          </a:p>
-        </p:txBody>
-      </p:sp>
-      <p:graphicFrame>
-        <p:nvGraphicFramePr>
-          <p:cNvPr id="4" name="Объект 3"/>
-          <p:cNvGraphicFramePr>
-            <a:graphicFrameLocks noGrp="1"/>
-          </p:cNvGraphicFramePr>
-          <p:nvPr>
-            <p:ph idx="1"/>
-            <p:extLst>
-              <p:ext uri="{D42A27DB-BD31-4B8C-83A1-F6EECF244321}">
-                <p14:modId xmlns:p14="http://schemas.microsoft.com/office/powerpoint/2010/main" val="1233133505"/>
-              </p:ext>
-            </p:extLst>
-          </p:nvPr>
-        </p:nvGraphicFramePr>
-        <p:xfrm>
-          <a:off x="2628902" y="1825625"/>
-          <a:ext cx="7288821" cy="4351338"/>
-        </p:xfrm>
-        <a:graphic>
-          <a:graphicData uri="http://schemas.openxmlformats.org/drawingml/2006/table">
-            <a:tbl>
-              <a:tblPr/>
-              <a:tblGrid>
-                <a:gridCol w="2429607">
-                  <a:extLst>
-                    <a:ext uri="{9D8B030D-6E8A-4147-A177-3AD203B41FA5}">
-                      <a16:colId xmlns:a16="http://schemas.microsoft.com/office/drawing/2014/main" val="265940874"/>
-                    </a:ext>
-                  </a:extLst>
-                </a:gridCol>
-                <a:gridCol w="2429607">
-                  <a:extLst>
-                    <a:ext uri="{9D8B030D-6E8A-4147-A177-3AD203B41FA5}">
-                      <a16:colId xmlns:a16="http://schemas.microsoft.com/office/drawing/2014/main" val="2538373447"/>
-                    </a:ext>
-                  </a:extLst>
-                </a:gridCol>
-                <a:gridCol w="2429607">
-                  <a:extLst>
-                    <a:ext uri="{9D8B030D-6E8A-4147-A177-3AD203B41FA5}">
-                      <a16:colId xmlns:a16="http://schemas.microsoft.com/office/drawing/2014/main" val="3733887250"/>
-                    </a:ext>
-                  </a:extLst>
-                </a:gridCol>
-              </a:tblGrid>
-              <a:tr h="421990">
-                <a:tc>
-                  <a:txBody>
-                    <a:bodyPr/>
-                    <a:lstStyle/>
-                    <a:p>
-                      <a:pPr algn="l"/>
-                      <a:r>
-                        <a:rPr lang="ru-RU" sz="1600" b="0">
-                          <a:effectLst/>
-                          <a:latin typeface="quote-cjk-patch"/>
-                        </a:rPr>
-                        <a:t>Тип (по задержкам)</a:t>
-                      </a:r>
-                    </a:p>
-                  </a:txBody>
-                  <a:tcPr marL="83014" marR="138357" marT="86473" marB="86473" anchor="ctr">
-                    <a:lnL>
-                      <a:noFill/>
-                    </a:lnL>
-                    <a:lnR>
-                      <a:noFill/>
-                    </a:lnR>
-                    <a:lnT>
-                      <a:noFill/>
-                    </a:lnT>
-                    <a:lnB>
-                      <a:noFill/>
-                    </a:lnB>
-                    <a:solidFill>
-                      <a:srgbClr val="FFFFFF"/>
-                    </a:solidFill>
-                  </a:tcPr>
-                </a:tc>
-                <a:tc>
-                  <a:txBody>
-                    <a:bodyPr/>
-                    <a:lstStyle/>
-                    <a:p>
-                      <a:pPr algn="l"/>
-                      <a:r>
-                        <a:rPr lang="ru-RU" sz="1600" b="0">
-                          <a:effectLst/>
-                          <a:latin typeface="quote-cjk-patch"/>
-                        </a:rPr>
-                        <a:t>Примеры</a:t>
-                      </a:r>
-                    </a:p>
-                  </a:txBody>
-                  <a:tcPr marL="138357" marR="138357" marT="86473" marB="86473" anchor="ctr">
-                    <a:lnL>
-                      <a:noFill/>
-                    </a:lnL>
-                    <a:lnR>
-                      <a:noFill/>
-                    </a:lnR>
-                    <a:lnT>
-                      <a:noFill/>
-                    </a:lnT>
-                    <a:lnB>
-                      <a:noFill/>
-                    </a:lnB>
-                    <a:solidFill>
-                      <a:srgbClr val="FFFFFF"/>
-                    </a:solidFill>
-                  </a:tcPr>
-                </a:tc>
-                <a:tc>
-                  <a:txBody>
-                    <a:bodyPr/>
-                    <a:lstStyle/>
-                    <a:p>
-                      <a:pPr algn="l"/>
-                      <a:r>
-                        <a:rPr lang="ru-RU" sz="1600" b="0">
-                          <a:effectLst/>
-                          <a:latin typeface="quote-cjk-patch"/>
-                        </a:rPr>
-                        <a:t>Требования к сети</a:t>
-                      </a:r>
-                    </a:p>
-                  </a:txBody>
-                  <a:tcPr marL="138357" marR="138357" marT="86473" marB="86473" anchor="ctr">
-                    <a:lnL>
-                      <a:noFill/>
-                    </a:lnL>
-                    <a:lnR>
-                      <a:noFill/>
-                    </a:lnR>
-                    <a:lnT>
-                      <a:noFill/>
-                    </a:lnT>
-                    <a:lnB>
-                      <a:noFill/>
-                    </a:lnB>
-                    <a:solidFill>
-                      <a:srgbClr val="FFFFFF"/>
-                    </a:solidFill>
-                  </a:tcPr>
-                </a:tc>
-                <a:extLst>
-                  <a:ext uri="{0D108BD9-81ED-4DB2-BD59-A6C34878D82A}">
-                    <a16:rowId xmlns:a16="http://schemas.microsoft.com/office/drawing/2014/main" val="2673781350"/>
-                  </a:ext>
-                </a:extLst>
-              </a:tr>
-              <a:tr h="671033">
-                <a:tc>
-                  <a:txBody>
-                    <a:bodyPr/>
-                    <a:lstStyle/>
-                    <a:p>
-                      <a:r>
-                        <a:rPr lang="ru-RU" sz="1600" b="1">
-                          <a:effectLst/>
-                          <a:latin typeface="quote-cjk-patch"/>
-                        </a:rPr>
-                        <a:t>Асинхронные</a:t>
-                      </a:r>
-                      <a:endParaRPr lang="ru-RU" sz="1600" b="0">
-                        <a:effectLst/>
-                        <a:latin typeface="quote-cjk-patch"/>
-                      </a:endParaRPr>
-                    </a:p>
-                  </a:txBody>
-                  <a:tcPr marL="83014" marR="138357" marT="86473" marB="86473" anchor="ctr">
-                    <a:lnL>
-                      <a:noFill/>
-                    </a:lnL>
-                    <a:lnR>
-                      <a:noFill/>
-                    </a:lnR>
-                    <a:lnT>
-                      <a:noFill/>
-                    </a:lnT>
-                    <a:lnB>
-                      <a:noFill/>
-                    </a:lnB>
-                    <a:solidFill>
-                      <a:srgbClr val="FFFFFF"/>
-                    </a:solidFill>
-                  </a:tcPr>
-                </a:tc>
-                <a:tc>
-                  <a:txBody>
-                    <a:bodyPr/>
-                    <a:lstStyle/>
-                    <a:p>
-                      <a:r>
-                        <a:rPr lang="ru-RU" sz="1600" b="0">
-                          <a:effectLst/>
-                          <a:latin typeface="quote-cjk-patch"/>
-                        </a:rPr>
-                        <a:t>Электронная почта, </a:t>
-                      </a:r>
-                      <a:r>
-                        <a:rPr lang="en-US" sz="1600" b="0">
-                          <a:effectLst/>
-                          <a:latin typeface="quote-cjk-patch"/>
-                        </a:rPr>
-                        <a:t>FTP</a:t>
-                      </a:r>
-                    </a:p>
-                  </a:txBody>
-                  <a:tcPr marL="138357" marR="138357" marT="86473" marB="86473" anchor="ctr">
-                    <a:lnL>
-                      <a:noFill/>
-                    </a:lnL>
-                    <a:lnR>
-                      <a:noFill/>
-                    </a:lnR>
-                    <a:lnT>
-                      <a:noFill/>
-                    </a:lnT>
-                    <a:lnB>
-                      <a:noFill/>
-                    </a:lnB>
-                    <a:solidFill>
-                      <a:srgbClr val="FFFFFF"/>
-                    </a:solidFill>
-                  </a:tcPr>
-                </a:tc>
-                <a:tc>
-                  <a:txBody>
-                    <a:bodyPr/>
-                    <a:lstStyle/>
-                    <a:p>
-                      <a:r>
-                        <a:rPr lang="ru-RU" sz="1600" b="0">
-                          <a:effectLst/>
-                          <a:latin typeface="quote-cjk-patch"/>
-                        </a:rPr>
-                        <a:t>Низкие. Терпят паузы в секунды.</a:t>
-                      </a:r>
-                    </a:p>
-                  </a:txBody>
-                  <a:tcPr marL="138357" marR="83014" marT="86473" marB="86473" anchor="ctr">
-                    <a:lnL>
-                      <a:noFill/>
-                    </a:lnL>
-                    <a:lnR>
-                      <a:noFill/>
-                    </a:lnR>
-                    <a:lnT>
-                      <a:noFill/>
-                    </a:lnT>
-                    <a:lnB>
-                      <a:noFill/>
-                    </a:lnB>
-                    <a:solidFill>
-                      <a:srgbClr val="FFFFFF"/>
-                    </a:solidFill>
-                  </a:tcPr>
-                </a:tc>
-                <a:extLst>
-                  <a:ext uri="{0D108BD9-81ED-4DB2-BD59-A6C34878D82A}">
-                    <a16:rowId xmlns:a16="http://schemas.microsoft.com/office/drawing/2014/main" val="3659504191"/>
-                  </a:ext>
-                </a:extLst>
-              </a:tr>
-              <a:tr h="920076">
-                <a:tc>
-                  <a:txBody>
-                    <a:bodyPr/>
-                    <a:lstStyle/>
-                    <a:p>
-                      <a:r>
-                        <a:rPr lang="ru-RU" sz="1600" b="1">
-                          <a:effectLst/>
-                          <a:latin typeface="quote-cjk-patch"/>
-                        </a:rPr>
-                        <a:t>Интерактивные</a:t>
-                      </a:r>
-                      <a:endParaRPr lang="ru-RU" sz="1600" b="0">
-                        <a:effectLst/>
-                        <a:latin typeface="quote-cjk-patch"/>
-                      </a:endParaRPr>
-                    </a:p>
-                  </a:txBody>
-                  <a:tcPr marL="83014" marR="138357" marT="86473" marB="86473" anchor="ctr">
-                    <a:lnL>
-                      <a:noFill/>
-                    </a:lnL>
-                    <a:lnR>
-                      <a:noFill/>
-                    </a:lnR>
-                    <a:lnT>
-                      <a:noFill/>
-                    </a:lnT>
-                    <a:lnB>
-                      <a:noFill/>
-                    </a:lnB>
-                    <a:solidFill>
-                      <a:srgbClr val="FFFFFF"/>
-                    </a:solidFill>
-                  </a:tcPr>
-                </a:tc>
-                <a:tc>
-                  <a:txBody>
-                    <a:bodyPr/>
-                    <a:lstStyle/>
-                    <a:p>
-                      <a:r>
-                        <a:rPr lang="ru-RU" sz="1600" b="0">
-                          <a:effectLst/>
-                          <a:latin typeface="quote-cjk-patch"/>
-                        </a:rPr>
-                        <a:t>Текстовый редактор (удаленный), </a:t>
-                      </a:r>
-                      <a:r>
-                        <a:rPr lang="en-US" sz="1600" b="0">
-                          <a:effectLst/>
-                          <a:latin typeface="quote-cjk-patch"/>
-                        </a:rPr>
-                        <a:t>Telnet</a:t>
-                      </a:r>
-                    </a:p>
-                  </a:txBody>
-                  <a:tcPr marL="138357" marR="138357" marT="86473" marB="86473" anchor="ctr">
-                    <a:lnL>
-                      <a:noFill/>
-                    </a:lnL>
-                    <a:lnR>
-                      <a:noFill/>
-                    </a:lnR>
-                    <a:lnT>
-                      <a:noFill/>
-                    </a:lnT>
-                    <a:lnB>
-                      <a:noFill/>
-                    </a:lnB>
-                    <a:solidFill>
-                      <a:srgbClr val="FFFFFF"/>
-                    </a:solidFill>
-                  </a:tcPr>
-                </a:tc>
-                <a:tc>
-                  <a:txBody>
-                    <a:bodyPr/>
-                    <a:lstStyle/>
-                    <a:p>
-                      <a:r>
-                        <a:rPr lang="ru-RU" sz="1600" b="0">
-                          <a:effectLst/>
-                          <a:latin typeface="quote-cjk-patch"/>
-                        </a:rPr>
-                        <a:t>Средние. Задержка заметна, но не смертельна.</a:t>
-                      </a:r>
-                    </a:p>
-                  </a:txBody>
-                  <a:tcPr marL="138357" marR="83014" marT="86473" marB="86473" anchor="ctr">
-                    <a:lnL>
-                      <a:noFill/>
-                    </a:lnL>
-                    <a:lnR>
-                      <a:noFill/>
-                    </a:lnR>
-                    <a:lnT>
-                      <a:noFill/>
-                    </a:lnT>
-                    <a:lnB>
-                      <a:noFill/>
-                    </a:lnB>
-                    <a:solidFill>
-                      <a:srgbClr val="FFFFFF"/>
-                    </a:solidFill>
-                  </a:tcPr>
-                </a:tc>
-                <a:extLst>
-                  <a:ext uri="{0D108BD9-81ED-4DB2-BD59-A6C34878D82A}">
-                    <a16:rowId xmlns:a16="http://schemas.microsoft.com/office/drawing/2014/main" val="540420025"/>
-                  </a:ext>
-                </a:extLst>
-              </a:tr>
-              <a:tr h="1418163">
-                <a:tc>
-                  <a:txBody>
-                    <a:bodyPr/>
-                    <a:lstStyle/>
-                    <a:p>
-                      <a:r>
-                        <a:rPr lang="ru-RU" sz="1600" b="1">
-                          <a:effectLst/>
-                          <a:latin typeface="quote-cjk-patch"/>
-                        </a:rPr>
-                        <a:t>Изохронные</a:t>
-                      </a:r>
-                      <a:endParaRPr lang="ru-RU" sz="1600" b="0">
-                        <a:effectLst/>
-                        <a:latin typeface="quote-cjk-patch"/>
-                      </a:endParaRPr>
-                    </a:p>
-                  </a:txBody>
-                  <a:tcPr marL="83014" marR="138357" marT="86473" marB="86473" anchor="ctr">
-                    <a:lnL>
-                      <a:noFill/>
-                    </a:lnL>
-                    <a:lnR>
-                      <a:noFill/>
-                    </a:lnR>
-                    <a:lnT>
-                      <a:noFill/>
-                    </a:lnT>
-                    <a:lnB>
-                      <a:noFill/>
-                    </a:lnB>
-                    <a:solidFill>
-                      <a:srgbClr val="FFFFFF"/>
-                    </a:solidFill>
-                  </a:tcPr>
-                </a:tc>
-                <a:tc>
-                  <a:txBody>
-                    <a:bodyPr/>
-                    <a:lstStyle/>
-                    <a:p>
-                      <a:r>
-                        <a:rPr lang="en-US" sz="1600" b="0">
-                          <a:effectLst/>
-                          <a:latin typeface="quote-cjk-patch"/>
-                        </a:rPr>
-                        <a:t>IP-</a:t>
-                      </a:r>
-                      <a:r>
-                        <a:rPr lang="ru-RU" sz="1600" b="0">
-                          <a:effectLst/>
-                          <a:latin typeface="quote-cjk-patch"/>
-                        </a:rPr>
-                        <a:t>телефония, Видеоконференция</a:t>
-                      </a:r>
-                    </a:p>
-                  </a:txBody>
-                  <a:tcPr marL="138357" marR="138357" marT="86473" marB="86473" anchor="ctr">
-                    <a:lnL>
-                      <a:noFill/>
-                    </a:lnL>
-                    <a:lnR>
-                      <a:noFill/>
-                    </a:lnR>
-                    <a:lnT>
-                      <a:noFill/>
-                    </a:lnT>
-                    <a:lnB>
-                      <a:noFill/>
-                    </a:lnB>
-                    <a:solidFill>
-                      <a:srgbClr val="FFFFFF"/>
-                    </a:solidFill>
-                  </a:tcPr>
-                </a:tc>
-                <a:tc>
-                  <a:txBody>
-                    <a:bodyPr/>
-                    <a:lstStyle/>
-                    <a:p>
-                      <a:r>
-                        <a:rPr lang="ru-RU" sz="1600" b="1">
-                          <a:effectLst/>
-                          <a:latin typeface="quote-cjk-patch"/>
-                        </a:rPr>
-                        <a:t>Жесткие</a:t>
-                      </a:r>
-                      <a:r>
-                        <a:rPr lang="ru-RU" sz="1600" b="0">
-                          <a:effectLst/>
-                          <a:latin typeface="quote-cjk-patch"/>
-                        </a:rPr>
-                        <a:t> (менее 150 мс). Превышение порога разрушает связь.</a:t>
-                      </a:r>
-                    </a:p>
-                  </a:txBody>
-                  <a:tcPr marL="138357" marR="83014" marT="86473" marB="86473" anchor="ctr">
-                    <a:lnL>
-                      <a:noFill/>
-                    </a:lnL>
-                    <a:lnR>
-                      <a:noFill/>
-                    </a:lnR>
-                    <a:lnT>
-                      <a:noFill/>
-                    </a:lnT>
-                    <a:lnB>
-                      <a:noFill/>
-                    </a:lnB>
-                    <a:solidFill>
-                      <a:srgbClr val="FFFFFF"/>
-                    </a:solidFill>
-                  </a:tcPr>
-                </a:tc>
-                <a:extLst>
-                  <a:ext uri="{0D108BD9-81ED-4DB2-BD59-A6C34878D82A}">
-                    <a16:rowId xmlns:a16="http://schemas.microsoft.com/office/drawing/2014/main" val="3046351650"/>
-                  </a:ext>
-                </a:extLst>
-              </a:tr>
-              <a:tr h="920076">
-                <a:tc>
-                  <a:txBody>
-                    <a:bodyPr/>
-                    <a:lstStyle/>
-                    <a:p>
-                      <a:r>
-                        <a:rPr lang="ru-RU" sz="1600" b="1">
-                          <a:effectLst/>
-                          <a:latin typeface="quote-cjk-patch"/>
-                        </a:rPr>
-                        <a:t>Сверхчувствительные</a:t>
-                      </a:r>
-                      <a:endParaRPr lang="ru-RU" sz="1600" b="0">
-                        <a:effectLst/>
-                        <a:latin typeface="quote-cjk-patch"/>
-                      </a:endParaRPr>
-                    </a:p>
-                  </a:txBody>
-                  <a:tcPr marL="83014" marR="138357" marT="86473" marB="86473" anchor="ctr">
-                    <a:lnL>
-                      <a:noFill/>
-                    </a:lnL>
-                    <a:lnR>
-                      <a:noFill/>
-                    </a:lnR>
-                    <a:lnT>
-                      <a:noFill/>
-                    </a:lnT>
-                    <a:lnB>
-                      <a:noFill/>
-                    </a:lnB>
-                    <a:solidFill>
-                      <a:srgbClr val="FFFFFF"/>
-                    </a:solidFill>
-                  </a:tcPr>
-                </a:tc>
-                <a:tc>
-                  <a:txBody>
-                    <a:bodyPr/>
-                    <a:lstStyle/>
-                    <a:p>
-                      <a:r>
-                        <a:rPr lang="ru-RU" sz="1600" b="0">
-                          <a:effectLst/>
-                          <a:latin typeface="quote-cjk-patch"/>
-                        </a:rPr>
-                        <a:t>Управление роботами/транспортом</a:t>
-                      </a:r>
-                    </a:p>
-                  </a:txBody>
-                  <a:tcPr marL="138357" marR="138357" marT="86473" marB="86473" anchor="ctr">
-                    <a:lnL>
-                      <a:noFill/>
-                    </a:lnL>
-                    <a:lnR>
-                      <a:noFill/>
-                    </a:lnR>
-                    <a:lnT>
-                      <a:noFill/>
-                    </a:lnT>
-                    <a:lnB>
-                      <a:noFill/>
-                    </a:lnB>
-                    <a:solidFill>
-                      <a:srgbClr val="FFFFFF"/>
-                    </a:solidFill>
-                  </a:tcPr>
-                </a:tc>
-                <a:tc>
-                  <a:txBody>
-                    <a:bodyPr/>
-                    <a:lstStyle/>
-                    <a:p>
-                      <a:r>
-                        <a:rPr lang="ru-RU" sz="1600" b="0" dirty="0">
-                          <a:effectLst/>
-                          <a:latin typeface="quote-cjk-patch"/>
-                        </a:rPr>
-                        <a:t>Минимальные. Опоздание сигнала = авария.</a:t>
-                      </a:r>
-                    </a:p>
-                  </a:txBody>
-                  <a:tcPr marL="138357" marR="83014" marT="86473" marB="86473" anchor="ctr">
-                    <a:lnL>
-                      <a:noFill/>
-                    </a:lnL>
-                    <a:lnR>
-                      <a:noFill/>
-                    </a:lnR>
-                    <a:lnT>
-                      <a:noFill/>
-                    </a:lnT>
-                    <a:lnB>
-                      <a:noFill/>
-                    </a:lnB>
-                    <a:solidFill>
-                      <a:srgbClr val="FFFFFF"/>
-                    </a:solidFill>
-                  </a:tcPr>
-                </a:tc>
-                <a:extLst>
-                  <a:ext uri="{0D108BD9-81ED-4DB2-BD59-A6C34878D82A}">
-                    <a16:rowId xmlns:a16="http://schemas.microsoft.com/office/drawing/2014/main" val="3221024052"/>
-                  </a:ext>
-                </a:extLst>
-              </a:tr>
-            </a:tbl>
-          </a:graphicData>
-        </a:graphic>
-      </p:graphicFrame>
-      <p:sp>
-        <p:nvSpPr>
-          <p:cNvPr id="5" name="Прямоугольник 4"/>
-          <p:cNvSpPr/>
-          <p:nvPr/>
-        </p:nvSpPr>
-        <p:spPr>
-          <a:xfrm>
-            <a:off x="4681189" y="6311900"/>
-            <a:ext cx="2829621" cy="369332"/>
-          </a:xfrm>
-          <a:prstGeom prst="rect">
-            <a:avLst/>
-          </a:prstGeom>
-        </p:spPr>
-        <p:txBody>
-          <a:bodyPr wrap="none">
-            <a:spAutoFit/>
-          </a:bodyPr>
-          <a:lstStyle/>
-          <a:p>
-            <a:r>
-              <a:rPr lang="ru-RU" b="0" i="1" dirty="0" smtClean="0">
-                <a:solidFill>
-                  <a:srgbClr val="0F1115"/>
-                </a:solidFill>
-                <a:effectLst/>
-                <a:latin typeface="quote-cjk-patch"/>
-              </a:rPr>
-              <a:t>Классификация </a:t>
-            </a:r>
-            <a:r>
-              <a:rPr lang="ru-RU" b="0" i="1" dirty="0" err="1" smtClean="0">
-                <a:solidFill>
-                  <a:srgbClr val="0F1115"/>
-                </a:solidFill>
-                <a:effectLst/>
-                <a:latin typeface="quote-cjk-patch"/>
-              </a:rPr>
-              <a:t>Олифер</a:t>
-            </a:r>
-            <a:endParaRPr lang="ru-RU" dirty="0"/>
-          </a:p>
-        </p:txBody>
-      </p:sp>
-    </p:spTree>
-    <p:extLst>
-      <p:ext uri="{BB962C8B-B14F-4D97-AF65-F5344CB8AC3E}">
-        <p14:creationId xmlns:p14="http://schemas.microsoft.com/office/powerpoint/2010/main" val="2798462433"/>
-      </p:ext>
-    </p:extLst>
-  </p:cSld>
-  <p:clrMapOvr>
-    <a:masterClrMapping/>
-  </p:clrMapOvr>
-</p:sld>
-</file>
-
-<file path=ppt/slides/slide7.xml><?xml version="1.0" encoding="utf-8"?>
-<p:sld xmlns:a="http://schemas.openxmlformats.org/drawingml/2006/main" xmlns:r="http://schemas.openxmlformats.org/officeDocument/2006/relationships" xmlns:p="http://schemas.openxmlformats.org/presentationml/2006/main">
-  <p:cSld>
-    <p:spTree>
-      <p:nvGrpSpPr>
-        <p:cNvPr id="1" name=""/>
-        <p:cNvGrpSpPr/>
-        <p:nvPr/>
-      </p:nvGrpSpPr>
-      <p:grpSpPr>
-        <a:xfrm>
-          <a:off x="0" y="0"/>
-          <a:ext cx="0" cy="0"/>
-          <a:chOff x="0" y="0"/>
-          <a:chExt cx="0" cy="0"/>
-        </a:xfrm>
-      </p:grpSpPr>
-      <p:sp>
-        <p:nvSpPr>
-          <p:cNvPr id="2" name="Заголовок 1"/>
-          <p:cNvSpPr>
-            <a:spLocks noGrp="1"/>
-          </p:cNvSpPr>
-          <p:nvPr>
-            <p:ph type="title"/>
-          </p:nvPr>
-        </p:nvSpPr>
-        <p:spPr/>
-        <p:txBody>
-          <a:bodyPr/>
-          <a:lstStyle/>
-          <a:p>
-            <a:r>
-              <a:rPr lang="ru-RU" b="1" dirty="0"/>
-              <a:t>Чувствительность к потерям </a:t>
-            </a:r>
-            <a:r>
-              <a:rPr lang="ru-RU" b="1" dirty="0" smtClean="0"/>
-              <a:t>пакетов</a:t>
-            </a:r>
-            <a:endParaRPr lang="ru-RU" dirty="0"/>
-          </a:p>
-        </p:txBody>
-      </p:sp>
-      <p:sp>
-        <p:nvSpPr>
-          <p:cNvPr id="3" name="Объект 2"/>
-          <p:cNvSpPr>
-            <a:spLocks noGrp="1"/>
-          </p:cNvSpPr>
-          <p:nvPr>
-            <p:ph idx="1"/>
-          </p:nvPr>
-        </p:nvSpPr>
-        <p:spPr>
-          <a:xfrm>
-            <a:off x="1374531" y="1852002"/>
-            <a:ext cx="10515600" cy="4351338"/>
-          </a:xfrm>
-        </p:spPr>
-        <p:txBody>
-          <a:bodyPr/>
-          <a:lstStyle/>
-          <a:p>
-            <a:pPr marL="0" indent="0">
-              <a:buNone/>
-            </a:pPr>
-            <a:r>
-              <a:rPr lang="ru-RU" dirty="0"/>
-              <a:t>Не все данные одинаково критичны к потерям:</a:t>
-            </a:r>
-          </a:p>
-          <a:p>
-            <a:pPr marL="0" indent="0">
-              <a:buNone/>
-            </a:pPr>
-            <a:r>
-              <a:rPr lang="ru-RU" b="1" dirty="0"/>
-              <a:t>Чувствительные (</a:t>
-            </a:r>
-            <a:r>
-              <a:rPr lang="ru-RU" b="1" dirty="0" err="1"/>
-              <a:t>Non-elastic</a:t>
-            </a:r>
-            <a:r>
-              <a:rPr lang="ru-RU" b="1" dirty="0"/>
-              <a:t>):</a:t>
-            </a:r>
-            <a:endParaRPr lang="ru-RU" dirty="0"/>
-          </a:p>
-          <a:p>
-            <a:pPr lvl="1"/>
-            <a:r>
-              <a:rPr lang="ru-RU" i="1" dirty="0"/>
-              <a:t>Тип данных:</a:t>
-            </a:r>
-            <a:r>
-              <a:rPr lang="ru-RU" dirty="0"/>
-              <a:t> Архивы, программы, текст, базы данных.</a:t>
-            </a:r>
-          </a:p>
-          <a:p>
-            <a:pPr lvl="1"/>
-            <a:r>
-              <a:rPr lang="ru-RU" i="1" dirty="0"/>
-              <a:t>Реакция:</a:t>
-            </a:r>
-            <a:r>
-              <a:rPr lang="ru-RU" dirty="0"/>
-              <a:t> Даже потеря одного байта -&gt; Файл бесполезен.</a:t>
-            </a:r>
-          </a:p>
-          <a:p>
-            <a:pPr lvl="1"/>
-            <a:r>
-              <a:rPr lang="ru-RU" i="1" dirty="0"/>
-              <a:t>Сервис:</a:t>
-            </a:r>
-            <a:r>
-              <a:rPr lang="ru-RU" dirty="0"/>
-              <a:t> Необходима 100% доставка (TCP</a:t>
-            </a:r>
-            <a:r>
-              <a:rPr lang="ru-RU" dirty="0" smtClean="0"/>
-              <a:t>).</a:t>
-            </a:r>
-          </a:p>
-          <a:p>
-            <a:pPr lvl="1"/>
-            <a:endParaRPr lang="ru-RU" dirty="0"/>
-          </a:p>
-          <a:p>
-            <a:pPr marL="0" indent="0">
-              <a:buNone/>
-            </a:pPr>
-            <a:r>
-              <a:rPr lang="ru-RU" b="1" dirty="0"/>
-              <a:t>Устойчивые (</a:t>
-            </a:r>
-            <a:r>
-              <a:rPr lang="ru-RU" b="1" dirty="0" err="1"/>
-              <a:t>Elastic</a:t>
-            </a:r>
-            <a:r>
-              <a:rPr lang="ru-RU" b="1" dirty="0"/>
-              <a:t> / </a:t>
-            </a:r>
-            <a:r>
-              <a:rPr lang="ru-RU" b="1" dirty="0" err="1"/>
-              <a:t>Loss-Tolerant</a:t>
-            </a:r>
-            <a:r>
-              <a:rPr lang="ru-RU" b="1" dirty="0"/>
-              <a:t>):</a:t>
-            </a:r>
-            <a:endParaRPr lang="ru-RU" dirty="0"/>
-          </a:p>
-          <a:p>
-            <a:pPr lvl="1"/>
-            <a:r>
-              <a:rPr lang="ru-RU" i="1" dirty="0"/>
-              <a:t>Тип данных:</a:t>
-            </a:r>
-            <a:r>
-              <a:rPr lang="ru-RU" dirty="0"/>
-              <a:t> Голос, видео (мультимедиа).</a:t>
-            </a:r>
-          </a:p>
-          <a:p>
-            <a:pPr lvl="1"/>
-            <a:r>
-              <a:rPr lang="ru-RU" i="1" dirty="0"/>
-              <a:t>Реакция:</a:t>
-            </a:r>
-            <a:r>
-              <a:rPr lang="ru-RU" dirty="0"/>
-              <a:t> Потеря одного пакета может быть скрыта интерполяцией.</a:t>
-            </a:r>
-          </a:p>
-          <a:p>
-            <a:pPr lvl="1"/>
-            <a:r>
-              <a:rPr lang="ru-RU" i="1" dirty="0"/>
-              <a:t>Порог:</a:t>
-            </a:r>
-            <a:r>
-              <a:rPr lang="ru-RU" dirty="0"/>
-              <a:t> Допустимо до 1-5% потерь (без критического ухудшения качества</a:t>
-            </a:r>
-            <a:r>
-              <a:rPr lang="ru-RU" dirty="0" smtClean="0"/>
-              <a:t>)</a:t>
-            </a:r>
-            <a:endParaRPr lang="ru-RU" dirty="0"/>
-          </a:p>
-        </p:txBody>
-      </p:sp>
-    </p:spTree>
-    <p:extLst>
-      <p:ext uri="{BB962C8B-B14F-4D97-AF65-F5344CB8AC3E}">
-        <p14:creationId xmlns:p14="http://schemas.microsoft.com/office/powerpoint/2010/main" val="768990590"/>
-      </p:ext>
-    </p:extLst>
-  </p:cSld>
-  <p:clrMapOvr>
-    <a:masterClrMapping/>
-  </p:clrMapOvr>
-</p:sld>
-</file>
-
-<file path=ppt/slides/slide8.xml><?xml version="1.0" encoding="utf-8"?>
-<p:sld xmlns:a="http://schemas.openxmlformats.org/drawingml/2006/main" xmlns:r="http://schemas.openxmlformats.org/officeDocument/2006/relationships" xmlns:p="http://schemas.openxmlformats.org/presentationml/2006/main">
-  <p:cSld>
-    <p:spTree>
-      <p:nvGrpSpPr>
-        <p:cNvPr id="1" name=""/>
-        <p:cNvGrpSpPr/>
-        <p:nvPr/>
-      </p:nvGrpSpPr>
-      <p:grpSpPr>
-        <a:xfrm>
-          <a:off x="0" y="0"/>
-          <a:ext cx="0" cy="0"/>
-          <a:chOff x="0" y="0"/>
-          <a:chExt cx="0" cy="0"/>
-        </a:xfrm>
-      </p:grpSpPr>
-      <p:sp>
-        <p:nvSpPr>
-          <p:cNvPr id="2" name="Заголовок 1"/>
-          <p:cNvSpPr>
-            <a:spLocks noGrp="1"/>
-          </p:cNvSpPr>
-          <p:nvPr>
-            <p:ph type="title"/>
-          </p:nvPr>
-        </p:nvSpPr>
         <p:spPr/>
         <p:txBody>
           <a:bodyPr/>
@@ -5883,7 +3359,7 @@
 </p:sld>
 </file>
 
-<file path=ppt/slides/slide9.xml><?xml version="1.0" encoding="utf-8"?>
+<file path=ppt/slides/slide12.xml><?xml version="1.0" encoding="utf-8"?>
 <p:sld xmlns:a="http://schemas.openxmlformats.org/drawingml/2006/main" xmlns:r="http://schemas.openxmlformats.org/officeDocument/2006/relationships" xmlns:p="http://schemas.openxmlformats.org/presentationml/2006/main">
   <p:cSld>
     <p:spTree>
@@ -5945,6 +3421,3065 @@
     <p:extLst>
       <p:ext uri="{BB962C8B-B14F-4D97-AF65-F5344CB8AC3E}">
         <p14:creationId xmlns:p14="http://schemas.microsoft.com/office/powerpoint/2010/main" val="3052245652"/>
+      </p:ext>
+    </p:extLst>
+  </p:cSld>
+  <p:clrMapOvr>
+    <a:masterClrMapping/>
+  </p:clrMapOvr>
+</p:sld>
+</file>
+
+<file path=ppt/slides/slide13.xml><?xml version="1.0" encoding="utf-8"?>
+<p:sld xmlns:a="http://schemas.openxmlformats.org/drawingml/2006/main" xmlns:r="http://schemas.openxmlformats.org/officeDocument/2006/relationships" xmlns:p="http://schemas.openxmlformats.org/presentationml/2006/main">
+  <p:cSld>
+    <p:spTree>
+      <p:nvGrpSpPr>
+        <p:cNvPr id="1" name=""/>
+        <p:cNvGrpSpPr/>
+        <p:nvPr/>
+      </p:nvGrpSpPr>
+      <p:grpSpPr>
+        <a:xfrm>
+          <a:off x="0" y="0"/>
+          <a:ext cx="0" cy="0"/>
+          <a:chOff x="0" y="0"/>
+          <a:chExt cx="0" cy="0"/>
+        </a:xfrm>
+      </p:grpSpPr>
+      <p:sp>
+        <p:nvSpPr>
+          <p:cNvPr id="3" name="Объект 2"/>
+          <p:cNvSpPr>
+            <a:spLocks noGrp="1"/>
+          </p:cNvSpPr>
+          <p:nvPr>
+            <p:ph idx="1"/>
+          </p:nvPr>
+        </p:nvSpPr>
+        <p:spPr>
+          <a:xfrm>
+            <a:off x="811822" y="738554"/>
+            <a:ext cx="11022623" cy="5596671"/>
+          </a:xfrm>
+        </p:spPr>
+        <p:txBody>
+          <a:bodyPr>
+            <a:normAutofit lnSpcReduction="10000"/>
+          </a:bodyPr>
+          <a:lstStyle/>
+          <a:p>
+            <a:r>
+              <a:rPr lang="ru-RU" sz="3200" b="1" dirty="0"/>
+              <a:t>FIFO (</a:t>
+            </a:r>
+            <a:r>
+              <a:rPr lang="ru-RU" sz="3200" b="1" dirty="0" err="1"/>
+              <a:t>First</a:t>
+            </a:r>
+            <a:r>
+              <a:rPr lang="ru-RU" sz="3200" b="1" dirty="0"/>
+              <a:t> </a:t>
+            </a:r>
+            <a:r>
+              <a:rPr lang="ru-RU" sz="3200" b="1" dirty="0" err="1"/>
+              <a:t>In</a:t>
+            </a:r>
+            <a:r>
+              <a:rPr lang="ru-RU" sz="3200" b="1" dirty="0"/>
+              <a:t>, </a:t>
+            </a:r>
+            <a:r>
+              <a:rPr lang="ru-RU" sz="3200" b="1" dirty="0" err="1"/>
+              <a:t>First</a:t>
+            </a:r>
+            <a:r>
+              <a:rPr lang="ru-RU" sz="3200" b="1" dirty="0"/>
+              <a:t> </a:t>
+            </a:r>
+            <a:r>
+              <a:rPr lang="ru-RU" sz="3200" b="1" dirty="0" err="1"/>
+              <a:t>Out</a:t>
+            </a:r>
+            <a:r>
+              <a:rPr lang="ru-RU" sz="3200" b="1" dirty="0"/>
+              <a:t>):</a:t>
+            </a:r>
+            <a:r>
+              <a:rPr lang="ru-RU" sz="3200" dirty="0"/>
+              <a:t> Общая очередь. «Кто первым встал — того и отправили». Нет приоритетов</a:t>
+            </a:r>
+            <a:r>
+              <a:rPr lang="ru-RU" sz="3200" dirty="0" smtClean="0"/>
+              <a:t>.</a:t>
+            </a:r>
+          </a:p>
+          <a:p>
+            <a:endParaRPr lang="ru-RU" sz="3200" dirty="0"/>
+          </a:p>
+          <a:p>
+            <a:r>
+              <a:rPr lang="ru-RU" sz="3200" b="1" dirty="0"/>
+              <a:t>Приоритетные очереди (</a:t>
+            </a:r>
+            <a:r>
+              <a:rPr lang="ru-RU" sz="3200" b="1" dirty="0" smtClean="0"/>
+              <a:t>PQ</a:t>
+            </a:r>
+            <a:r>
+              <a:rPr lang="en-US" sz="3200" b="1" dirty="0" smtClean="0"/>
+              <a:t> - </a:t>
+            </a:r>
+            <a:r>
+              <a:rPr lang="en-US" dirty="0"/>
+              <a:t>priority queue</a:t>
+            </a:r>
+            <a:r>
+              <a:rPr lang="ru-RU" sz="3200" b="1" dirty="0" smtClean="0"/>
+              <a:t>):</a:t>
+            </a:r>
+            <a:endParaRPr lang="ru-RU" sz="3200" dirty="0"/>
+          </a:p>
+          <a:p>
+            <a:pPr lvl="1"/>
+            <a:r>
+              <a:rPr lang="ru-RU" sz="3200" dirty="0"/>
+              <a:t>Есть несколько очередей (Высокая, Средняя, Низкая).</a:t>
+            </a:r>
+          </a:p>
+          <a:p>
+            <a:pPr lvl="1"/>
+            <a:r>
+              <a:rPr lang="ru-RU" sz="3200" i="1" dirty="0"/>
+              <a:t>Минус:</a:t>
+            </a:r>
+            <a:r>
+              <a:rPr lang="ru-RU" sz="3200" dirty="0"/>
+              <a:t> «Голод» низкоприоритетного трафика</a:t>
+            </a:r>
+            <a:r>
+              <a:rPr lang="ru-RU" sz="3200" dirty="0" smtClean="0"/>
+              <a:t>.</a:t>
+            </a:r>
+          </a:p>
+          <a:p>
+            <a:pPr lvl="1"/>
+            <a:endParaRPr lang="ru-RU" sz="3200" dirty="0"/>
+          </a:p>
+          <a:p>
+            <a:r>
+              <a:rPr lang="ru-RU" sz="3200" b="1" dirty="0"/>
+              <a:t>Взвешенные очереди (</a:t>
+            </a:r>
+            <a:r>
+              <a:rPr lang="ru-RU" sz="3200" b="1" dirty="0" smtClean="0"/>
+              <a:t>WFQ</a:t>
+            </a:r>
+            <a:r>
+              <a:rPr lang="en-US" sz="3200" b="1" dirty="0" smtClean="0"/>
+              <a:t> - </a:t>
+            </a:r>
+            <a:r>
+              <a:rPr lang="en-US" dirty="0"/>
+              <a:t>Weighted fair queuing</a:t>
+            </a:r>
+            <a:r>
+              <a:rPr lang="ru-RU" sz="3200" b="1" dirty="0" smtClean="0"/>
+              <a:t>):</a:t>
+            </a:r>
+            <a:endParaRPr lang="ru-RU" sz="3200" dirty="0"/>
+          </a:p>
+          <a:p>
+            <a:pPr lvl="1"/>
+            <a:r>
+              <a:rPr lang="ru-RU" sz="3200" dirty="0"/>
+              <a:t>Каждому потоку выделяется доля пропускной способности.</a:t>
+            </a:r>
+          </a:p>
+          <a:p>
+            <a:pPr lvl="1"/>
+            <a:r>
+              <a:rPr lang="ru-RU" sz="3200" i="1" dirty="0"/>
+              <a:t>Плюс:</a:t>
+            </a:r>
+            <a:r>
+              <a:rPr lang="ru-RU" sz="3200" dirty="0"/>
+              <a:t> Справедливость, предсказуемость.</a:t>
+            </a:r>
+          </a:p>
+          <a:p>
+            <a:endParaRPr lang="ru-RU" dirty="0"/>
+          </a:p>
+        </p:txBody>
+      </p:sp>
+    </p:spTree>
+    <p:extLst>
+      <p:ext uri="{BB962C8B-B14F-4D97-AF65-F5344CB8AC3E}">
+        <p14:creationId xmlns:p14="http://schemas.microsoft.com/office/powerpoint/2010/main" val="1790346460"/>
+      </p:ext>
+    </p:extLst>
+  </p:cSld>
+  <p:clrMapOvr>
+    <a:masterClrMapping/>
+  </p:clrMapOvr>
+</p:sld>
+</file>
+
+<file path=ppt/slides/slide14.xml><?xml version="1.0" encoding="utf-8"?>
+<p:sld xmlns:a="http://schemas.openxmlformats.org/drawingml/2006/main" xmlns:r="http://schemas.openxmlformats.org/officeDocument/2006/relationships" xmlns:p="http://schemas.openxmlformats.org/presentationml/2006/main">
+  <p:cSld>
+    <p:spTree>
+      <p:nvGrpSpPr>
+        <p:cNvPr id="1" name=""/>
+        <p:cNvGrpSpPr/>
+        <p:nvPr/>
+      </p:nvGrpSpPr>
+      <p:grpSpPr>
+        <a:xfrm>
+          <a:off x="0" y="0"/>
+          <a:ext cx="0" cy="0"/>
+          <a:chOff x="0" y="0"/>
+          <a:chExt cx="0" cy="0"/>
+        </a:xfrm>
+      </p:grpSpPr>
+      <p:sp>
+        <p:nvSpPr>
+          <p:cNvPr id="2" name="Заголовок 1"/>
+          <p:cNvSpPr>
+            <a:spLocks noGrp="1"/>
+          </p:cNvSpPr>
+          <p:nvPr>
+            <p:ph type="title"/>
+          </p:nvPr>
+        </p:nvSpPr>
+        <p:spPr>
+          <a:xfrm>
+            <a:off x="838200" y="365125"/>
+            <a:ext cx="10090638" cy="1325563"/>
+          </a:xfrm>
+        </p:spPr>
+        <p:txBody>
+          <a:bodyPr>
+            <a:normAutofit/>
+          </a:bodyPr>
+          <a:lstStyle/>
+          <a:p>
+            <a:r>
+              <a:rPr lang="ru-RU" b="1" dirty="0"/>
+              <a:t>Инструменты </a:t>
+            </a:r>
+            <a:r>
+              <a:rPr lang="en-US" b="1" dirty="0" err="1"/>
+              <a:t>QoS</a:t>
+            </a:r>
+            <a:r>
+              <a:rPr lang="en-US" b="1" dirty="0"/>
+              <a:t> — </a:t>
+            </a:r>
+            <a:r>
+              <a:rPr lang="ru-RU" b="1" dirty="0"/>
+              <a:t>Кондиционирование </a:t>
+            </a:r>
+            <a:r>
+              <a:rPr lang="ru-RU" b="1" dirty="0" smtClean="0"/>
+              <a:t>трафика</a:t>
+            </a:r>
+            <a:endParaRPr lang="ru-RU" dirty="0"/>
+          </a:p>
+        </p:txBody>
+      </p:sp>
+      <p:sp>
+        <p:nvSpPr>
+          <p:cNvPr id="3" name="Объект 2"/>
+          <p:cNvSpPr>
+            <a:spLocks noGrp="1"/>
+          </p:cNvSpPr>
+          <p:nvPr>
+            <p:ph idx="1"/>
+          </p:nvPr>
+        </p:nvSpPr>
+        <p:spPr/>
+        <p:txBody>
+          <a:bodyPr>
+            <a:normAutofit fontScale="92500"/>
+          </a:bodyPr>
+          <a:lstStyle/>
+          <a:p>
+            <a:r>
+              <a:rPr lang="ru-RU" dirty="0"/>
+              <a:t>Механизмы ограничения и формирования трафика (</a:t>
+            </a:r>
+            <a:r>
+              <a:rPr lang="en-US" dirty="0"/>
+              <a:t>Traffic Policing / Shaping) .</a:t>
+            </a:r>
+          </a:p>
+          <a:p>
+            <a:r>
+              <a:rPr lang="ru-RU" b="1" dirty="0"/>
+              <a:t>Схема «Маркерное ведро» (</a:t>
+            </a:r>
+            <a:r>
+              <a:rPr lang="en-US" b="1" dirty="0"/>
+              <a:t>Token Bucket):</a:t>
+            </a:r>
+            <a:endParaRPr lang="en-US" dirty="0"/>
+          </a:p>
+          <a:p>
+            <a:r>
+              <a:rPr lang="ru-RU" dirty="0"/>
+              <a:t>Пакеты проходят через «контроллер».</a:t>
+            </a:r>
+          </a:p>
+          <a:p>
+            <a:r>
+              <a:rPr lang="ru-RU" dirty="0"/>
+              <a:t>Если трафик укладывается в оговоренный лимит (</a:t>
+            </a:r>
+            <a:r>
+              <a:rPr lang="en-US" dirty="0"/>
+              <a:t>CIR — Committed Information Rate) -&gt; </a:t>
+            </a:r>
+            <a:r>
+              <a:rPr lang="ru-RU" dirty="0"/>
+              <a:t>пропускаем.</a:t>
+            </a:r>
+          </a:p>
+          <a:p>
+            <a:r>
+              <a:rPr lang="ru-RU" dirty="0"/>
+              <a:t>Если превышает:</a:t>
+            </a:r>
+          </a:p>
+          <a:p>
+            <a:pPr lvl="1"/>
+            <a:r>
+              <a:rPr lang="en-US" b="1" dirty="0"/>
+              <a:t>Policing:</a:t>
+            </a:r>
+            <a:r>
+              <a:rPr lang="en-US" dirty="0"/>
+              <a:t> </a:t>
+            </a:r>
+            <a:r>
+              <a:rPr lang="ru-RU" dirty="0"/>
+              <a:t>Отбросить лишнее (</a:t>
+            </a:r>
+            <a:r>
+              <a:rPr lang="en-US" dirty="0"/>
+              <a:t>Drop).</a:t>
+            </a:r>
+          </a:p>
+          <a:p>
+            <a:pPr lvl="1"/>
+            <a:r>
+              <a:rPr lang="en-US" b="1" dirty="0"/>
+              <a:t>Shaping:</a:t>
+            </a:r>
+            <a:r>
+              <a:rPr lang="en-US" dirty="0"/>
+              <a:t> </a:t>
+            </a:r>
+            <a:r>
+              <a:rPr lang="ru-RU" dirty="0"/>
+              <a:t>Задержать лишнее в буфере (</a:t>
+            </a:r>
+            <a:r>
+              <a:rPr lang="en-US" dirty="0"/>
+              <a:t>Buffer).</a:t>
+            </a:r>
+          </a:p>
+          <a:p>
+            <a:pPr marL="0" indent="0">
+              <a:buNone/>
+            </a:pPr>
+            <a:r>
+              <a:rPr lang="ru-RU" b="1" dirty="0"/>
+              <a:t>Зачем:</a:t>
+            </a:r>
+            <a:r>
+              <a:rPr lang="ru-RU" dirty="0"/>
+              <a:t> Сглаживание пульсации трафика, чтобы перегружать магистраль.</a:t>
+            </a:r>
+          </a:p>
+        </p:txBody>
+      </p:sp>
+    </p:spTree>
+    <p:extLst>
+      <p:ext uri="{BB962C8B-B14F-4D97-AF65-F5344CB8AC3E}">
+        <p14:creationId xmlns:p14="http://schemas.microsoft.com/office/powerpoint/2010/main" val="2131951919"/>
+      </p:ext>
+    </p:extLst>
+  </p:cSld>
+  <p:clrMapOvr>
+    <a:masterClrMapping/>
+  </p:clrMapOvr>
+</p:sld>
+</file>
+
+<file path=ppt/slides/slide15.xml><?xml version="1.0" encoding="utf-8"?>
+<p:sld xmlns:a="http://schemas.openxmlformats.org/drawingml/2006/main" xmlns:r="http://schemas.openxmlformats.org/officeDocument/2006/relationships" xmlns:p="http://schemas.openxmlformats.org/presentationml/2006/main">
+  <p:cSld>
+    <p:spTree>
+      <p:nvGrpSpPr>
+        <p:cNvPr id="1" name=""/>
+        <p:cNvGrpSpPr/>
+        <p:nvPr/>
+      </p:nvGrpSpPr>
+      <p:grpSpPr>
+        <a:xfrm>
+          <a:off x="0" y="0"/>
+          <a:ext cx="0" cy="0"/>
+          <a:chOff x="0" y="0"/>
+          <a:chExt cx="0" cy="0"/>
+        </a:xfrm>
+      </p:grpSpPr>
+      <p:sp>
+        <p:nvSpPr>
+          <p:cNvPr id="2" name="Заголовок 1"/>
+          <p:cNvSpPr>
+            <a:spLocks noGrp="1"/>
+          </p:cNvSpPr>
+          <p:nvPr>
+            <p:ph type="title"/>
+          </p:nvPr>
+        </p:nvSpPr>
+        <p:spPr/>
+        <p:txBody>
+          <a:bodyPr/>
+          <a:lstStyle/>
+          <a:p>
+            <a:r>
+              <a:rPr lang="ru-RU" b="1" dirty="0"/>
+              <a:t>Архитектуры </a:t>
+            </a:r>
+            <a:r>
+              <a:rPr lang="en-US" b="1" dirty="0" err="1" smtClean="0"/>
+              <a:t>QoS</a:t>
+            </a:r>
+            <a:endParaRPr lang="ru-RU" dirty="0"/>
+          </a:p>
+        </p:txBody>
+      </p:sp>
+      <p:sp>
+        <p:nvSpPr>
+          <p:cNvPr id="3" name="Объект 2"/>
+          <p:cNvSpPr>
+            <a:spLocks noGrp="1"/>
+          </p:cNvSpPr>
+          <p:nvPr>
+            <p:ph idx="1"/>
+          </p:nvPr>
+        </p:nvSpPr>
+        <p:spPr/>
+        <p:txBody>
+          <a:bodyPr>
+            <a:normAutofit lnSpcReduction="10000"/>
+          </a:bodyPr>
+          <a:lstStyle/>
+          <a:p>
+            <a:pPr marL="0" indent="0">
+              <a:buNone/>
+            </a:pPr>
+            <a:r>
+              <a:rPr lang="ru-RU" dirty="0"/>
+              <a:t>На практике </a:t>
+            </a:r>
+            <a:r>
+              <a:rPr lang="ru-RU" dirty="0" err="1"/>
+              <a:t>QoS</a:t>
+            </a:r>
+            <a:r>
+              <a:rPr lang="ru-RU" dirty="0"/>
+              <a:t> реализуется двумя основными моделями:</a:t>
+            </a:r>
+          </a:p>
+          <a:p>
+            <a:pPr marL="0" indent="0">
+              <a:buNone/>
+            </a:pPr>
+            <a:r>
+              <a:rPr lang="ru-RU" b="1" dirty="0" err="1"/>
+              <a:t>IntServ</a:t>
+            </a:r>
+            <a:r>
+              <a:rPr lang="ru-RU" b="1" dirty="0"/>
+              <a:t> (</a:t>
+            </a:r>
+            <a:r>
+              <a:rPr lang="ru-RU" b="1" dirty="0" err="1"/>
+              <a:t>Integrated</a:t>
+            </a:r>
+            <a:r>
+              <a:rPr lang="ru-RU" b="1" dirty="0"/>
+              <a:t> </a:t>
+            </a:r>
+            <a:r>
+              <a:rPr lang="ru-RU" b="1" dirty="0" err="1"/>
+              <a:t>Services</a:t>
+            </a:r>
+            <a:r>
+              <a:rPr lang="ru-RU" b="1" dirty="0"/>
+              <a:t>) / RSVP:</a:t>
+            </a:r>
+            <a:endParaRPr lang="ru-RU" dirty="0"/>
+          </a:p>
+          <a:p>
+            <a:pPr lvl="1"/>
+            <a:r>
+              <a:rPr lang="ru-RU" b="1" dirty="0"/>
+              <a:t>Как работает:</a:t>
+            </a:r>
+            <a:r>
+              <a:rPr lang="ru-RU" dirty="0"/>
+              <a:t> Резервируем ресурсы заранее (как заказ столика в ресторане). Протокол сигнализации — RSVP.</a:t>
+            </a:r>
+          </a:p>
+          <a:p>
+            <a:pPr lvl="1"/>
+            <a:r>
+              <a:rPr lang="ru-RU" b="1" dirty="0"/>
+              <a:t>Минус:</a:t>
+            </a:r>
+            <a:r>
+              <a:rPr lang="ru-RU" dirty="0"/>
+              <a:t> Плохо масштабируется для больших сетей (Интернет).</a:t>
+            </a:r>
+          </a:p>
+          <a:p>
+            <a:pPr marL="0" indent="0">
+              <a:buNone/>
+            </a:pPr>
+            <a:r>
+              <a:rPr lang="ru-RU" b="1" dirty="0" err="1"/>
+              <a:t>DiffServ</a:t>
+            </a:r>
+            <a:r>
+              <a:rPr lang="ru-RU" b="1" dirty="0"/>
+              <a:t> (</a:t>
+            </a:r>
+            <a:r>
+              <a:rPr lang="ru-RU" b="1" dirty="0" err="1"/>
+              <a:t>Differentiated</a:t>
+            </a:r>
+            <a:r>
+              <a:rPr lang="ru-RU" b="1" dirty="0"/>
+              <a:t> </a:t>
+            </a:r>
+            <a:r>
+              <a:rPr lang="ru-RU" b="1" dirty="0" err="1"/>
+              <a:t>Services</a:t>
+            </a:r>
+            <a:r>
+              <a:rPr lang="ru-RU" b="1" dirty="0"/>
+              <a:t>):</a:t>
+            </a:r>
+            <a:endParaRPr lang="ru-RU" dirty="0"/>
+          </a:p>
+          <a:p>
+            <a:pPr lvl="1"/>
+            <a:r>
+              <a:rPr lang="ru-RU" b="1" dirty="0"/>
+              <a:t>Как работает:</a:t>
+            </a:r>
+            <a:r>
+              <a:rPr lang="ru-RU" dirty="0"/>
+              <a:t> Маркируем пакеты метками (метка в поле DSCP заголовка IP) .</a:t>
+            </a:r>
+          </a:p>
+          <a:p>
+            <a:pPr lvl="1"/>
+            <a:r>
+              <a:rPr lang="ru-RU" b="1" dirty="0"/>
+              <a:t>Действие:</a:t>
+            </a:r>
+            <a:r>
+              <a:rPr lang="ru-RU" dirty="0"/>
+              <a:t> «Золотым» пакетам — лучший сервис, «Серебряным» — обычный.</a:t>
+            </a:r>
+          </a:p>
+          <a:p>
+            <a:pPr lvl="1"/>
+            <a:r>
+              <a:rPr lang="ru-RU" b="1" dirty="0"/>
+              <a:t>Плюс:</a:t>
+            </a:r>
+            <a:r>
+              <a:rPr lang="ru-RU" dirty="0"/>
+              <a:t> Хорошо масштабируется</a:t>
+            </a:r>
+            <a:r>
+              <a:rPr lang="ru-RU" dirty="0" smtClean="0"/>
+              <a:t>.</a:t>
+            </a:r>
+            <a:br>
+              <a:rPr lang="ru-RU" dirty="0" smtClean="0"/>
+            </a:br>
+            <a:endParaRPr lang="ru-RU" dirty="0"/>
+          </a:p>
+        </p:txBody>
+      </p:sp>
+    </p:spTree>
+    <p:extLst>
+      <p:ext uri="{BB962C8B-B14F-4D97-AF65-F5344CB8AC3E}">
+        <p14:creationId xmlns:p14="http://schemas.microsoft.com/office/powerpoint/2010/main" val="76894491"/>
+      </p:ext>
+    </p:extLst>
+  </p:cSld>
+  <p:clrMapOvr>
+    <a:masterClrMapping/>
+  </p:clrMapOvr>
+</p:sld>
+</file>
+
+<file path=ppt/slides/slide16.xml><?xml version="1.0" encoding="utf-8"?>
+<p:sld xmlns:a="http://schemas.openxmlformats.org/drawingml/2006/main" xmlns:r="http://schemas.openxmlformats.org/officeDocument/2006/relationships" xmlns:p="http://schemas.openxmlformats.org/presentationml/2006/main">
+  <p:cSld>
+    <p:spTree>
+      <p:nvGrpSpPr>
+        <p:cNvPr id="1" name=""/>
+        <p:cNvGrpSpPr/>
+        <p:nvPr/>
+      </p:nvGrpSpPr>
+      <p:grpSpPr>
+        <a:xfrm>
+          <a:off x="0" y="0"/>
+          <a:ext cx="0" cy="0"/>
+          <a:chOff x="0" y="0"/>
+          <a:chExt cx="0" cy="0"/>
+        </a:xfrm>
+      </p:grpSpPr>
+      <p:pic>
+        <p:nvPicPr>
+          <p:cNvPr id="5" name="Объект 4"/>
+          <p:cNvPicPr>
+            <a:picLocks noGrp="1" noChangeAspect="1"/>
+          </p:cNvPicPr>
+          <p:nvPr>
+            <p:ph idx="1"/>
+          </p:nvPr>
+        </p:nvPicPr>
+        <p:blipFill>
+          <a:blip r:embed="rId2"/>
+          <a:stretch>
+            <a:fillRect/>
+          </a:stretch>
+        </p:blipFill>
+        <p:spPr>
+          <a:xfrm>
+            <a:off x="844346" y="858043"/>
+            <a:ext cx="6880877" cy="5160658"/>
+          </a:xfrm>
+          <a:prstGeom prst="rect">
+            <a:avLst/>
+          </a:prstGeom>
+        </p:spPr>
+      </p:pic>
+      <p:sp>
+        <p:nvSpPr>
+          <p:cNvPr id="6" name="Прямоугольник 5"/>
+          <p:cNvSpPr/>
+          <p:nvPr/>
+        </p:nvSpPr>
+        <p:spPr>
+          <a:xfrm>
+            <a:off x="7654884" y="2479900"/>
+            <a:ext cx="3238500" cy="1477328"/>
+          </a:xfrm>
+          <a:prstGeom prst="rect">
+            <a:avLst/>
+          </a:prstGeom>
+        </p:spPr>
+        <p:txBody>
+          <a:bodyPr wrap="square">
+            <a:spAutoFit/>
+          </a:bodyPr>
+          <a:lstStyle/>
+          <a:p>
+            <a:r>
+              <a:rPr lang="ru-RU" b="1" dirty="0" smtClean="0">
+                <a:solidFill>
+                  <a:schemeClr val="tx1">
+                    <a:lumMod val="95000"/>
+                    <a:lumOff val="5000"/>
+                  </a:schemeClr>
+                </a:solidFill>
+                <a:latin typeface="YS Text"/>
+              </a:rPr>
+              <a:t>AF PHB</a:t>
+            </a:r>
+            <a:r>
+              <a:rPr lang="ru-RU" dirty="0" smtClean="0">
+                <a:solidFill>
+                  <a:schemeClr val="tx1">
+                    <a:lumMod val="95000"/>
+                    <a:lumOff val="5000"/>
+                  </a:schemeClr>
+                </a:solidFill>
+                <a:latin typeface="YS Text"/>
+              </a:rPr>
+              <a:t> («Гарантированная пересылка») — это набор правил обработки пакетов на каждом сетевом узле (маршрутизаторе)</a:t>
+            </a:r>
+            <a:endParaRPr lang="ru-RU" dirty="0">
+              <a:solidFill>
+                <a:schemeClr val="tx1">
+                  <a:lumMod val="95000"/>
+                  <a:lumOff val="5000"/>
+                </a:schemeClr>
+              </a:solidFill>
+            </a:endParaRPr>
+          </a:p>
+        </p:txBody>
+      </p:sp>
+      <p:sp>
+        <p:nvSpPr>
+          <p:cNvPr id="7" name="Прямоугольник 6"/>
+          <p:cNvSpPr/>
+          <p:nvPr/>
+        </p:nvSpPr>
+        <p:spPr>
+          <a:xfrm>
+            <a:off x="7725223" y="4369815"/>
+            <a:ext cx="3238500" cy="1477328"/>
+          </a:xfrm>
+          <a:prstGeom prst="rect">
+            <a:avLst/>
+          </a:prstGeom>
+        </p:spPr>
+        <p:txBody>
+          <a:bodyPr wrap="square">
+            <a:spAutoFit/>
+          </a:bodyPr>
+          <a:lstStyle/>
+          <a:p>
+            <a:r>
+              <a:rPr lang="ru-RU" b="1" dirty="0">
+                <a:solidFill>
+                  <a:schemeClr val="tx1">
+                    <a:lumMod val="95000"/>
+                    <a:lumOff val="5000"/>
+                  </a:schemeClr>
+                </a:solidFill>
+                <a:latin typeface="YS Text"/>
+              </a:rPr>
+              <a:t>EF PHB</a:t>
+            </a:r>
+            <a:r>
+              <a:rPr lang="ru-RU" dirty="0">
+                <a:solidFill>
+                  <a:schemeClr val="tx1">
+                    <a:lumMod val="95000"/>
+                    <a:lumOff val="5000"/>
+                  </a:schemeClr>
+                </a:solidFill>
+                <a:latin typeface="YS Text"/>
+              </a:rPr>
+              <a:t> («Ускоренная пересылка») — это набор правил обработки пакетов на каждом сетевом узле</a:t>
+            </a:r>
+            <a:endParaRPr lang="ru-RU" dirty="0">
+              <a:solidFill>
+                <a:schemeClr val="tx1">
+                  <a:lumMod val="95000"/>
+                  <a:lumOff val="5000"/>
+                </a:schemeClr>
+              </a:solidFill>
+            </a:endParaRPr>
+          </a:p>
+        </p:txBody>
+      </p:sp>
+    </p:spTree>
+    <p:extLst>
+      <p:ext uri="{BB962C8B-B14F-4D97-AF65-F5344CB8AC3E}">
+        <p14:creationId xmlns:p14="http://schemas.microsoft.com/office/powerpoint/2010/main" val="1488319671"/>
+      </p:ext>
+    </p:extLst>
+  </p:cSld>
+  <p:clrMapOvr>
+    <a:masterClrMapping/>
+  </p:clrMapOvr>
+</p:sld>
+</file>
+
+<file path=ppt/slides/slide17.xml><?xml version="1.0" encoding="utf-8"?>
+<p:sld xmlns:a="http://schemas.openxmlformats.org/drawingml/2006/main" xmlns:r="http://schemas.openxmlformats.org/officeDocument/2006/relationships" xmlns:p="http://schemas.openxmlformats.org/presentationml/2006/main">
+  <p:cSld>
+    <p:spTree>
+      <p:nvGrpSpPr>
+        <p:cNvPr id="1" name=""/>
+        <p:cNvGrpSpPr/>
+        <p:nvPr/>
+      </p:nvGrpSpPr>
+      <p:grpSpPr>
+        <a:xfrm>
+          <a:off x="0" y="0"/>
+          <a:ext cx="0" cy="0"/>
+          <a:chOff x="0" y="0"/>
+          <a:chExt cx="0" cy="0"/>
+        </a:xfrm>
+      </p:grpSpPr>
+      <p:sp>
+        <p:nvSpPr>
+          <p:cNvPr id="4" name="Прямоугольник 3"/>
+          <p:cNvSpPr/>
+          <p:nvPr/>
+        </p:nvSpPr>
+        <p:spPr>
+          <a:xfrm>
+            <a:off x="3270737" y="2769576"/>
+            <a:ext cx="6365631" cy="830997"/>
+          </a:xfrm>
+          <a:prstGeom prst="rect">
+            <a:avLst/>
+          </a:prstGeom>
+        </p:spPr>
+        <p:txBody>
+          <a:bodyPr wrap="square">
+            <a:spAutoFit/>
+          </a:bodyPr>
+          <a:lstStyle/>
+          <a:p>
+            <a:r>
+              <a:rPr lang="ru-RU" sz="4800" dirty="0" smtClean="0"/>
+              <a:t>Спасибо за внимание</a:t>
+            </a:r>
+            <a:endParaRPr lang="ru-RU" sz="4800" dirty="0"/>
+          </a:p>
+        </p:txBody>
+      </p:sp>
+    </p:spTree>
+    <p:extLst>
+      <p:ext uri="{BB962C8B-B14F-4D97-AF65-F5344CB8AC3E}">
+        <p14:creationId xmlns:p14="http://schemas.microsoft.com/office/powerpoint/2010/main" val="3955430252"/>
+      </p:ext>
+    </p:extLst>
+  </p:cSld>
+  <p:clrMapOvr>
+    <a:masterClrMapping/>
+  </p:clrMapOvr>
+</p:sld>
+</file>
+
+<file path=ppt/slides/slide2.xml><?xml version="1.0" encoding="utf-8"?>
+<p:sld xmlns:a="http://schemas.openxmlformats.org/drawingml/2006/main" xmlns:r="http://schemas.openxmlformats.org/officeDocument/2006/relationships" xmlns:p="http://schemas.openxmlformats.org/presentationml/2006/main">
+  <p:cSld>
+    <p:spTree>
+      <p:nvGrpSpPr>
+        <p:cNvPr id="1" name=""/>
+        <p:cNvGrpSpPr/>
+        <p:nvPr/>
+      </p:nvGrpSpPr>
+      <p:grpSpPr>
+        <a:xfrm>
+          <a:off x="0" y="0"/>
+          <a:ext cx="0" cy="0"/>
+          <a:chOff x="0" y="0"/>
+          <a:chExt cx="0" cy="0"/>
+        </a:xfrm>
+      </p:grpSpPr>
+      <p:sp>
+        <p:nvSpPr>
+          <p:cNvPr id="3" name="Объект 2"/>
+          <p:cNvSpPr>
+            <a:spLocks noGrp="1"/>
+          </p:cNvSpPr>
+          <p:nvPr>
+            <p:ph idx="1"/>
+          </p:nvPr>
+        </p:nvSpPr>
+        <p:spPr>
+          <a:xfrm>
+            <a:off x="838200" y="536330"/>
+            <a:ext cx="10515600" cy="5926015"/>
+          </a:xfrm>
+        </p:spPr>
+        <p:txBody>
+          <a:bodyPr>
+            <a:normAutofit/>
+          </a:bodyPr>
+          <a:lstStyle/>
+          <a:p>
+            <a:pPr marL="0" indent="0">
+              <a:buNone/>
+            </a:pPr>
+            <a:r>
+              <a:rPr lang="ru-RU" sz="4000" b="1" dirty="0" smtClean="0"/>
+              <a:t>Эволюция требований к сети:</a:t>
+            </a:r>
+            <a:endParaRPr lang="en-US" sz="4000" b="1" dirty="0" smtClean="0"/>
+          </a:p>
+          <a:p>
+            <a:r>
+              <a:rPr lang="ru-RU" dirty="0"/>
+              <a:t>Раньше (80-е гг.) доминировали нетребовательные приложения (почта, копирование файлов), которые работали в режиме </a:t>
+            </a:r>
+            <a:r>
+              <a:rPr lang="ru-RU" b="1" dirty="0"/>
+              <a:t>«по мере возможности» (</a:t>
+            </a:r>
+            <a:r>
+              <a:rPr lang="ru-RU" b="1" dirty="0" err="1" smtClean="0"/>
+              <a:t>best-effort</a:t>
+            </a:r>
+            <a:r>
+              <a:rPr lang="en-US" b="1" dirty="0" smtClean="0"/>
+              <a:t> - </a:t>
+            </a:r>
+            <a:r>
+              <a:rPr lang="ru-RU" b="1" dirty="0"/>
+              <a:t>максимальные усилия</a:t>
+            </a:r>
+            <a:r>
+              <a:rPr lang="ru-RU" b="1" dirty="0" smtClean="0"/>
+              <a:t>)</a:t>
+            </a:r>
+            <a:r>
+              <a:rPr lang="ru-RU" dirty="0"/>
+              <a:t> .</a:t>
+            </a:r>
+          </a:p>
+          <a:p>
+            <a:r>
+              <a:rPr lang="ru-RU" b="1" dirty="0"/>
+              <a:t>Ситуация сейчас:</a:t>
+            </a:r>
+            <a:r>
+              <a:rPr lang="ru-RU" dirty="0"/>
+              <a:t> Появление мультимедиа, IP-телефонии и видеоконференций.</a:t>
+            </a:r>
+          </a:p>
+          <a:p>
+            <a:r>
+              <a:rPr lang="ru-RU" b="1" dirty="0"/>
+              <a:t>Проблема:</a:t>
+            </a:r>
+            <a:r>
+              <a:rPr lang="ru-RU" dirty="0"/>
+              <a:t> Простое повышение пропускной способности решает проблему только отчасти. Новым приложениям нужны не просто «килобайты в секунду», а </a:t>
+            </a:r>
+            <a:r>
+              <a:rPr lang="ru-RU" b="1" dirty="0"/>
+              <a:t>гарантии</a:t>
+            </a:r>
+            <a:r>
+              <a:rPr lang="ru-RU" dirty="0"/>
+              <a:t> задержки и стабильности (</a:t>
+            </a:r>
+            <a:r>
+              <a:rPr lang="ru-RU" dirty="0" err="1"/>
+              <a:t>QoS</a:t>
+            </a:r>
+            <a:r>
+              <a:rPr lang="ru-RU" dirty="0" smtClean="0"/>
+              <a:t>)</a:t>
+            </a:r>
+            <a:endParaRPr lang="en-US" dirty="0" smtClean="0"/>
+          </a:p>
+          <a:p>
+            <a:pPr marL="0" indent="0">
+              <a:buNone/>
+            </a:pPr>
+            <a:endParaRPr lang="en-US" dirty="0" smtClean="0"/>
+          </a:p>
+          <a:p>
+            <a:pPr marL="0" indent="0">
+              <a:buNone/>
+            </a:pPr>
+            <a:r>
+              <a:rPr lang="ru-RU" dirty="0" smtClean="0"/>
+              <a:t>Современным </a:t>
+            </a:r>
+            <a:r>
+              <a:rPr lang="ru-RU" dirty="0"/>
+              <a:t>сетям требуется механизм обеспечения качества обслуживания (</a:t>
+            </a:r>
+            <a:r>
+              <a:rPr lang="ru-RU" dirty="0" err="1"/>
+              <a:t>Quality</a:t>
+            </a:r>
+            <a:r>
+              <a:rPr lang="ru-RU" dirty="0"/>
+              <a:t> </a:t>
+            </a:r>
+            <a:r>
+              <a:rPr lang="ru-RU" dirty="0" err="1"/>
+              <a:t>of</a:t>
+            </a:r>
+            <a:r>
+              <a:rPr lang="ru-RU" dirty="0"/>
+              <a:t> </a:t>
+            </a:r>
+            <a:r>
+              <a:rPr lang="ru-RU" dirty="0" err="1"/>
+              <a:t>Service</a:t>
+            </a:r>
+            <a:r>
+              <a:rPr lang="ru-RU" dirty="0"/>
+              <a:t>, </a:t>
+            </a:r>
+            <a:r>
+              <a:rPr lang="ru-RU" dirty="0" err="1"/>
+              <a:t>QoS</a:t>
+            </a:r>
+            <a:r>
+              <a:rPr lang="ru-RU" dirty="0"/>
+              <a:t>)</a:t>
+            </a:r>
+          </a:p>
+          <a:p>
+            <a:pPr marL="0" indent="0">
+              <a:buNone/>
+            </a:pPr>
+            <a:endParaRPr lang="ru-RU" sz="4000" dirty="0"/>
+          </a:p>
+        </p:txBody>
+      </p:sp>
+    </p:spTree>
+    <p:extLst>
+      <p:ext uri="{BB962C8B-B14F-4D97-AF65-F5344CB8AC3E}">
+        <p14:creationId xmlns:p14="http://schemas.microsoft.com/office/powerpoint/2010/main" val="4019100266"/>
+      </p:ext>
+    </p:extLst>
+  </p:cSld>
+  <p:clrMapOvr>
+    <a:masterClrMapping/>
+  </p:clrMapOvr>
+</p:sld>
+</file>
+
+<file path=ppt/slides/slide3.xml><?xml version="1.0" encoding="utf-8"?>
+<p:sld xmlns:a="http://schemas.openxmlformats.org/drawingml/2006/main" xmlns:r="http://schemas.openxmlformats.org/officeDocument/2006/relationships" xmlns:p="http://schemas.openxmlformats.org/presentationml/2006/main">
+  <p:cSld>
+    <p:spTree>
+      <p:nvGrpSpPr>
+        <p:cNvPr id="1" name=""/>
+        <p:cNvGrpSpPr/>
+        <p:nvPr/>
+      </p:nvGrpSpPr>
+      <p:grpSpPr>
+        <a:xfrm>
+          <a:off x="0" y="0"/>
+          <a:ext cx="0" cy="0"/>
+          <a:chOff x="0" y="0"/>
+          <a:chExt cx="0" cy="0"/>
+        </a:xfrm>
+      </p:grpSpPr>
+      <p:pic>
+        <p:nvPicPr>
+          <p:cNvPr id="5" name="Рисунок 4"/>
+          <p:cNvPicPr>
+            <a:picLocks noChangeAspect="1"/>
+          </p:cNvPicPr>
+          <p:nvPr/>
+        </p:nvPicPr>
+        <p:blipFill>
+          <a:blip r:embed="rId2"/>
+          <a:stretch>
+            <a:fillRect/>
+          </a:stretch>
+        </p:blipFill>
+        <p:spPr>
+          <a:xfrm>
+            <a:off x="1720361" y="365125"/>
+            <a:ext cx="8047892" cy="6028060"/>
+          </a:xfrm>
+          <a:prstGeom prst="rect">
+            <a:avLst/>
+          </a:prstGeom>
+        </p:spPr>
+      </p:pic>
+    </p:spTree>
+    <p:extLst>
+      <p:ext uri="{BB962C8B-B14F-4D97-AF65-F5344CB8AC3E}">
+        <p14:creationId xmlns:p14="http://schemas.microsoft.com/office/powerpoint/2010/main" val="562278900"/>
+      </p:ext>
+    </p:extLst>
+  </p:cSld>
+  <p:clrMapOvr>
+    <a:masterClrMapping/>
+  </p:clrMapOvr>
+</p:sld>
+</file>
+
+<file path=ppt/slides/slide4.xml><?xml version="1.0" encoding="utf-8"?>
+<p:sld xmlns:a="http://schemas.openxmlformats.org/drawingml/2006/main" xmlns:r="http://schemas.openxmlformats.org/officeDocument/2006/relationships" xmlns:p="http://schemas.openxmlformats.org/presentationml/2006/main">
+  <p:cSld>
+    <p:spTree>
+      <p:nvGrpSpPr>
+        <p:cNvPr id="1" name=""/>
+        <p:cNvGrpSpPr/>
+        <p:nvPr/>
+      </p:nvGrpSpPr>
+      <p:grpSpPr>
+        <a:xfrm>
+          <a:off x="0" y="0"/>
+          <a:ext cx="0" cy="0"/>
+          <a:chOff x="0" y="0"/>
+          <a:chExt cx="0" cy="0"/>
+        </a:xfrm>
+      </p:grpSpPr>
+      <p:pic>
+        <p:nvPicPr>
+          <p:cNvPr id="4" name="Рисунок 3"/>
+          <p:cNvPicPr>
+            <a:picLocks noChangeAspect="1"/>
+          </p:cNvPicPr>
+          <p:nvPr/>
+        </p:nvPicPr>
+        <p:blipFill>
+          <a:blip r:embed="rId2"/>
+          <a:stretch>
+            <a:fillRect/>
+          </a:stretch>
+        </p:blipFill>
+        <p:spPr>
+          <a:xfrm>
+            <a:off x="1314083" y="1154723"/>
+            <a:ext cx="9686925" cy="4038600"/>
+          </a:xfrm>
+          <a:prstGeom prst="rect">
+            <a:avLst/>
+          </a:prstGeom>
+        </p:spPr>
+      </p:pic>
+      <p:sp>
+        <p:nvSpPr>
+          <p:cNvPr id="5" name="Прямоугольник 4"/>
+          <p:cNvSpPr/>
+          <p:nvPr/>
+        </p:nvSpPr>
+        <p:spPr>
+          <a:xfrm>
+            <a:off x="234462" y="5928082"/>
+            <a:ext cx="8628185" cy="646331"/>
+          </a:xfrm>
+          <a:prstGeom prst="rect">
+            <a:avLst/>
+          </a:prstGeom>
+        </p:spPr>
+        <p:txBody>
+          <a:bodyPr wrap="square">
+            <a:spAutoFit/>
+          </a:bodyPr>
+          <a:lstStyle/>
+          <a:p>
+            <a:r>
+              <a:rPr lang="ru-RU" sz="1200" b="1" dirty="0">
+                <a:latin typeface="YS Text"/>
+              </a:rPr>
+              <a:t>Телефонная сеть общего пользования</a:t>
+            </a:r>
+            <a:r>
+              <a:rPr lang="ru-RU" sz="1200" dirty="0">
+                <a:latin typeface="YS Text"/>
+              </a:rPr>
+              <a:t> (ТСОП, </a:t>
+            </a:r>
+            <a:r>
+              <a:rPr lang="ru-RU" sz="1200" dirty="0" err="1">
+                <a:latin typeface="YS Text"/>
+              </a:rPr>
+              <a:t>ТфОП</a:t>
+            </a:r>
+            <a:r>
+              <a:rPr lang="ru-RU" sz="1200" dirty="0">
+                <a:latin typeface="YS Text"/>
+              </a:rPr>
+              <a:t>, англ. PSTN, </a:t>
+            </a:r>
+            <a:r>
+              <a:rPr lang="ru-RU" sz="1200" dirty="0" err="1">
+                <a:latin typeface="YS Text"/>
+              </a:rPr>
+              <a:t>Public</a:t>
+            </a:r>
+            <a:r>
+              <a:rPr lang="ru-RU" sz="1200" dirty="0">
+                <a:latin typeface="YS Text"/>
+              </a:rPr>
+              <a:t> </a:t>
+            </a:r>
+            <a:r>
+              <a:rPr lang="ru-RU" sz="1200" dirty="0" err="1">
+                <a:latin typeface="YS Text"/>
+              </a:rPr>
+              <a:t>Switched</a:t>
+            </a:r>
+            <a:r>
+              <a:rPr lang="ru-RU" sz="1200" dirty="0">
+                <a:latin typeface="YS Text"/>
+              </a:rPr>
+              <a:t> </a:t>
+            </a:r>
+            <a:r>
+              <a:rPr lang="ru-RU" sz="1200" dirty="0" err="1">
+                <a:latin typeface="YS Text"/>
+              </a:rPr>
+              <a:t>Telephone</a:t>
+            </a:r>
+            <a:r>
+              <a:rPr lang="ru-RU" sz="1200" dirty="0">
+                <a:latin typeface="YS Text"/>
+              </a:rPr>
+              <a:t> </a:t>
+            </a:r>
+            <a:r>
+              <a:rPr lang="ru-RU" sz="1200" dirty="0" err="1">
+                <a:latin typeface="YS Text"/>
+              </a:rPr>
+              <a:t>Network</a:t>
+            </a:r>
+            <a:r>
+              <a:rPr lang="ru-RU" sz="1200" dirty="0">
+                <a:latin typeface="YS Text"/>
+              </a:rPr>
+              <a:t>) — </a:t>
+            </a:r>
+            <a:r>
+              <a:rPr lang="ru-RU" sz="1200" b="1" dirty="0">
+                <a:latin typeface="YS Text"/>
+              </a:rPr>
+              <a:t>всеобщая абонентская сеть связи</a:t>
+            </a:r>
+            <a:r>
+              <a:rPr lang="ru-RU" sz="1200" dirty="0">
+                <a:latin typeface="YS Text"/>
+              </a:rPr>
+              <a:t>, предназначенная для совершения и приёма телефонных звонков (и передачи данных) между пользователями. </a:t>
+            </a:r>
+            <a:endParaRPr lang="ru-RU" sz="1200" dirty="0"/>
+          </a:p>
+        </p:txBody>
+      </p:sp>
+    </p:spTree>
+    <p:extLst>
+      <p:ext uri="{BB962C8B-B14F-4D97-AF65-F5344CB8AC3E}">
+        <p14:creationId xmlns:p14="http://schemas.microsoft.com/office/powerpoint/2010/main" val="2709777717"/>
+      </p:ext>
+    </p:extLst>
+  </p:cSld>
+  <p:clrMapOvr>
+    <a:masterClrMapping/>
+  </p:clrMapOvr>
+</p:sld>
+</file>
+
+<file path=ppt/slides/slide5.xml><?xml version="1.0" encoding="utf-8"?>
+<p:sld xmlns:a="http://schemas.openxmlformats.org/drawingml/2006/main" xmlns:r="http://schemas.openxmlformats.org/officeDocument/2006/relationships" xmlns:p="http://schemas.openxmlformats.org/presentationml/2006/main">
+  <p:cSld>
+    <p:spTree>
+      <p:nvGrpSpPr>
+        <p:cNvPr id="1" name=""/>
+        <p:cNvGrpSpPr/>
+        <p:nvPr/>
+      </p:nvGrpSpPr>
+      <p:grpSpPr>
+        <a:xfrm>
+          <a:off x="0" y="0"/>
+          <a:ext cx="0" cy="0"/>
+          <a:chOff x="0" y="0"/>
+          <a:chExt cx="0" cy="0"/>
+        </a:xfrm>
+      </p:grpSpPr>
+      <p:sp>
+        <p:nvSpPr>
+          <p:cNvPr id="5" name="Прямоугольник 4"/>
+          <p:cNvSpPr/>
+          <p:nvPr/>
+        </p:nvSpPr>
+        <p:spPr>
+          <a:xfrm>
+            <a:off x="3420208" y="2602523"/>
+            <a:ext cx="5706208" cy="923330"/>
+          </a:xfrm>
+          <a:prstGeom prst="rect">
+            <a:avLst/>
+          </a:prstGeom>
+        </p:spPr>
+        <p:txBody>
+          <a:bodyPr wrap="square">
+            <a:spAutoFit/>
+          </a:bodyPr>
+          <a:lstStyle/>
+          <a:p>
+            <a:r>
+              <a:rPr lang="ru-RU" sz="5400" b="1" dirty="0">
+                <a:solidFill>
+                  <a:srgbClr val="0F1115"/>
+                </a:solidFill>
+                <a:latin typeface="quote-cjk-patch"/>
+              </a:rPr>
+              <a:t>Х</a:t>
+            </a:r>
+            <a:r>
+              <a:rPr lang="ru-RU" sz="5400" b="1" dirty="0" smtClean="0">
+                <a:solidFill>
+                  <a:srgbClr val="0F1115"/>
+                </a:solidFill>
+                <a:effectLst/>
+                <a:latin typeface="quote-cjk-patch"/>
+              </a:rPr>
+              <a:t>арактеристики</a:t>
+            </a:r>
+            <a:endParaRPr lang="ru-RU" sz="5400" b="1" dirty="0">
+              <a:solidFill>
+                <a:srgbClr val="0F1115"/>
+              </a:solidFill>
+              <a:effectLst/>
+              <a:latin typeface="quote-cjk-patch"/>
+            </a:endParaRPr>
+          </a:p>
+        </p:txBody>
+      </p:sp>
+    </p:spTree>
+    <p:extLst>
+      <p:ext uri="{BB962C8B-B14F-4D97-AF65-F5344CB8AC3E}">
+        <p14:creationId xmlns:p14="http://schemas.microsoft.com/office/powerpoint/2010/main" val="552652077"/>
+      </p:ext>
+    </p:extLst>
+  </p:cSld>
+  <p:clrMapOvr>
+    <a:masterClrMapping/>
+  </p:clrMapOvr>
+</p:sld>
+</file>
+
+<file path=ppt/slides/slide6.xml><?xml version="1.0" encoding="utf-8"?>
+<p:sld xmlns:a="http://schemas.openxmlformats.org/drawingml/2006/main" xmlns:r="http://schemas.openxmlformats.org/officeDocument/2006/relationships" xmlns:p="http://schemas.openxmlformats.org/presentationml/2006/main">
+  <p:cSld>
+    <p:spTree>
+      <p:nvGrpSpPr>
+        <p:cNvPr id="1" name=""/>
+        <p:cNvGrpSpPr/>
+        <p:nvPr/>
+      </p:nvGrpSpPr>
+      <p:grpSpPr>
+        <a:xfrm>
+          <a:off x="0" y="0"/>
+          <a:ext cx="0" cy="0"/>
+          <a:chOff x="0" y="0"/>
+          <a:chExt cx="0" cy="0"/>
+        </a:xfrm>
+      </p:grpSpPr>
+      <p:sp>
+        <p:nvSpPr>
+          <p:cNvPr id="2" name="Заголовок 1"/>
+          <p:cNvSpPr>
+            <a:spLocks noGrp="1"/>
+          </p:cNvSpPr>
+          <p:nvPr>
+            <p:ph type="title"/>
+          </p:nvPr>
+        </p:nvSpPr>
+        <p:spPr/>
+        <p:txBody>
+          <a:bodyPr>
+            <a:normAutofit/>
+          </a:bodyPr>
+          <a:lstStyle/>
+          <a:p>
+            <a:r>
+              <a:rPr lang="ru-RU" sz="4000" b="1" dirty="0"/>
+              <a:t>Составляющие</a:t>
+            </a:r>
+            <a:r>
+              <a:rPr lang="ru-RU" b="1" dirty="0"/>
+              <a:t> </a:t>
+            </a:r>
+            <a:r>
+              <a:rPr lang="ru-RU" b="1" dirty="0" smtClean="0"/>
+              <a:t>задержки</a:t>
+            </a:r>
+            <a:endParaRPr lang="ru-RU" b="1" dirty="0"/>
+          </a:p>
+        </p:txBody>
+      </p:sp>
+      <p:graphicFrame>
+        <p:nvGraphicFramePr>
+          <p:cNvPr id="5" name="Объект 4"/>
+          <p:cNvGraphicFramePr>
+            <a:graphicFrameLocks noGrp="1"/>
+          </p:cNvGraphicFramePr>
+          <p:nvPr>
+            <p:ph idx="1"/>
+            <p:extLst>
+              <p:ext uri="{D42A27DB-BD31-4B8C-83A1-F6EECF244321}">
+                <p14:modId xmlns:p14="http://schemas.microsoft.com/office/powerpoint/2010/main" val="3578073526"/>
+              </p:ext>
+            </p:extLst>
+          </p:nvPr>
+        </p:nvGraphicFramePr>
+        <p:xfrm>
+          <a:off x="1875691" y="2060246"/>
+          <a:ext cx="8440617" cy="4402100"/>
+        </p:xfrm>
+        <a:graphic>
+          <a:graphicData uri="http://schemas.openxmlformats.org/drawingml/2006/table">
+            <a:tbl>
+              <a:tblPr/>
+              <a:tblGrid>
+                <a:gridCol w="2813539">
+                  <a:extLst>
+                    <a:ext uri="{9D8B030D-6E8A-4147-A177-3AD203B41FA5}">
+                      <a16:colId xmlns:a16="http://schemas.microsoft.com/office/drawing/2014/main" val="273212345"/>
+                    </a:ext>
+                  </a:extLst>
+                </a:gridCol>
+                <a:gridCol w="2813539">
+                  <a:extLst>
+                    <a:ext uri="{9D8B030D-6E8A-4147-A177-3AD203B41FA5}">
+                      <a16:colId xmlns:a16="http://schemas.microsoft.com/office/drawing/2014/main" val="98614195"/>
+                    </a:ext>
+                  </a:extLst>
+                </a:gridCol>
+                <a:gridCol w="2813539">
+                  <a:extLst>
+                    <a:ext uri="{9D8B030D-6E8A-4147-A177-3AD203B41FA5}">
+                      <a16:colId xmlns:a16="http://schemas.microsoft.com/office/drawing/2014/main" val="1636797227"/>
+                    </a:ext>
+                  </a:extLst>
+                </a:gridCol>
+              </a:tblGrid>
+              <a:tr h="553666">
+                <a:tc>
+                  <a:txBody>
+                    <a:bodyPr/>
+                    <a:lstStyle/>
+                    <a:p>
+                      <a:pPr algn="l"/>
+                      <a:r>
+                        <a:rPr lang="ru-RU" b="0">
+                          <a:effectLst/>
+                          <a:latin typeface="quote-cjk-patch"/>
+                        </a:rPr>
+                        <a:t>Тип задержки</a:t>
+                      </a:r>
+                    </a:p>
+                  </a:txBody>
+                  <a:tcPr marR="152400" marT="95250" marB="95250" anchor="ctr">
+                    <a:lnL>
+                      <a:noFill/>
+                    </a:lnL>
+                    <a:lnR>
+                      <a:noFill/>
+                    </a:lnR>
+                    <a:lnT>
+                      <a:noFill/>
+                    </a:lnT>
+                    <a:lnB>
+                      <a:noFill/>
+                    </a:lnB>
+                    <a:solidFill>
+                      <a:srgbClr val="FFFFFF"/>
+                    </a:solidFill>
+                  </a:tcPr>
+                </a:tc>
+                <a:tc>
+                  <a:txBody>
+                    <a:bodyPr/>
+                    <a:lstStyle/>
+                    <a:p>
+                      <a:pPr algn="l"/>
+                      <a:r>
+                        <a:rPr lang="ru-RU" b="0" dirty="0">
+                          <a:effectLst/>
+                          <a:latin typeface="quote-cjk-patch"/>
+                        </a:rPr>
+                        <a:t>Характеристика</a:t>
+                      </a:r>
+                    </a:p>
+                  </a:txBody>
+                  <a:tcPr marL="152400" marR="152400" marT="95250" marB="95250" anchor="ctr">
+                    <a:lnL>
+                      <a:noFill/>
+                    </a:lnL>
+                    <a:lnR>
+                      <a:noFill/>
+                    </a:lnR>
+                    <a:lnT>
+                      <a:noFill/>
+                    </a:lnT>
+                    <a:lnB>
+                      <a:noFill/>
+                    </a:lnB>
+                    <a:solidFill>
+                      <a:srgbClr val="FFFFFF"/>
+                    </a:solidFill>
+                  </a:tcPr>
+                </a:tc>
+                <a:tc>
+                  <a:txBody>
+                    <a:bodyPr/>
+                    <a:lstStyle/>
+                    <a:p>
+                      <a:pPr algn="l"/>
+                      <a:r>
+                        <a:rPr lang="ru-RU" b="0">
+                          <a:effectLst/>
+                          <a:latin typeface="quote-cjk-patch"/>
+                        </a:rPr>
+                        <a:t>От чего зависит</a:t>
+                      </a:r>
+                    </a:p>
+                  </a:txBody>
+                  <a:tcPr marL="152400" marR="152400" marT="95250" marB="95250" anchor="ctr">
+                    <a:lnL>
+                      <a:noFill/>
+                    </a:lnL>
+                    <a:lnR>
+                      <a:noFill/>
+                    </a:lnR>
+                    <a:lnT>
+                      <a:noFill/>
+                    </a:lnT>
+                    <a:lnB>
+                      <a:noFill/>
+                    </a:lnB>
+                    <a:solidFill>
+                      <a:srgbClr val="FFFFFF"/>
+                    </a:solidFill>
+                  </a:tcPr>
+                </a:tc>
+                <a:extLst>
+                  <a:ext uri="{0D108BD9-81ED-4DB2-BD59-A6C34878D82A}">
+                    <a16:rowId xmlns:a16="http://schemas.microsoft.com/office/drawing/2014/main" val="330005408"/>
+                  </a:ext>
+                </a:extLst>
+              </a:tr>
+              <a:tr h="880420">
+                <a:tc>
+                  <a:txBody>
+                    <a:bodyPr/>
+                    <a:lstStyle/>
+                    <a:p>
+                      <a:r>
+                        <a:rPr lang="ru-RU" b="1">
+                          <a:effectLst/>
+                          <a:latin typeface="quote-cjk-patch"/>
+                        </a:rPr>
+                        <a:t>Время сериализации</a:t>
+                      </a:r>
+                      <a:endParaRPr lang="ru-RU" b="0">
+                        <a:effectLst/>
+                        <a:latin typeface="quote-cjk-patch"/>
+                      </a:endParaRPr>
+                    </a:p>
+                  </a:txBody>
+                  <a:tcPr marR="152400" marT="95250" marB="95250" anchor="ctr">
+                    <a:lnL>
+                      <a:noFill/>
+                    </a:lnL>
+                    <a:lnR>
+                      <a:noFill/>
+                    </a:lnR>
+                    <a:lnT>
+                      <a:noFill/>
+                    </a:lnT>
+                    <a:lnB>
+                      <a:noFill/>
+                    </a:lnB>
+                    <a:solidFill>
+                      <a:srgbClr val="FFFFFF"/>
+                    </a:solidFill>
+                  </a:tcPr>
+                </a:tc>
+                <a:tc>
+                  <a:txBody>
+                    <a:bodyPr/>
+                    <a:lstStyle/>
+                    <a:p>
+                      <a:r>
+                        <a:rPr lang="ru-RU" b="0">
+                          <a:effectLst/>
+                          <a:latin typeface="quote-cjk-patch"/>
+                        </a:rPr>
+                        <a:t>Фиксированная</a:t>
+                      </a:r>
+                    </a:p>
+                  </a:txBody>
+                  <a:tcPr marL="152400" marR="152400" marT="95250" marB="95250" anchor="ctr">
+                    <a:lnL>
+                      <a:noFill/>
+                    </a:lnL>
+                    <a:lnR>
+                      <a:noFill/>
+                    </a:lnR>
+                    <a:lnT>
+                      <a:noFill/>
+                    </a:lnT>
+                    <a:lnB>
+                      <a:noFill/>
+                    </a:lnB>
+                    <a:solidFill>
+                      <a:srgbClr val="FFFFFF"/>
+                    </a:solidFill>
+                  </a:tcPr>
+                </a:tc>
+                <a:tc>
+                  <a:txBody>
+                    <a:bodyPr/>
+                    <a:lstStyle/>
+                    <a:p>
+                      <a:r>
+                        <a:rPr lang="ru-RU" b="0">
+                          <a:effectLst/>
+                          <a:latin typeface="quote-cjk-patch"/>
+                        </a:rPr>
+                        <a:t>Скорость передачи данных.</a:t>
+                      </a:r>
+                    </a:p>
+                  </a:txBody>
+                  <a:tcPr marL="152400" marT="95250" marB="95250" anchor="ctr">
+                    <a:lnL>
+                      <a:noFill/>
+                    </a:lnL>
+                    <a:lnR>
+                      <a:noFill/>
+                    </a:lnR>
+                    <a:lnT>
+                      <a:noFill/>
+                    </a:lnT>
+                    <a:lnB>
+                      <a:noFill/>
+                    </a:lnB>
+                    <a:solidFill>
+                      <a:srgbClr val="FFFFFF"/>
+                    </a:solidFill>
+                  </a:tcPr>
+                </a:tc>
+                <a:extLst>
+                  <a:ext uri="{0D108BD9-81ED-4DB2-BD59-A6C34878D82A}">
+                    <a16:rowId xmlns:a16="http://schemas.microsoft.com/office/drawing/2014/main" val="3681741708"/>
+                  </a:ext>
+                </a:extLst>
+              </a:tr>
+              <a:tr h="880420">
+                <a:tc>
+                  <a:txBody>
+                    <a:bodyPr/>
+                    <a:lstStyle/>
+                    <a:p>
+                      <a:r>
+                        <a:rPr lang="ru-RU" b="1" dirty="0">
+                          <a:effectLst/>
+                          <a:latin typeface="quote-cjk-patch"/>
+                        </a:rPr>
+                        <a:t>Время распространения</a:t>
+                      </a:r>
+                      <a:endParaRPr lang="ru-RU" b="0" dirty="0">
+                        <a:effectLst/>
+                        <a:latin typeface="quote-cjk-patch"/>
+                      </a:endParaRPr>
+                    </a:p>
+                  </a:txBody>
+                  <a:tcPr marR="152400" marT="95250" marB="95250" anchor="ctr">
+                    <a:lnL>
+                      <a:noFill/>
+                    </a:lnL>
+                    <a:lnR>
+                      <a:noFill/>
+                    </a:lnR>
+                    <a:lnT>
+                      <a:noFill/>
+                    </a:lnT>
+                    <a:lnB>
+                      <a:noFill/>
+                    </a:lnB>
+                    <a:solidFill>
+                      <a:srgbClr val="FFFFFF"/>
+                    </a:solidFill>
+                  </a:tcPr>
+                </a:tc>
+                <a:tc>
+                  <a:txBody>
+                    <a:bodyPr/>
+                    <a:lstStyle/>
+                    <a:p>
+                      <a:r>
+                        <a:rPr lang="ru-RU" b="0">
+                          <a:effectLst/>
+                          <a:latin typeface="quote-cjk-patch"/>
+                        </a:rPr>
+                        <a:t>Фиксированная</a:t>
+                      </a:r>
+                    </a:p>
+                  </a:txBody>
+                  <a:tcPr marL="152400" marR="152400" marT="95250" marB="95250" anchor="ctr">
+                    <a:lnL>
+                      <a:noFill/>
+                    </a:lnL>
+                    <a:lnR>
+                      <a:noFill/>
+                    </a:lnR>
+                    <a:lnT>
+                      <a:noFill/>
+                    </a:lnT>
+                    <a:lnB>
+                      <a:noFill/>
+                    </a:lnB>
+                    <a:solidFill>
+                      <a:srgbClr val="FFFFFF"/>
+                    </a:solidFill>
+                  </a:tcPr>
+                </a:tc>
+                <a:tc>
+                  <a:txBody>
+                    <a:bodyPr/>
+                    <a:lstStyle/>
+                    <a:p>
+                      <a:r>
+                        <a:rPr lang="ru-RU" b="0">
+                          <a:effectLst/>
+                          <a:latin typeface="quote-cjk-patch"/>
+                        </a:rPr>
+                        <a:t>Длина кабеля (скорость света).</a:t>
+                      </a:r>
+                    </a:p>
+                  </a:txBody>
+                  <a:tcPr marL="152400" marT="95250" marB="95250" anchor="ctr">
+                    <a:lnL>
+                      <a:noFill/>
+                    </a:lnL>
+                    <a:lnR>
+                      <a:noFill/>
+                    </a:lnR>
+                    <a:lnT>
+                      <a:noFill/>
+                    </a:lnT>
+                    <a:lnB>
+                      <a:noFill/>
+                    </a:lnB>
+                    <a:solidFill>
+                      <a:srgbClr val="FFFFFF"/>
+                    </a:solidFill>
+                  </a:tcPr>
+                </a:tc>
+                <a:extLst>
+                  <a:ext uri="{0D108BD9-81ED-4DB2-BD59-A6C34878D82A}">
+                    <a16:rowId xmlns:a16="http://schemas.microsoft.com/office/drawing/2014/main" val="2246103573"/>
+                  </a:ext>
+                </a:extLst>
+              </a:tr>
+              <a:tr h="1207174">
+                <a:tc>
+                  <a:txBody>
+                    <a:bodyPr/>
+                    <a:lstStyle/>
+                    <a:p>
+                      <a:r>
+                        <a:rPr lang="ru-RU" b="1">
+                          <a:effectLst/>
+                          <a:latin typeface="quote-cjk-patch"/>
+                        </a:rPr>
+                        <a:t>Время коммутации</a:t>
+                      </a:r>
+                      <a:endParaRPr lang="ru-RU" b="0">
+                        <a:effectLst/>
+                        <a:latin typeface="quote-cjk-patch"/>
+                      </a:endParaRPr>
+                    </a:p>
+                  </a:txBody>
+                  <a:tcPr marR="152400" marT="95250" marB="95250" anchor="ctr">
+                    <a:lnL>
+                      <a:noFill/>
+                    </a:lnL>
+                    <a:lnR>
+                      <a:noFill/>
+                    </a:lnR>
+                    <a:lnT>
+                      <a:noFill/>
+                    </a:lnT>
+                    <a:lnB>
+                      <a:noFill/>
+                    </a:lnB>
+                    <a:solidFill>
+                      <a:srgbClr val="FFFFFF"/>
+                    </a:solidFill>
+                  </a:tcPr>
+                </a:tc>
+                <a:tc>
+                  <a:txBody>
+                    <a:bodyPr/>
+                    <a:lstStyle/>
+                    <a:p>
+                      <a:r>
+                        <a:rPr lang="ru-RU" b="0" dirty="0">
+                          <a:effectLst/>
+                          <a:latin typeface="quote-cjk-patch"/>
+                        </a:rPr>
+                        <a:t>Переменная</a:t>
+                      </a:r>
+                    </a:p>
+                  </a:txBody>
+                  <a:tcPr marL="152400" marR="152400" marT="95250" marB="95250" anchor="ctr">
+                    <a:lnL>
+                      <a:noFill/>
+                    </a:lnL>
+                    <a:lnR>
+                      <a:noFill/>
+                    </a:lnR>
+                    <a:lnT>
+                      <a:noFill/>
+                    </a:lnT>
+                    <a:lnB>
+                      <a:noFill/>
+                    </a:lnB>
+                    <a:solidFill>
+                      <a:srgbClr val="FFFFFF"/>
+                    </a:solidFill>
+                  </a:tcPr>
+                </a:tc>
+                <a:tc>
+                  <a:txBody>
+                    <a:bodyPr/>
+                    <a:lstStyle/>
+                    <a:p>
+                      <a:r>
+                        <a:rPr lang="ru-RU" b="0">
+                          <a:effectLst/>
+                          <a:latin typeface="quote-cjk-patch"/>
+                        </a:rPr>
+                        <a:t>Быстродействие процессора коммутатора.</a:t>
+                      </a:r>
+                    </a:p>
+                  </a:txBody>
+                  <a:tcPr marL="152400" marT="95250" marB="95250" anchor="ctr">
+                    <a:lnL>
+                      <a:noFill/>
+                    </a:lnL>
+                    <a:lnR>
+                      <a:noFill/>
+                    </a:lnR>
+                    <a:lnT>
+                      <a:noFill/>
+                    </a:lnT>
+                    <a:lnB>
+                      <a:noFill/>
+                    </a:lnB>
+                    <a:solidFill>
+                      <a:srgbClr val="FFFFFF"/>
+                    </a:solidFill>
+                  </a:tcPr>
+                </a:tc>
+                <a:extLst>
+                  <a:ext uri="{0D108BD9-81ED-4DB2-BD59-A6C34878D82A}">
+                    <a16:rowId xmlns:a16="http://schemas.microsoft.com/office/drawing/2014/main" val="3527845937"/>
+                  </a:ext>
+                </a:extLst>
+              </a:tr>
+              <a:tr h="880420">
+                <a:tc>
+                  <a:txBody>
+                    <a:bodyPr/>
+                    <a:lstStyle/>
+                    <a:p>
+                      <a:r>
+                        <a:rPr lang="ru-RU" b="1">
+                          <a:effectLst/>
+                          <a:latin typeface="quote-cjk-patch"/>
+                        </a:rPr>
+                        <a:t>Время ожидания в очереди</a:t>
+                      </a:r>
+                      <a:endParaRPr lang="ru-RU" b="0">
+                        <a:effectLst/>
+                        <a:latin typeface="quote-cjk-patch"/>
+                      </a:endParaRPr>
+                    </a:p>
+                  </a:txBody>
+                  <a:tcPr marR="152400" marT="95250" marB="95250" anchor="ctr">
+                    <a:lnL>
+                      <a:noFill/>
+                    </a:lnL>
+                    <a:lnR>
+                      <a:noFill/>
+                    </a:lnR>
+                    <a:lnT>
+                      <a:noFill/>
+                    </a:lnT>
+                    <a:lnB>
+                      <a:noFill/>
+                    </a:lnB>
+                    <a:solidFill>
+                      <a:srgbClr val="FFFFFF"/>
+                    </a:solidFill>
+                  </a:tcPr>
+                </a:tc>
+                <a:tc>
+                  <a:txBody>
+                    <a:bodyPr/>
+                    <a:lstStyle/>
+                    <a:p>
+                      <a:r>
+                        <a:rPr lang="ru-RU" b="1">
+                          <a:effectLst/>
+                          <a:latin typeface="quote-cjk-patch"/>
+                        </a:rPr>
+                        <a:t>Переменная (основная проблема)</a:t>
+                      </a:r>
+                      <a:endParaRPr lang="ru-RU" b="0">
+                        <a:effectLst/>
+                        <a:latin typeface="quote-cjk-patch"/>
+                      </a:endParaRPr>
+                    </a:p>
+                  </a:txBody>
+                  <a:tcPr marL="152400" marR="152400" marT="95250" marB="95250" anchor="ctr">
+                    <a:lnL>
+                      <a:noFill/>
+                    </a:lnL>
+                    <a:lnR>
+                      <a:noFill/>
+                    </a:lnR>
+                    <a:lnT>
+                      <a:noFill/>
+                    </a:lnT>
+                    <a:lnB>
+                      <a:noFill/>
+                    </a:lnB>
+                    <a:solidFill>
+                      <a:srgbClr val="FFFFFF"/>
+                    </a:solidFill>
+                  </a:tcPr>
+                </a:tc>
+                <a:tc>
+                  <a:txBody>
+                    <a:bodyPr/>
+                    <a:lstStyle/>
+                    <a:p>
+                      <a:r>
+                        <a:rPr lang="ru-RU" b="0" dirty="0">
+                          <a:effectLst/>
+                          <a:latin typeface="quote-cjk-patch"/>
+                        </a:rPr>
+                        <a:t>Загрузка сети, количество коллизий.</a:t>
+                      </a:r>
+                    </a:p>
+                  </a:txBody>
+                  <a:tcPr marL="152400" marT="95250" marB="95250" anchor="ctr">
+                    <a:lnL>
+                      <a:noFill/>
+                    </a:lnL>
+                    <a:lnR>
+                      <a:noFill/>
+                    </a:lnR>
+                    <a:lnT>
+                      <a:noFill/>
+                    </a:lnT>
+                    <a:lnB>
+                      <a:noFill/>
+                    </a:lnB>
+                    <a:solidFill>
+                      <a:srgbClr val="FFFFFF"/>
+                    </a:solidFill>
+                  </a:tcPr>
+                </a:tc>
+                <a:extLst>
+                  <a:ext uri="{0D108BD9-81ED-4DB2-BD59-A6C34878D82A}">
+                    <a16:rowId xmlns:a16="http://schemas.microsoft.com/office/drawing/2014/main" val="1057049386"/>
+                  </a:ext>
+                </a:extLst>
+              </a:tr>
+            </a:tbl>
+          </a:graphicData>
+        </a:graphic>
+      </p:graphicFrame>
+      <p:sp>
+        <p:nvSpPr>
+          <p:cNvPr id="4" name="Прямоугольник 3"/>
+          <p:cNvSpPr/>
+          <p:nvPr/>
+        </p:nvSpPr>
+        <p:spPr>
+          <a:xfrm>
+            <a:off x="2013438" y="1435656"/>
+            <a:ext cx="8845061" cy="369332"/>
+          </a:xfrm>
+          <a:prstGeom prst="rect">
+            <a:avLst/>
+          </a:prstGeom>
+        </p:spPr>
+        <p:txBody>
+          <a:bodyPr wrap="square">
+            <a:spAutoFit/>
+          </a:bodyPr>
+          <a:lstStyle/>
+          <a:p>
+            <a:r>
+              <a:rPr lang="ru-RU" b="0" i="0" dirty="0" smtClean="0">
+                <a:solidFill>
+                  <a:srgbClr val="0F1115"/>
+                </a:solidFill>
+                <a:effectLst/>
+                <a:latin typeface="quote-cjk-patch"/>
+              </a:rPr>
+              <a:t>Суммарная задержка складывается из фиксированных и переменных величин</a:t>
+            </a:r>
+            <a:endParaRPr lang="ru-RU" dirty="0"/>
+          </a:p>
+        </p:txBody>
+      </p:sp>
+    </p:spTree>
+    <p:extLst>
+      <p:ext uri="{BB962C8B-B14F-4D97-AF65-F5344CB8AC3E}">
+        <p14:creationId xmlns:p14="http://schemas.microsoft.com/office/powerpoint/2010/main" val="378470332"/>
+      </p:ext>
+    </p:extLst>
+  </p:cSld>
+  <p:clrMapOvr>
+    <a:masterClrMapping/>
+  </p:clrMapOvr>
+</p:sld>
+</file>
+
+<file path=ppt/slides/slide7.xml><?xml version="1.0" encoding="utf-8"?>
+<p:sld xmlns:a="http://schemas.openxmlformats.org/drawingml/2006/main" xmlns:r="http://schemas.openxmlformats.org/officeDocument/2006/relationships" xmlns:p="http://schemas.openxmlformats.org/presentationml/2006/main">
+  <p:cSld>
+    <p:spTree>
+      <p:nvGrpSpPr>
+        <p:cNvPr id="1" name=""/>
+        <p:cNvGrpSpPr/>
+        <p:nvPr/>
+      </p:nvGrpSpPr>
+      <p:grpSpPr>
+        <a:xfrm>
+          <a:off x="0" y="0"/>
+          <a:ext cx="0" cy="0"/>
+          <a:chOff x="0" y="0"/>
+          <a:chExt cx="0" cy="0"/>
+        </a:xfrm>
+      </p:grpSpPr>
+      <p:sp>
+        <p:nvSpPr>
+          <p:cNvPr id="2" name="Заголовок 1"/>
+          <p:cNvSpPr>
+            <a:spLocks noGrp="1"/>
+          </p:cNvSpPr>
+          <p:nvPr>
+            <p:ph type="title"/>
+          </p:nvPr>
+        </p:nvSpPr>
+        <p:spPr>
+          <a:xfrm>
+            <a:off x="838200" y="365125"/>
+            <a:ext cx="7584831" cy="1325563"/>
+          </a:xfrm>
+        </p:spPr>
+        <p:txBody>
+          <a:bodyPr/>
+          <a:lstStyle/>
+          <a:p>
+            <a:r>
+              <a:rPr lang="ru-RU" b="1" dirty="0"/>
+              <a:t>Ключевые </a:t>
+            </a:r>
+            <a:r>
+              <a:rPr lang="ru-RU" b="1" dirty="0" smtClean="0"/>
+              <a:t>метры сети</a:t>
+            </a:r>
+            <a:endParaRPr lang="ru-RU" dirty="0"/>
+          </a:p>
+        </p:txBody>
+      </p:sp>
+      <p:sp>
+        <p:nvSpPr>
+          <p:cNvPr id="3" name="Объект 2"/>
+          <p:cNvSpPr>
+            <a:spLocks noGrp="1"/>
+          </p:cNvSpPr>
+          <p:nvPr>
+            <p:ph idx="1"/>
+          </p:nvPr>
+        </p:nvSpPr>
+        <p:spPr/>
+        <p:txBody>
+          <a:bodyPr/>
+          <a:lstStyle/>
+          <a:p>
+            <a:pPr marL="0" indent="0">
+              <a:buNone/>
+            </a:pPr>
+            <a:r>
+              <a:rPr lang="ru-RU" sz="3600" b="1" dirty="0"/>
+              <a:t>Скоростные характеристики:</a:t>
+            </a:r>
+            <a:endParaRPr lang="ru-RU" sz="3600" dirty="0"/>
+          </a:p>
+          <a:p>
+            <a:pPr lvl="1"/>
+            <a:r>
+              <a:rPr lang="ru-RU" sz="3600" b="1" dirty="0"/>
+              <a:t>Средняя скорость </a:t>
+            </a:r>
+            <a:r>
+              <a:rPr lang="ru-RU" sz="3600" b="1" dirty="0" smtClean="0"/>
+              <a:t>:</a:t>
+            </a:r>
+            <a:r>
+              <a:rPr lang="ru-RU" sz="3600" dirty="0"/>
+              <a:t> Долговременный средний показатель.</a:t>
+            </a:r>
+          </a:p>
+          <a:p>
+            <a:pPr lvl="1"/>
+            <a:r>
+              <a:rPr lang="ru-RU" sz="3600" b="1" dirty="0"/>
+              <a:t>Пиковая скорость </a:t>
+            </a:r>
+            <a:r>
+              <a:rPr lang="ru-RU" sz="3600" b="1" dirty="0" smtClean="0"/>
+              <a:t>:</a:t>
+            </a:r>
+            <a:r>
+              <a:rPr lang="ru-RU" sz="3600" dirty="0"/>
+              <a:t> Максимальная мгновенная скорость.</a:t>
+            </a:r>
+          </a:p>
+          <a:p>
+            <a:pPr lvl="1"/>
+            <a:r>
+              <a:rPr lang="ru-RU" sz="3600" b="1" dirty="0"/>
+              <a:t>Пульсация </a:t>
+            </a:r>
+            <a:r>
+              <a:rPr lang="ru-RU" sz="3600" b="1" dirty="0" smtClean="0"/>
+              <a:t>:</a:t>
+            </a:r>
+            <a:r>
+              <a:rPr lang="ru-RU" sz="3600" dirty="0"/>
+              <a:t> Отношение пиковой скорости к средней (важно для веб-серфинга и файлов).</a:t>
+            </a:r>
+          </a:p>
+          <a:p>
+            <a:endParaRPr lang="ru-RU" dirty="0"/>
+          </a:p>
+        </p:txBody>
+      </p:sp>
+    </p:spTree>
+    <p:extLst>
+      <p:ext uri="{BB962C8B-B14F-4D97-AF65-F5344CB8AC3E}">
+        <p14:creationId xmlns:p14="http://schemas.microsoft.com/office/powerpoint/2010/main" val="2628813272"/>
+      </p:ext>
+    </p:extLst>
+  </p:cSld>
+  <p:clrMapOvr>
+    <a:masterClrMapping/>
+  </p:clrMapOvr>
+</p:sld>
+</file>
+
+<file path=ppt/slides/slide8.xml><?xml version="1.0" encoding="utf-8"?>
+<p:sld xmlns:a="http://schemas.openxmlformats.org/drawingml/2006/main" xmlns:r="http://schemas.openxmlformats.org/officeDocument/2006/relationships" xmlns:p="http://schemas.openxmlformats.org/presentationml/2006/main">
+  <p:cSld>
+    <p:spTree>
+      <p:nvGrpSpPr>
+        <p:cNvPr id="1" name=""/>
+        <p:cNvGrpSpPr/>
+        <p:nvPr/>
+      </p:nvGrpSpPr>
+      <p:grpSpPr>
+        <a:xfrm>
+          <a:off x="0" y="0"/>
+          <a:ext cx="0" cy="0"/>
+          <a:chOff x="0" y="0"/>
+          <a:chExt cx="0" cy="0"/>
+        </a:xfrm>
+      </p:grpSpPr>
+      <p:sp>
+        <p:nvSpPr>
+          <p:cNvPr id="2" name="Заголовок 1"/>
+          <p:cNvSpPr>
+            <a:spLocks noGrp="1"/>
+          </p:cNvSpPr>
+          <p:nvPr>
+            <p:ph type="title"/>
+          </p:nvPr>
+        </p:nvSpPr>
+        <p:spPr/>
+        <p:txBody>
+          <a:bodyPr/>
+          <a:lstStyle/>
+          <a:p>
+            <a:r>
+              <a:rPr lang="ru-RU" b="1" dirty="0"/>
+              <a:t>Чувствительность приложений к </a:t>
+            </a:r>
+            <a:r>
+              <a:rPr lang="ru-RU" b="1" dirty="0" smtClean="0"/>
+              <a:t>задержкам</a:t>
+            </a:r>
+            <a:endParaRPr lang="ru-RU" dirty="0"/>
+          </a:p>
+        </p:txBody>
+      </p:sp>
+      <p:graphicFrame>
+        <p:nvGraphicFramePr>
+          <p:cNvPr id="4" name="Объект 3"/>
+          <p:cNvGraphicFramePr>
+            <a:graphicFrameLocks noGrp="1"/>
+          </p:cNvGraphicFramePr>
+          <p:nvPr>
+            <p:ph idx="1"/>
+            <p:extLst>
+              <p:ext uri="{D42A27DB-BD31-4B8C-83A1-F6EECF244321}">
+                <p14:modId xmlns:p14="http://schemas.microsoft.com/office/powerpoint/2010/main" val="477970985"/>
+              </p:ext>
+            </p:extLst>
+          </p:nvPr>
+        </p:nvGraphicFramePr>
+        <p:xfrm>
+          <a:off x="2417887" y="1690688"/>
+          <a:ext cx="7322523" cy="4351338"/>
+        </p:xfrm>
+        <a:graphic>
+          <a:graphicData uri="http://schemas.openxmlformats.org/drawingml/2006/table">
+            <a:tbl>
+              <a:tblPr/>
+              <a:tblGrid>
+                <a:gridCol w="2440841">
+                  <a:extLst>
+                    <a:ext uri="{9D8B030D-6E8A-4147-A177-3AD203B41FA5}">
+                      <a16:colId xmlns:a16="http://schemas.microsoft.com/office/drawing/2014/main" val="265940874"/>
+                    </a:ext>
+                  </a:extLst>
+                </a:gridCol>
+                <a:gridCol w="2440841">
+                  <a:extLst>
+                    <a:ext uri="{9D8B030D-6E8A-4147-A177-3AD203B41FA5}">
+                      <a16:colId xmlns:a16="http://schemas.microsoft.com/office/drawing/2014/main" val="2538373447"/>
+                    </a:ext>
+                  </a:extLst>
+                </a:gridCol>
+                <a:gridCol w="2440841">
+                  <a:extLst>
+                    <a:ext uri="{9D8B030D-6E8A-4147-A177-3AD203B41FA5}">
+                      <a16:colId xmlns:a16="http://schemas.microsoft.com/office/drawing/2014/main" val="3733887250"/>
+                    </a:ext>
+                  </a:extLst>
+                </a:gridCol>
+              </a:tblGrid>
+              <a:tr h="421990">
+                <a:tc>
+                  <a:txBody>
+                    <a:bodyPr/>
+                    <a:lstStyle/>
+                    <a:p>
+                      <a:pPr algn="l"/>
+                      <a:r>
+                        <a:rPr lang="ru-RU" sz="1600" b="0">
+                          <a:effectLst/>
+                          <a:latin typeface="quote-cjk-patch"/>
+                        </a:rPr>
+                        <a:t>Тип (по задержкам)</a:t>
+                      </a:r>
+                    </a:p>
+                  </a:txBody>
+                  <a:tcPr marL="83014" marR="138357" marT="86473" marB="86473" anchor="ctr">
+                    <a:lnL>
+                      <a:noFill/>
+                    </a:lnL>
+                    <a:lnR>
+                      <a:noFill/>
+                    </a:lnR>
+                    <a:lnT>
+                      <a:noFill/>
+                    </a:lnT>
+                    <a:lnB>
+                      <a:noFill/>
+                    </a:lnB>
+                    <a:solidFill>
+                      <a:srgbClr val="FFFFFF"/>
+                    </a:solidFill>
+                  </a:tcPr>
+                </a:tc>
+                <a:tc>
+                  <a:txBody>
+                    <a:bodyPr/>
+                    <a:lstStyle/>
+                    <a:p>
+                      <a:pPr algn="l"/>
+                      <a:r>
+                        <a:rPr lang="ru-RU" sz="1600" b="0">
+                          <a:effectLst/>
+                          <a:latin typeface="quote-cjk-patch"/>
+                        </a:rPr>
+                        <a:t>Примеры</a:t>
+                      </a:r>
+                    </a:p>
+                  </a:txBody>
+                  <a:tcPr marL="138357" marR="138357" marT="86473" marB="86473" anchor="ctr">
+                    <a:lnL>
+                      <a:noFill/>
+                    </a:lnL>
+                    <a:lnR>
+                      <a:noFill/>
+                    </a:lnR>
+                    <a:lnT>
+                      <a:noFill/>
+                    </a:lnT>
+                    <a:lnB>
+                      <a:noFill/>
+                    </a:lnB>
+                    <a:solidFill>
+                      <a:srgbClr val="FFFFFF"/>
+                    </a:solidFill>
+                  </a:tcPr>
+                </a:tc>
+                <a:tc>
+                  <a:txBody>
+                    <a:bodyPr/>
+                    <a:lstStyle/>
+                    <a:p>
+                      <a:pPr algn="l"/>
+                      <a:r>
+                        <a:rPr lang="ru-RU" sz="1600" b="0">
+                          <a:effectLst/>
+                          <a:latin typeface="quote-cjk-patch"/>
+                        </a:rPr>
+                        <a:t>Требования к сети</a:t>
+                      </a:r>
+                    </a:p>
+                  </a:txBody>
+                  <a:tcPr marL="138357" marR="138357" marT="86473" marB="86473" anchor="ctr">
+                    <a:lnL>
+                      <a:noFill/>
+                    </a:lnL>
+                    <a:lnR>
+                      <a:noFill/>
+                    </a:lnR>
+                    <a:lnT>
+                      <a:noFill/>
+                    </a:lnT>
+                    <a:lnB>
+                      <a:noFill/>
+                    </a:lnB>
+                    <a:solidFill>
+                      <a:srgbClr val="FFFFFF"/>
+                    </a:solidFill>
+                  </a:tcPr>
+                </a:tc>
+                <a:extLst>
+                  <a:ext uri="{0D108BD9-81ED-4DB2-BD59-A6C34878D82A}">
+                    <a16:rowId xmlns:a16="http://schemas.microsoft.com/office/drawing/2014/main" val="2673781350"/>
+                  </a:ext>
+                </a:extLst>
+              </a:tr>
+              <a:tr h="671033">
+                <a:tc>
+                  <a:txBody>
+                    <a:bodyPr/>
+                    <a:lstStyle/>
+                    <a:p>
+                      <a:r>
+                        <a:rPr lang="ru-RU" sz="1600" b="1">
+                          <a:effectLst/>
+                          <a:latin typeface="quote-cjk-patch"/>
+                        </a:rPr>
+                        <a:t>Асинхронные</a:t>
+                      </a:r>
+                      <a:endParaRPr lang="ru-RU" sz="1600" b="0">
+                        <a:effectLst/>
+                        <a:latin typeface="quote-cjk-patch"/>
+                      </a:endParaRPr>
+                    </a:p>
+                  </a:txBody>
+                  <a:tcPr marL="83014" marR="138357" marT="86473" marB="86473" anchor="ctr">
+                    <a:lnL>
+                      <a:noFill/>
+                    </a:lnL>
+                    <a:lnR>
+                      <a:noFill/>
+                    </a:lnR>
+                    <a:lnT>
+                      <a:noFill/>
+                    </a:lnT>
+                    <a:lnB>
+                      <a:noFill/>
+                    </a:lnB>
+                    <a:solidFill>
+                      <a:srgbClr val="FFFFFF"/>
+                    </a:solidFill>
+                  </a:tcPr>
+                </a:tc>
+                <a:tc>
+                  <a:txBody>
+                    <a:bodyPr/>
+                    <a:lstStyle/>
+                    <a:p>
+                      <a:r>
+                        <a:rPr lang="ru-RU" sz="1600" b="0">
+                          <a:effectLst/>
+                          <a:latin typeface="quote-cjk-patch"/>
+                        </a:rPr>
+                        <a:t>Электронная почта, </a:t>
+                      </a:r>
+                      <a:r>
+                        <a:rPr lang="en-US" sz="1600" b="0">
+                          <a:effectLst/>
+                          <a:latin typeface="quote-cjk-patch"/>
+                        </a:rPr>
+                        <a:t>FTP</a:t>
+                      </a:r>
+                    </a:p>
+                  </a:txBody>
+                  <a:tcPr marL="138357" marR="138357" marT="86473" marB="86473" anchor="ctr">
+                    <a:lnL>
+                      <a:noFill/>
+                    </a:lnL>
+                    <a:lnR>
+                      <a:noFill/>
+                    </a:lnR>
+                    <a:lnT>
+                      <a:noFill/>
+                    </a:lnT>
+                    <a:lnB>
+                      <a:noFill/>
+                    </a:lnB>
+                    <a:solidFill>
+                      <a:srgbClr val="FFFFFF"/>
+                    </a:solidFill>
+                  </a:tcPr>
+                </a:tc>
+                <a:tc>
+                  <a:txBody>
+                    <a:bodyPr/>
+                    <a:lstStyle/>
+                    <a:p>
+                      <a:r>
+                        <a:rPr lang="ru-RU" sz="1600" b="0">
+                          <a:effectLst/>
+                          <a:latin typeface="quote-cjk-patch"/>
+                        </a:rPr>
+                        <a:t>Низкие. Терпят паузы в секунды.</a:t>
+                      </a:r>
+                    </a:p>
+                  </a:txBody>
+                  <a:tcPr marL="138357" marR="83014" marT="86473" marB="86473" anchor="ctr">
+                    <a:lnL>
+                      <a:noFill/>
+                    </a:lnL>
+                    <a:lnR>
+                      <a:noFill/>
+                    </a:lnR>
+                    <a:lnT>
+                      <a:noFill/>
+                    </a:lnT>
+                    <a:lnB>
+                      <a:noFill/>
+                    </a:lnB>
+                    <a:solidFill>
+                      <a:srgbClr val="FFFFFF"/>
+                    </a:solidFill>
+                  </a:tcPr>
+                </a:tc>
+                <a:extLst>
+                  <a:ext uri="{0D108BD9-81ED-4DB2-BD59-A6C34878D82A}">
+                    <a16:rowId xmlns:a16="http://schemas.microsoft.com/office/drawing/2014/main" val="3659504191"/>
+                  </a:ext>
+                </a:extLst>
+              </a:tr>
+              <a:tr h="920076">
+                <a:tc>
+                  <a:txBody>
+                    <a:bodyPr/>
+                    <a:lstStyle/>
+                    <a:p>
+                      <a:r>
+                        <a:rPr lang="ru-RU" sz="1600" b="1">
+                          <a:effectLst/>
+                          <a:latin typeface="quote-cjk-patch"/>
+                        </a:rPr>
+                        <a:t>Интерактивные</a:t>
+                      </a:r>
+                      <a:endParaRPr lang="ru-RU" sz="1600" b="0">
+                        <a:effectLst/>
+                        <a:latin typeface="quote-cjk-patch"/>
+                      </a:endParaRPr>
+                    </a:p>
+                  </a:txBody>
+                  <a:tcPr marL="83014" marR="138357" marT="86473" marB="86473" anchor="ctr">
+                    <a:lnL>
+                      <a:noFill/>
+                    </a:lnL>
+                    <a:lnR>
+                      <a:noFill/>
+                    </a:lnR>
+                    <a:lnT>
+                      <a:noFill/>
+                    </a:lnT>
+                    <a:lnB>
+                      <a:noFill/>
+                    </a:lnB>
+                    <a:solidFill>
+                      <a:srgbClr val="FFFFFF"/>
+                    </a:solidFill>
+                  </a:tcPr>
+                </a:tc>
+                <a:tc>
+                  <a:txBody>
+                    <a:bodyPr/>
+                    <a:lstStyle/>
+                    <a:p>
+                      <a:r>
+                        <a:rPr lang="ru-RU" sz="1600" b="0" dirty="0">
+                          <a:effectLst/>
+                          <a:latin typeface="quote-cjk-patch"/>
+                        </a:rPr>
+                        <a:t>Текстовый редактор (удаленный), </a:t>
+                      </a:r>
+                      <a:r>
+                        <a:rPr lang="en-US" sz="1600" b="0" dirty="0">
+                          <a:effectLst/>
+                          <a:latin typeface="quote-cjk-patch"/>
+                        </a:rPr>
+                        <a:t>Telnet</a:t>
+                      </a:r>
+                    </a:p>
+                  </a:txBody>
+                  <a:tcPr marL="138357" marR="138357" marT="86473" marB="86473" anchor="ctr">
+                    <a:lnL>
+                      <a:noFill/>
+                    </a:lnL>
+                    <a:lnR>
+                      <a:noFill/>
+                    </a:lnR>
+                    <a:lnT>
+                      <a:noFill/>
+                    </a:lnT>
+                    <a:lnB>
+                      <a:noFill/>
+                    </a:lnB>
+                    <a:solidFill>
+                      <a:srgbClr val="FFFFFF"/>
+                    </a:solidFill>
+                  </a:tcPr>
+                </a:tc>
+                <a:tc>
+                  <a:txBody>
+                    <a:bodyPr/>
+                    <a:lstStyle/>
+                    <a:p>
+                      <a:r>
+                        <a:rPr lang="ru-RU" sz="1600" b="0">
+                          <a:effectLst/>
+                          <a:latin typeface="quote-cjk-patch"/>
+                        </a:rPr>
+                        <a:t>Средние. Задержка заметна, но не смертельна.</a:t>
+                      </a:r>
+                    </a:p>
+                  </a:txBody>
+                  <a:tcPr marL="138357" marR="83014" marT="86473" marB="86473" anchor="ctr">
+                    <a:lnL>
+                      <a:noFill/>
+                    </a:lnL>
+                    <a:lnR>
+                      <a:noFill/>
+                    </a:lnR>
+                    <a:lnT>
+                      <a:noFill/>
+                    </a:lnT>
+                    <a:lnB>
+                      <a:noFill/>
+                    </a:lnB>
+                    <a:solidFill>
+                      <a:srgbClr val="FFFFFF"/>
+                    </a:solidFill>
+                  </a:tcPr>
+                </a:tc>
+                <a:extLst>
+                  <a:ext uri="{0D108BD9-81ED-4DB2-BD59-A6C34878D82A}">
+                    <a16:rowId xmlns:a16="http://schemas.microsoft.com/office/drawing/2014/main" val="540420025"/>
+                  </a:ext>
+                </a:extLst>
+              </a:tr>
+              <a:tr h="1418163">
+                <a:tc>
+                  <a:txBody>
+                    <a:bodyPr/>
+                    <a:lstStyle/>
+                    <a:p>
+                      <a:r>
+                        <a:rPr lang="ru-RU" sz="1600" b="1">
+                          <a:effectLst/>
+                          <a:latin typeface="quote-cjk-patch"/>
+                        </a:rPr>
+                        <a:t>Изохронные</a:t>
+                      </a:r>
+                      <a:endParaRPr lang="ru-RU" sz="1600" b="0">
+                        <a:effectLst/>
+                        <a:latin typeface="quote-cjk-patch"/>
+                      </a:endParaRPr>
+                    </a:p>
+                  </a:txBody>
+                  <a:tcPr marL="83014" marR="138357" marT="86473" marB="86473" anchor="ctr">
+                    <a:lnL>
+                      <a:noFill/>
+                    </a:lnL>
+                    <a:lnR>
+                      <a:noFill/>
+                    </a:lnR>
+                    <a:lnT>
+                      <a:noFill/>
+                    </a:lnT>
+                    <a:lnB>
+                      <a:noFill/>
+                    </a:lnB>
+                    <a:solidFill>
+                      <a:srgbClr val="FFFFFF"/>
+                    </a:solidFill>
+                  </a:tcPr>
+                </a:tc>
+                <a:tc>
+                  <a:txBody>
+                    <a:bodyPr/>
+                    <a:lstStyle/>
+                    <a:p>
+                      <a:r>
+                        <a:rPr lang="en-US" sz="1600" b="0">
+                          <a:effectLst/>
+                          <a:latin typeface="quote-cjk-patch"/>
+                        </a:rPr>
+                        <a:t>IP-</a:t>
+                      </a:r>
+                      <a:r>
+                        <a:rPr lang="ru-RU" sz="1600" b="0">
+                          <a:effectLst/>
+                          <a:latin typeface="quote-cjk-patch"/>
+                        </a:rPr>
+                        <a:t>телефония, Видеоконференция</a:t>
+                      </a:r>
+                    </a:p>
+                  </a:txBody>
+                  <a:tcPr marL="138357" marR="138357" marT="86473" marB="86473" anchor="ctr">
+                    <a:lnL>
+                      <a:noFill/>
+                    </a:lnL>
+                    <a:lnR>
+                      <a:noFill/>
+                    </a:lnR>
+                    <a:lnT>
+                      <a:noFill/>
+                    </a:lnT>
+                    <a:lnB>
+                      <a:noFill/>
+                    </a:lnB>
+                    <a:solidFill>
+                      <a:srgbClr val="FFFFFF"/>
+                    </a:solidFill>
+                  </a:tcPr>
+                </a:tc>
+                <a:tc>
+                  <a:txBody>
+                    <a:bodyPr/>
+                    <a:lstStyle/>
+                    <a:p>
+                      <a:r>
+                        <a:rPr lang="ru-RU" sz="1600" b="1">
+                          <a:effectLst/>
+                          <a:latin typeface="quote-cjk-patch"/>
+                        </a:rPr>
+                        <a:t>Жесткие</a:t>
+                      </a:r>
+                      <a:r>
+                        <a:rPr lang="ru-RU" sz="1600" b="0">
+                          <a:effectLst/>
+                          <a:latin typeface="quote-cjk-patch"/>
+                        </a:rPr>
+                        <a:t> (менее 150 мс). Превышение порога разрушает связь.</a:t>
+                      </a:r>
+                    </a:p>
+                  </a:txBody>
+                  <a:tcPr marL="138357" marR="83014" marT="86473" marB="86473" anchor="ctr">
+                    <a:lnL>
+                      <a:noFill/>
+                    </a:lnL>
+                    <a:lnR>
+                      <a:noFill/>
+                    </a:lnR>
+                    <a:lnT>
+                      <a:noFill/>
+                    </a:lnT>
+                    <a:lnB>
+                      <a:noFill/>
+                    </a:lnB>
+                    <a:solidFill>
+                      <a:srgbClr val="FFFFFF"/>
+                    </a:solidFill>
+                  </a:tcPr>
+                </a:tc>
+                <a:extLst>
+                  <a:ext uri="{0D108BD9-81ED-4DB2-BD59-A6C34878D82A}">
+                    <a16:rowId xmlns:a16="http://schemas.microsoft.com/office/drawing/2014/main" val="3046351650"/>
+                  </a:ext>
+                </a:extLst>
+              </a:tr>
+              <a:tr h="920076">
+                <a:tc>
+                  <a:txBody>
+                    <a:bodyPr/>
+                    <a:lstStyle/>
+                    <a:p>
+                      <a:r>
+                        <a:rPr lang="ru-RU" sz="1600" b="1" dirty="0">
+                          <a:effectLst/>
+                          <a:latin typeface="quote-cjk-patch"/>
+                        </a:rPr>
+                        <a:t>Сверхчувствительные</a:t>
+                      </a:r>
+                      <a:endParaRPr lang="ru-RU" sz="1600" b="0" dirty="0">
+                        <a:effectLst/>
+                        <a:latin typeface="quote-cjk-patch"/>
+                      </a:endParaRPr>
+                    </a:p>
+                  </a:txBody>
+                  <a:tcPr marL="83014" marR="138357" marT="86473" marB="86473" anchor="ctr">
+                    <a:lnL>
+                      <a:noFill/>
+                    </a:lnL>
+                    <a:lnR>
+                      <a:noFill/>
+                    </a:lnR>
+                    <a:lnT>
+                      <a:noFill/>
+                    </a:lnT>
+                    <a:lnB>
+                      <a:noFill/>
+                    </a:lnB>
+                    <a:solidFill>
+                      <a:srgbClr val="FFFFFF"/>
+                    </a:solidFill>
+                  </a:tcPr>
+                </a:tc>
+                <a:tc>
+                  <a:txBody>
+                    <a:bodyPr/>
+                    <a:lstStyle/>
+                    <a:p>
+                      <a:r>
+                        <a:rPr lang="ru-RU" sz="1600" b="0" dirty="0">
+                          <a:effectLst/>
+                          <a:latin typeface="quote-cjk-patch"/>
+                        </a:rPr>
+                        <a:t>Управление роботами/транспортом</a:t>
+                      </a:r>
+                    </a:p>
+                  </a:txBody>
+                  <a:tcPr marL="138357" marR="138357" marT="86473" marB="86473" anchor="ctr">
+                    <a:lnL>
+                      <a:noFill/>
+                    </a:lnL>
+                    <a:lnR>
+                      <a:noFill/>
+                    </a:lnR>
+                    <a:lnT>
+                      <a:noFill/>
+                    </a:lnT>
+                    <a:lnB>
+                      <a:noFill/>
+                    </a:lnB>
+                    <a:solidFill>
+                      <a:srgbClr val="FFFFFF"/>
+                    </a:solidFill>
+                  </a:tcPr>
+                </a:tc>
+                <a:tc>
+                  <a:txBody>
+                    <a:bodyPr/>
+                    <a:lstStyle/>
+                    <a:p>
+                      <a:r>
+                        <a:rPr lang="ru-RU" sz="1600" b="0" dirty="0">
+                          <a:effectLst/>
+                          <a:latin typeface="quote-cjk-patch"/>
+                        </a:rPr>
+                        <a:t>Минимальные. Опоздание сигнала = авария.</a:t>
+                      </a:r>
+                    </a:p>
+                  </a:txBody>
+                  <a:tcPr marL="138357" marR="83014" marT="86473" marB="86473" anchor="ctr">
+                    <a:lnL>
+                      <a:noFill/>
+                    </a:lnL>
+                    <a:lnR>
+                      <a:noFill/>
+                    </a:lnR>
+                    <a:lnT>
+                      <a:noFill/>
+                    </a:lnT>
+                    <a:lnB>
+                      <a:noFill/>
+                    </a:lnB>
+                    <a:solidFill>
+                      <a:srgbClr val="FFFFFF"/>
+                    </a:solidFill>
+                  </a:tcPr>
+                </a:tc>
+                <a:extLst>
+                  <a:ext uri="{0D108BD9-81ED-4DB2-BD59-A6C34878D82A}">
+                    <a16:rowId xmlns:a16="http://schemas.microsoft.com/office/drawing/2014/main" val="3221024052"/>
+                  </a:ext>
+                </a:extLst>
+              </a:tr>
+            </a:tbl>
+          </a:graphicData>
+        </a:graphic>
+      </p:graphicFrame>
+      <p:sp>
+        <p:nvSpPr>
+          <p:cNvPr id="5" name="Прямоугольник 4"/>
+          <p:cNvSpPr/>
+          <p:nvPr/>
+        </p:nvSpPr>
+        <p:spPr>
+          <a:xfrm>
+            <a:off x="4681189" y="6311900"/>
+            <a:ext cx="2829621" cy="369332"/>
+          </a:xfrm>
+          <a:prstGeom prst="rect">
+            <a:avLst/>
+          </a:prstGeom>
+        </p:spPr>
+        <p:txBody>
+          <a:bodyPr wrap="none">
+            <a:spAutoFit/>
+          </a:bodyPr>
+          <a:lstStyle/>
+          <a:p>
+            <a:r>
+              <a:rPr lang="ru-RU" b="0" i="1" dirty="0" smtClean="0">
+                <a:solidFill>
+                  <a:srgbClr val="0F1115"/>
+                </a:solidFill>
+                <a:effectLst/>
+                <a:latin typeface="quote-cjk-patch"/>
+              </a:rPr>
+              <a:t>Классификация </a:t>
+            </a:r>
+            <a:r>
+              <a:rPr lang="ru-RU" b="0" i="1" dirty="0" err="1" smtClean="0">
+                <a:solidFill>
+                  <a:srgbClr val="0F1115"/>
+                </a:solidFill>
+                <a:effectLst/>
+                <a:latin typeface="quote-cjk-patch"/>
+              </a:rPr>
+              <a:t>Олифер</a:t>
+            </a:r>
+            <a:endParaRPr lang="ru-RU" dirty="0"/>
+          </a:p>
+        </p:txBody>
+      </p:sp>
+    </p:spTree>
+    <p:extLst>
+      <p:ext uri="{BB962C8B-B14F-4D97-AF65-F5344CB8AC3E}">
+        <p14:creationId xmlns:p14="http://schemas.microsoft.com/office/powerpoint/2010/main" val="2798462433"/>
+      </p:ext>
+    </p:extLst>
+  </p:cSld>
+  <p:clrMapOvr>
+    <a:masterClrMapping/>
+  </p:clrMapOvr>
+</p:sld>
+</file>
+
+<file path=ppt/slides/slide9.xml><?xml version="1.0" encoding="utf-8"?>
+<p:sld xmlns:a="http://schemas.openxmlformats.org/drawingml/2006/main" xmlns:r="http://schemas.openxmlformats.org/officeDocument/2006/relationships" xmlns:p="http://schemas.openxmlformats.org/presentationml/2006/main">
+  <p:cSld>
+    <p:spTree>
+      <p:nvGrpSpPr>
+        <p:cNvPr id="1" name=""/>
+        <p:cNvGrpSpPr/>
+        <p:nvPr/>
+      </p:nvGrpSpPr>
+      <p:grpSpPr>
+        <a:xfrm>
+          <a:off x="0" y="0"/>
+          <a:ext cx="0" cy="0"/>
+          <a:chOff x="0" y="0"/>
+          <a:chExt cx="0" cy="0"/>
+        </a:xfrm>
+      </p:grpSpPr>
+      <p:sp>
+        <p:nvSpPr>
+          <p:cNvPr id="2" name="Заголовок 1"/>
+          <p:cNvSpPr>
+            <a:spLocks noGrp="1"/>
+          </p:cNvSpPr>
+          <p:nvPr>
+            <p:ph type="title"/>
+          </p:nvPr>
+        </p:nvSpPr>
+        <p:spPr/>
+        <p:txBody>
+          <a:bodyPr/>
+          <a:lstStyle/>
+          <a:p>
+            <a:r>
+              <a:rPr lang="ru-RU" b="1" dirty="0"/>
+              <a:t>Чувствительность к потерям </a:t>
+            </a:r>
+            <a:r>
+              <a:rPr lang="ru-RU" b="1" dirty="0" smtClean="0"/>
+              <a:t>пакетов</a:t>
+            </a:r>
+            <a:endParaRPr lang="ru-RU" dirty="0"/>
+          </a:p>
+        </p:txBody>
+      </p:sp>
+      <p:sp>
+        <p:nvSpPr>
+          <p:cNvPr id="3" name="Объект 2"/>
+          <p:cNvSpPr>
+            <a:spLocks noGrp="1"/>
+          </p:cNvSpPr>
+          <p:nvPr>
+            <p:ph idx="1"/>
+          </p:nvPr>
+        </p:nvSpPr>
+        <p:spPr>
+          <a:xfrm>
+            <a:off x="1374531" y="1852002"/>
+            <a:ext cx="10515600" cy="4351338"/>
+          </a:xfrm>
+        </p:spPr>
+        <p:txBody>
+          <a:bodyPr/>
+          <a:lstStyle/>
+          <a:p>
+            <a:pPr marL="0" indent="0">
+              <a:buNone/>
+            </a:pPr>
+            <a:r>
+              <a:rPr lang="ru-RU" dirty="0"/>
+              <a:t>Не все данные одинаково критичны к потерям:</a:t>
+            </a:r>
+          </a:p>
+          <a:p>
+            <a:pPr marL="0" indent="0">
+              <a:buNone/>
+            </a:pPr>
+            <a:r>
+              <a:rPr lang="ru-RU" b="1" dirty="0"/>
+              <a:t>Чувствительные (</a:t>
+            </a:r>
+            <a:r>
+              <a:rPr lang="ru-RU" b="1" dirty="0" err="1"/>
+              <a:t>Non-elastic</a:t>
+            </a:r>
+            <a:r>
+              <a:rPr lang="ru-RU" b="1" dirty="0"/>
+              <a:t>):</a:t>
+            </a:r>
+            <a:endParaRPr lang="ru-RU" dirty="0"/>
+          </a:p>
+          <a:p>
+            <a:pPr lvl="1"/>
+            <a:r>
+              <a:rPr lang="ru-RU" i="1" dirty="0"/>
+              <a:t>Тип данных:</a:t>
+            </a:r>
+            <a:r>
+              <a:rPr lang="ru-RU" dirty="0"/>
+              <a:t> Архивы, программы, текст, базы данных.</a:t>
+            </a:r>
+          </a:p>
+          <a:p>
+            <a:pPr lvl="1"/>
+            <a:r>
+              <a:rPr lang="ru-RU" i="1" dirty="0"/>
+              <a:t>Реакция:</a:t>
+            </a:r>
+            <a:r>
+              <a:rPr lang="ru-RU" dirty="0"/>
+              <a:t> Даже потеря одного байта -&gt; Файл бесполезен.</a:t>
+            </a:r>
+          </a:p>
+          <a:p>
+            <a:pPr lvl="1"/>
+            <a:r>
+              <a:rPr lang="ru-RU" i="1" dirty="0"/>
+              <a:t>Сервис:</a:t>
+            </a:r>
+            <a:r>
+              <a:rPr lang="ru-RU" dirty="0"/>
+              <a:t> Необходима 100% доставка (TCP</a:t>
+            </a:r>
+            <a:r>
+              <a:rPr lang="ru-RU" dirty="0" smtClean="0"/>
+              <a:t>).</a:t>
+            </a:r>
+          </a:p>
+          <a:p>
+            <a:pPr lvl="1"/>
+            <a:endParaRPr lang="ru-RU" dirty="0"/>
+          </a:p>
+          <a:p>
+            <a:pPr marL="0" indent="0">
+              <a:buNone/>
+            </a:pPr>
+            <a:r>
+              <a:rPr lang="ru-RU" b="1" dirty="0"/>
+              <a:t>Устойчивые (</a:t>
+            </a:r>
+            <a:r>
+              <a:rPr lang="ru-RU" b="1" dirty="0" err="1"/>
+              <a:t>Elastic</a:t>
+            </a:r>
+            <a:r>
+              <a:rPr lang="ru-RU" b="1" dirty="0"/>
+              <a:t> / </a:t>
+            </a:r>
+            <a:r>
+              <a:rPr lang="ru-RU" b="1" dirty="0" err="1"/>
+              <a:t>Loss-Tolerant</a:t>
+            </a:r>
+            <a:r>
+              <a:rPr lang="ru-RU" b="1" dirty="0"/>
+              <a:t>):</a:t>
+            </a:r>
+            <a:endParaRPr lang="ru-RU" dirty="0"/>
+          </a:p>
+          <a:p>
+            <a:pPr lvl="1"/>
+            <a:r>
+              <a:rPr lang="ru-RU" i="1" dirty="0"/>
+              <a:t>Тип данных:</a:t>
+            </a:r>
+            <a:r>
+              <a:rPr lang="ru-RU" dirty="0"/>
+              <a:t> Голос, видео (мультимедиа).</a:t>
+            </a:r>
+          </a:p>
+          <a:p>
+            <a:pPr lvl="1"/>
+            <a:r>
+              <a:rPr lang="ru-RU" i="1" dirty="0"/>
+              <a:t>Реакция:</a:t>
+            </a:r>
+            <a:r>
+              <a:rPr lang="ru-RU" dirty="0"/>
+              <a:t> Потеря одного пакета может быть скрыта интерполяцией.</a:t>
+            </a:r>
+          </a:p>
+          <a:p>
+            <a:pPr lvl="1"/>
+            <a:r>
+              <a:rPr lang="ru-RU" i="1" dirty="0"/>
+              <a:t>Порог:</a:t>
+            </a:r>
+            <a:r>
+              <a:rPr lang="ru-RU" dirty="0"/>
+              <a:t> Допустимо до 1-5% потерь (без критического ухудшения качества</a:t>
+            </a:r>
+            <a:r>
+              <a:rPr lang="ru-RU" dirty="0" smtClean="0"/>
+              <a:t>)</a:t>
+            </a:r>
+            <a:endParaRPr lang="ru-RU" dirty="0"/>
+          </a:p>
+        </p:txBody>
+      </p:sp>
+    </p:spTree>
+    <p:extLst>
+      <p:ext uri="{BB962C8B-B14F-4D97-AF65-F5344CB8AC3E}">
+        <p14:creationId xmlns:p14="http://schemas.microsoft.com/office/powerpoint/2010/main" val="768990590"/>
       </p:ext>
     </p:extLst>
   </p:cSld>
